--- a/test.pptx
+++ b/test.pptx
@@ -5,7 +5,7 @@
     <p:sldMasterId id="2147483648" r:id="rId1"/>
   </p:sldMasterIdLst>
   <p:notesMasterIdLst>
-    <p:notesMasterId r:id="rId8"/>
+    <p:notesMasterId r:id="rId9"/>
   </p:notesMasterIdLst>
   <p:sldIdLst>
     <p:sldId id="256" r:id="rId2"/>
@@ -14,6 +14,7 @@
     <p:sldId id="261" r:id="rId5"/>
     <p:sldId id="258" r:id="rId6"/>
     <p:sldId id="262" r:id="rId7"/>
+    <p:sldId id="263" r:id="rId8"/>
   </p:sldIdLst>
   <p:sldSz cx="12192000" cy="6858000"/>
   <p:notesSz cx="6858000" cy="9144000"/>
@@ -123,1270 +124,9 @@
 <file path=ppt/revisionInfo.xml><?xml version="1.0" encoding="utf-8"?>
 <p1510:revInfo xmlns:a="http://schemas.openxmlformats.org/drawingml/2006/main" xmlns:r="http://schemas.openxmlformats.org/officeDocument/2006/relationships" xmlns:p1510="http://schemas.microsoft.com/office/powerpoint/2015/10/main">
   <p1510:revLst>
-    <p1510:client id="{AEEF08EC-FC52-434E-AD42-3930277B5EC8}" v="3" dt="2026-10-02T16:01:21.825"/>
+    <p1510:client id="{AEEF08EC-FC52-434E-AD42-3930277B5EC8}" v="7" dt="2026-10-05T08:07:02.226"/>
   </p1510:revLst>
 </p1510:revInfo>
-</file>
-
-<file path=ppt/changesInfos/changesInfo1.xml><?xml version="1.0" encoding="utf-8"?>
-<pc:chgInfo xmlns:a="http://schemas.openxmlformats.org/drawingml/2006/main" xmlns:r="http://schemas.openxmlformats.org/officeDocument/2006/relationships" xmlns:ac="http://schemas.microsoft.com/office/drawing/2013/main/command" xmlns:pc="http://schemas.microsoft.com/office/powerpoint/2013/main/command">
-  <pc:docChgLst>
-    <pc:chgData name="Eternal Centurion" userId="e8763818eec01546" providerId="LiveId" clId="{FA74A64B-E685-5E1D-9B0A-7172FA47819C}"/>
-    <pc:docChg chg="undo custSel addSld modSld modNotesMaster">
-      <pc:chgData name="Eternal Centurion" userId="e8763818eec01546" providerId="LiveId" clId="{FA74A64B-E685-5E1D-9B0A-7172FA47819C}" dt="2026-10-01T21:31:16.964" v="24" actId="26606"/>
-      <pc:docMkLst>
-        <pc:docMk/>
-      </pc:docMkLst>
-      <pc:sldChg chg="modSp add mod modNotes">
-        <pc:chgData name="Eternal Centurion" userId="e8763818eec01546" providerId="LiveId" clId="{FA74A64B-E685-5E1D-9B0A-7172FA47819C}" dt="2026-10-01T21:30:58.482" v="23" actId="26606"/>
-        <pc:sldMkLst>
-          <pc:docMk/>
-          <pc:sldMk cId="0" sldId="258"/>
-        </pc:sldMkLst>
-        <pc:spChg chg="mod">
-          <ac:chgData name="Eternal Centurion" userId="e8763818eec01546" providerId="LiveId" clId="{FA74A64B-E685-5E1D-9B0A-7172FA47819C}" dt="2026-10-01T21:28:51.246" v="19" actId="26606"/>
-          <ac:spMkLst>
-            <pc:docMk/>
-            <pc:sldMk cId="0" sldId="258"/>
-            <ac:spMk id="29" creationId="{00000000-0000-0000-0000-000000000000}"/>
-          </ac:spMkLst>
-        </pc:spChg>
-        <pc:spChg chg="mod">
-          <ac:chgData name="Eternal Centurion" userId="e8763818eec01546" providerId="LiveId" clId="{FA74A64B-E685-5E1D-9B0A-7172FA47819C}" dt="2026-10-01T21:28:51.246" v="19" actId="26606"/>
-          <ac:spMkLst>
-            <pc:docMk/>
-            <pc:sldMk cId="0" sldId="258"/>
-            <ac:spMk id="31" creationId="{00000000-0000-0000-0000-000000000000}"/>
-          </ac:spMkLst>
-        </pc:spChg>
-        <pc:spChg chg="mod">
-          <ac:chgData name="Eternal Centurion" userId="e8763818eec01546" providerId="LiveId" clId="{FA74A64B-E685-5E1D-9B0A-7172FA47819C}" dt="2026-10-01T20:41:19.190" v="13" actId="207"/>
-          <ac:spMkLst>
-            <pc:docMk/>
-            <pc:sldMk cId="0" sldId="258"/>
-            <ac:spMk id="35" creationId="{00000000-0000-0000-0000-000000000000}"/>
-          </ac:spMkLst>
-        </pc:spChg>
-        <pc:spChg chg="mod">
-          <ac:chgData name="Eternal Centurion" userId="e8763818eec01546" providerId="LiveId" clId="{FA74A64B-E685-5E1D-9B0A-7172FA47819C}" dt="2026-10-01T20:41:26.656" v="14" actId="207"/>
-          <ac:spMkLst>
-            <pc:docMk/>
-            <pc:sldMk cId="0" sldId="258"/>
-            <ac:spMk id="39" creationId="{00000000-0000-0000-0000-000000000000}"/>
-          </ac:spMkLst>
-        </pc:spChg>
-        <pc:spChg chg="mod">
-          <ac:chgData name="Eternal Centurion" userId="e8763818eec01546" providerId="LiveId" clId="{FA74A64B-E685-5E1D-9B0A-7172FA47819C}" dt="2026-10-01T20:21:30.696" v="1" actId="26606"/>
-          <ac:spMkLst>
-            <pc:docMk/>
-            <pc:sldMk cId="0" sldId="258"/>
-            <ac:spMk id="40" creationId="{00000000-0000-0000-0000-000000000000}"/>
-          </ac:spMkLst>
-        </pc:spChg>
-        <pc:spChg chg="mod">
-          <ac:chgData name="Eternal Centurion" userId="e8763818eec01546" providerId="LiveId" clId="{FA74A64B-E685-5E1D-9B0A-7172FA47819C}" dt="2026-10-01T20:21:30.696" v="1" actId="26606"/>
-          <ac:spMkLst>
-            <pc:docMk/>
-            <pc:sldMk cId="0" sldId="258"/>
-            <ac:spMk id="42" creationId="{00000000-0000-0000-0000-000000000000}"/>
-          </ac:spMkLst>
-        </pc:spChg>
-        <pc:spChg chg="mod">
-          <ac:chgData name="Eternal Centurion" userId="e8763818eec01546" providerId="LiveId" clId="{FA74A64B-E685-5E1D-9B0A-7172FA47819C}" dt="2026-10-01T20:41:34.021" v="15" actId="207"/>
-          <ac:spMkLst>
-            <pc:docMk/>
-            <pc:sldMk cId="0" sldId="258"/>
-            <ac:spMk id="43" creationId="{00000000-0000-0000-0000-000000000000}"/>
-          </ac:spMkLst>
-        </pc:spChg>
-        <pc:spChg chg="mod">
-          <ac:chgData name="Eternal Centurion" userId="e8763818eec01546" providerId="LiveId" clId="{FA74A64B-E685-5E1D-9B0A-7172FA47819C}" dt="2026-10-01T21:28:51.246" v="19" actId="26606"/>
-          <ac:spMkLst>
-            <pc:docMk/>
-            <pc:sldMk cId="0" sldId="258"/>
-            <ac:spMk id="45" creationId="{00000000-0000-0000-0000-000000000000}"/>
-          </ac:spMkLst>
-        </pc:spChg>
-        <pc:spChg chg="mod">
-          <ac:chgData name="Eternal Centurion" userId="e8763818eec01546" providerId="LiveId" clId="{FA74A64B-E685-5E1D-9B0A-7172FA47819C}" dt="2026-10-01T20:42:00.104" v="18" actId="207"/>
-          <ac:spMkLst>
-            <pc:docMk/>
-            <pc:sldMk cId="0" sldId="258"/>
-            <ac:spMk id="47" creationId="{00000000-0000-0000-0000-000000000000}"/>
-          </ac:spMkLst>
-        </pc:spChg>
-        <pc:spChg chg="mod">
-          <ac:chgData name="Eternal Centurion" userId="e8763818eec01546" providerId="LiveId" clId="{FA74A64B-E685-5E1D-9B0A-7172FA47819C}" dt="2026-10-01T21:28:51.246" v="19" actId="26606"/>
-          <ac:spMkLst>
-            <pc:docMk/>
-            <pc:sldMk cId="0" sldId="258"/>
-            <ac:spMk id="49" creationId="{00000000-0000-0000-0000-000000000000}"/>
-          </ac:spMkLst>
-        </pc:spChg>
-        <pc:spChg chg="mod">
-          <ac:chgData name="Eternal Centurion" userId="e8763818eec01546" providerId="LiveId" clId="{FA74A64B-E685-5E1D-9B0A-7172FA47819C}" dt="2026-10-01T20:41:54.706" v="17" actId="207"/>
-          <ac:spMkLst>
-            <pc:docMk/>
-            <pc:sldMk cId="0" sldId="258"/>
-            <ac:spMk id="51" creationId="{00000000-0000-0000-0000-000000000000}"/>
-          </ac:spMkLst>
-        </pc:spChg>
-        <pc:spChg chg="mod">
-          <ac:chgData name="Eternal Centurion" userId="e8763818eec01546" providerId="LiveId" clId="{FA74A64B-E685-5E1D-9B0A-7172FA47819C}" dt="2026-10-01T21:28:51.246" v="19" actId="26606"/>
-          <ac:spMkLst>
-            <pc:docMk/>
-            <pc:sldMk cId="0" sldId="258"/>
-            <ac:spMk id="53" creationId="{00000000-0000-0000-0000-000000000000}"/>
-          </ac:spMkLst>
-        </pc:spChg>
-        <pc:spChg chg="mod">
-          <ac:chgData name="Eternal Centurion" userId="e8763818eec01546" providerId="LiveId" clId="{FA74A64B-E685-5E1D-9B0A-7172FA47819C}" dt="2026-10-01T20:41:38.606" v="16" actId="207"/>
-          <ac:spMkLst>
-            <pc:docMk/>
-            <pc:sldMk cId="0" sldId="258"/>
-            <ac:spMk id="63" creationId="{00000000-0000-0000-0000-000000000000}"/>
-          </ac:spMkLst>
-        </pc:spChg>
-        <pc:spChg chg="mod">
-          <ac:chgData name="Eternal Centurion" userId="e8763818eec01546" providerId="LiveId" clId="{FA74A64B-E685-5E1D-9B0A-7172FA47819C}" dt="2026-10-01T21:30:58.482" v="23" actId="26606"/>
-          <ac:spMkLst>
-            <pc:docMk/>
-            <pc:sldMk cId="0" sldId="258"/>
-            <ac:spMk id="65" creationId="{00000000-0000-0000-0000-000000000000}"/>
-          </ac:spMkLst>
-        </pc:spChg>
-        <pc:cxnChg chg="mod">
-          <ac:chgData name="Eternal Centurion" userId="e8763818eec01546" providerId="LiveId" clId="{FA74A64B-E685-5E1D-9B0A-7172FA47819C}" dt="2026-10-01T20:21:51.675" v="2" actId="26606"/>
-          <ac:cxnSpMkLst>
-            <pc:docMk/>
-            <pc:sldMk cId="0" sldId="258"/>
-            <ac:cxnSpMk id="3" creationId="{00000000-0000-0000-0000-000000000000}"/>
-          </ac:cxnSpMkLst>
-        </pc:cxnChg>
-        <pc:cxnChg chg="mod">
-          <ac:chgData name="Eternal Centurion" userId="e8763818eec01546" providerId="LiveId" clId="{FA74A64B-E685-5E1D-9B0A-7172FA47819C}" dt="2026-10-01T20:21:51.675" v="2" actId="26606"/>
-          <ac:cxnSpMkLst>
-            <pc:docMk/>
-            <pc:sldMk cId="0" sldId="258"/>
-            <ac:cxnSpMk id="32" creationId="{00000000-0000-0000-0000-000000000000}"/>
-          </ac:cxnSpMkLst>
-        </pc:cxnChg>
-      </pc:sldChg>
-      <pc:sldChg chg="new">
-        <pc:chgData name="Eternal Centurion" userId="e8763818eec01546" providerId="LiveId" clId="{FA74A64B-E685-5E1D-9B0A-7172FA47819C}" dt="2026-10-01T20:25:24.372" v="6" actId="680"/>
-        <pc:sldMkLst>
-          <pc:docMk/>
-          <pc:sldMk cId="2088778080" sldId="259"/>
-        </pc:sldMkLst>
-      </pc:sldChg>
-    </pc:docChg>
-  </pc:docChgLst>
-  <pc:docChgLst>
-    <pc:chgData name="Eternal Centurion" userId="e8763818eec01546" providerId="LiveId" clId="{3F82CCBD-19C3-4A10-8C8B-FF6F78865329}"/>
-    <pc:docChg chg="undo redo custSel addSld delSld modSld sldOrd modNotesMaster">
-      <pc:chgData name="Eternal Centurion" userId="e8763818eec01546" providerId="LiveId" clId="{3F82CCBD-19C3-4A10-8C8B-FF6F78865329}" dt="2026-10-02T16:36:33.693" v="3032" actId="2696"/>
-      <pc:docMkLst>
-        <pc:docMk/>
-      </pc:docMkLst>
-      <pc:sldChg chg="del">
-        <pc:chgData name="Eternal Centurion" userId="e8763818eec01546" providerId="LiveId" clId="{3F82CCBD-19C3-4A10-8C8B-FF6F78865329}" dt="2026-10-02T12:44:04.071" v="594" actId="2696"/>
-        <pc:sldMkLst>
-          <pc:docMk/>
-          <pc:sldMk cId="1742476044" sldId="257"/>
-        </pc:sldMkLst>
-      </pc:sldChg>
-      <pc:sldChg chg="addSp modSp mod">
-        <pc:chgData name="Eternal Centurion" userId="e8763818eec01546" providerId="LiveId" clId="{3F82CCBD-19C3-4A10-8C8B-FF6F78865329}" dt="2026-10-02T12:52:46.910" v="599" actId="26606"/>
-        <pc:sldMkLst>
-          <pc:docMk/>
-          <pc:sldMk cId="0" sldId="258"/>
-        </pc:sldMkLst>
-        <pc:spChg chg="mod">
-          <ac:chgData name="Eternal Centurion" userId="e8763818eec01546" providerId="LiveId" clId="{3F82CCBD-19C3-4A10-8C8B-FF6F78865329}" dt="2026-10-02T12:52:46.910" v="599" actId="26606"/>
-          <ac:spMkLst>
-            <pc:docMk/>
-            <pc:sldMk cId="0" sldId="258"/>
-            <ac:spMk id="15" creationId="{00000000-0000-0000-0000-000000000000}"/>
-          </ac:spMkLst>
-        </pc:spChg>
-        <pc:spChg chg="mod">
-          <ac:chgData name="Eternal Centurion" userId="e8763818eec01546" providerId="LiveId" clId="{3F82CCBD-19C3-4A10-8C8B-FF6F78865329}" dt="2026-10-02T09:53:07.407" v="2" actId="26606"/>
-          <ac:spMkLst>
-            <pc:docMk/>
-            <pc:sldMk cId="0" sldId="258"/>
-            <ac:spMk id="16" creationId="{00000000-0000-0000-0000-000000000000}"/>
-          </ac:spMkLst>
-        </pc:spChg>
-        <pc:spChg chg="mod">
-          <ac:chgData name="Eternal Centurion" userId="e8763818eec01546" providerId="LiveId" clId="{3F82CCBD-19C3-4A10-8C8B-FF6F78865329}" dt="2026-10-02T09:53:07.407" v="2" actId="26606"/>
-          <ac:spMkLst>
-            <pc:docMk/>
-            <pc:sldMk cId="0" sldId="258"/>
-            <ac:spMk id="17" creationId="{00000000-0000-0000-0000-000000000000}"/>
-          </ac:spMkLst>
-        </pc:spChg>
-        <pc:spChg chg="mod">
-          <ac:chgData name="Eternal Centurion" userId="e8763818eec01546" providerId="LiveId" clId="{3F82CCBD-19C3-4A10-8C8B-FF6F78865329}" dt="2026-10-02T09:58:25.970" v="7" actId="26606"/>
-          <ac:spMkLst>
-            <pc:docMk/>
-            <pc:sldMk cId="0" sldId="258"/>
-            <ac:spMk id="27" creationId="{00000000-0000-0000-0000-000000000000}"/>
-          </ac:spMkLst>
-        </pc:spChg>
-        <pc:spChg chg="mod">
-          <ac:chgData name="Eternal Centurion" userId="e8763818eec01546" providerId="LiveId" clId="{3F82CCBD-19C3-4A10-8C8B-FF6F78865329}" dt="2026-10-02T09:50:19.583" v="0" actId="26606"/>
-          <ac:spMkLst>
-            <pc:docMk/>
-            <pc:sldMk cId="0" sldId="258"/>
-            <ac:spMk id="28" creationId="{00000000-0000-0000-0000-000000000000}"/>
-          </ac:spMkLst>
-        </pc:spChg>
-        <pc:spChg chg="mod">
-          <ac:chgData name="Eternal Centurion" userId="e8763818eec01546" providerId="LiveId" clId="{3F82CCBD-19C3-4A10-8C8B-FF6F78865329}" dt="2026-10-02T12:52:46.910" v="599" actId="26606"/>
-          <ac:spMkLst>
-            <pc:docMk/>
-            <pc:sldMk cId="0" sldId="258"/>
-            <ac:spMk id="29" creationId="{00000000-0000-0000-0000-000000000000}"/>
-          </ac:spMkLst>
-        </pc:spChg>
-        <pc:spChg chg="mod">
-          <ac:chgData name="Eternal Centurion" userId="e8763818eec01546" providerId="LiveId" clId="{3F82CCBD-19C3-4A10-8C8B-FF6F78865329}" dt="2026-10-02T12:52:46.910" v="599" actId="26606"/>
-          <ac:spMkLst>
-            <pc:docMk/>
-            <pc:sldMk cId="0" sldId="258"/>
-            <ac:spMk id="30" creationId="{00000000-0000-0000-0000-000000000000}"/>
-          </ac:spMkLst>
-        </pc:spChg>
-        <pc:spChg chg="mod">
-          <ac:chgData name="Eternal Centurion" userId="e8763818eec01546" providerId="LiveId" clId="{3F82CCBD-19C3-4A10-8C8B-FF6F78865329}" dt="2026-10-02T09:50:19.583" v="0" actId="26606"/>
-          <ac:spMkLst>
-            <pc:docMk/>
-            <pc:sldMk cId="0" sldId="258"/>
-            <ac:spMk id="31" creationId="{00000000-0000-0000-0000-000000000000}"/>
-          </ac:spMkLst>
-        </pc:spChg>
-        <pc:spChg chg="mod">
-          <ac:chgData name="Eternal Centurion" userId="e8763818eec01546" providerId="LiveId" clId="{3F82CCBD-19C3-4A10-8C8B-FF6F78865329}" dt="2026-10-02T09:58:25.970" v="7" actId="26606"/>
-          <ac:spMkLst>
-            <pc:docMk/>
-            <pc:sldMk cId="0" sldId="258"/>
-            <ac:spMk id="38" creationId="{00000000-0000-0000-0000-000000000000}"/>
-          </ac:spMkLst>
-        </pc:spChg>
-        <pc:spChg chg="mod">
-          <ac:chgData name="Eternal Centurion" userId="e8763818eec01546" providerId="LiveId" clId="{3F82CCBD-19C3-4A10-8C8B-FF6F78865329}" dt="2026-10-02T10:00:36.506" v="9" actId="26606"/>
-          <ac:spMkLst>
-            <pc:docMk/>
-            <pc:sldMk cId="0" sldId="258"/>
-            <ac:spMk id="40" creationId="{00000000-0000-0000-0000-000000000000}"/>
-          </ac:spMkLst>
-        </pc:spChg>
-        <pc:spChg chg="mod">
-          <ac:chgData name="Eternal Centurion" userId="e8763818eec01546" providerId="LiveId" clId="{3F82CCBD-19C3-4A10-8C8B-FF6F78865329}" dt="2026-10-02T10:12:44.324" v="11" actId="26606"/>
-          <ac:spMkLst>
-            <pc:docMk/>
-            <pc:sldMk cId="0" sldId="258"/>
-            <ac:spMk id="41" creationId="{00000000-0000-0000-0000-000000000000}"/>
-          </ac:spMkLst>
-        </pc:spChg>
-        <pc:spChg chg="mod">
-          <ac:chgData name="Eternal Centurion" userId="e8763818eec01546" providerId="LiveId" clId="{3F82CCBD-19C3-4A10-8C8B-FF6F78865329}" dt="2026-10-02T09:58:25.970" v="7" actId="26606"/>
-          <ac:spMkLst>
-            <pc:docMk/>
-            <pc:sldMk cId="0" sldId="258"/>
-            <ac:spMk id="43" creationId="{00000000-0000-0000-0000-000000000000}"/>
-          </ac:spMkLst>
-        </pc:spChg>
-        <pc:spChg chg="mod">
-          <ac:chgData name="Eternal Centurion" userId="e8763818eec01546" providerId="LiveId" clId="{3F82CCBD-19C3-4A10-8C8B-FF6F78865329}" dt="2026-10-02T09:58:25.970" v="7" actId="26606"/>
-          <ac:spMkLst>
-            <pc:docMk/>
-            <pc:sldMk cId="0" sldId="258"/>
-            <ac:spMk id="44" creationId="{00000000-0000-0000-0000-000000000000}"/>
-          </ac:spMkLst>
-        </pc:spChg>
-        <pc:spChg chg="mod">
-          <ac:chgData name="Eternal Centurion" userId="e8763818eec01546" providerId="LiveId" clId="{3F82CCBD-19C3-4A10-8C8B-FF6F78865329}" dt="2026-10-02T12:52:46.910" v="599" actId="26606"/>
-          <ac:spMkLst>
-            <pc:docMk/>
-            <pc:sldMk cId="0" sldId="258"/>
-            <ac:spMk id="45" creationId="{00000000-0000-0000-0000-000000000000}"/>
-          </ac:spMkLst>
-        </pc:spChg>
-        <pc:spChg chg="mod">
-          <ac:chgData name="Eternal Centurion" userId="e8763818eec01546" providerId="LiveId" clId="{3F82CCBD-19C3-4A10-8C8B-FF6F78865329}" dt="2026-10-02T09:53:34.556" v="3" actId="26606"/>
-          <ac:spMkLst>
-            <pc:docMk/>
-            <pc:sldMk cId="0" sldId="258"/>
-            <ac:spMk id="46" creationId="{00000000-0000-0000-0000-000000000000}"/>
-          </ac:spMkLst>
-        </pc:spChg>
-        <pc:spChg chg="mod">
-          <ac:chgData name="Eternal Centurion" userId="e8763818eec01546" providerId="LiveId" clId="{3F82CCBD-19C3-4A10-8C8B-FF6F78865329}" dt="2026-10-02T09:53:07.407" v="2" actId="26606"/>
-          <ac:spMkLst>
-            <pc:docMk/>
-            <pc:sldMk cId="0" sldId="258"/>
-            <ac:spMk id="47" creationId="{00000000-0000-0000-0000-000000000000}"/>
-          </ac:spMkLst>
-        </pc:spChg>
-        <pc:spChg chg="mod">
-          <ac:chgData name="Eternal Centurion" userId="e8763818eec01546" providerId="LiveId" clId="{3F82CCBD-19C3-4A10-8C8B-FF6F78865329}" dt="2026-10-02T09:53:07.407" v="2" actId="26606"/>
-          <ac:spMkLst>
-            <pc:docMk/>
-            <pc:sldMk cId="0" sldId="258"/>
-            <ac:spMk id="48" creationId="{00000000-0000-0000-0000-000000000000}"/>
-          </ac:spMkLst>
-        </pc:spChg>
-        <pc:spChg chg="mod">
-          <ac:chgData name="Eternal Centurion" userId="e8763818eec01546" providerId="LiveId" clId="{3F82CCBD-19C3-4A10-8C8B-FF6F78865329}" dt="2026-10-02T12:52:46.910" v="599" actId="26606"/>
-          <ac:spMkLst>
-            <pc:docMk/>
-            <pc:sldMk cId="0" sldId="258"/>
-            <ac:spMk id="50" creationId="{00000000-0000-0000-0000-000000000000}"/>
-          </ac:spMkLst>
-        </pc:spChg>
-        <pc:spChg chg="mod">
-          <ac:chgData name="Eternal Centurion" userId="e8763818eec01546" providerId="LiveId" clId="{3F82CCBD-19C3-4A10-8C8B-FF6F78865329}" dt="2026-10-02T12:52:46.910" v="599" actId="26606"/>
-          <ac:spMkLst>
-            <pc:docMk/>
-            <pc:sldMk cId="0" sldId="258"/>
-            <ac:spMk id="53" creationId="{00000000-0000-0000-0000-000000000000}"/>
-          </ac:spMkLst>
-        </pc:spChg>
-        <pc:spChg chg="mod">
-          <ac:chgData name="Eternal Centurion" userId="e8763818eec01546" providerId="LiveId" clId="{3F82CCBD-19C3-4A10-8C8B-FF6F78865329}" dt="2026-10-02T09:53:07.407" v="2" actId="26606"/>
-          <ac:spMkLst>
-            <pc:docMk/>
-            <pc:sldMk cId="0" sldId="258"/>
-            <ac:spMk id="55" creationId="{00000000-0000-0000-0000-000000000000}"/>
-          </ac:spMkLst>
-        </pc:spChg>
-        <pc:spChg chg="mod">
-          <ac:chgData name="Eternal Centurion" userId="e8763818eec01546" providerId="LiveId" clId="{3F82CCBD-19C3-4A10-8C8B-FF6F78865329}" dt="2026-10-02T12:52:46.910" v="599" actId="26606"/>
-          <ac:spMkLst>
-            <pc:docMk/>
-            <pc:sldMk cId="0" sldId="258"/>
-            <ac:spMk id="57" creationId="{00000000-0000-0000-0000-000000000000}"/>
-          </ac:spMkLst>
-        </pc:spChg>
-        <pc:spChg chg="mod">
-          <ac:chgData name="Eternal Centurion" userId="e8763818eec01546" providerId="LiveId" clId="{3F82CCBD-19C3-4A10-8C8B-FF6F78865329}" dt="2026-10-02T09:53:07.407" v="2" actId="26606"/>
-          <ac:spMkLst>
-            <pc:docMk/>
-            <pc:sldMk cId="0" sldId="258"/>
-            <ac:spMk id="60" creationId="{00000000-0000-0000-0000-000000000000}"/>
-          </ac:spMkLst>
-        </pc:spChg>
-        <pc:spChg chg="mod">
-          <ac:chgData name="Eternal Centurion" userId="e8763818eec01546" providerId="LiveId" clId="{3F82CCBD-19C3-4A10-8C8B-FF6F78865329}" dt="2026-10-02T09:58:25.970" v="7" actId="26606"/>
-          <ac:spMkLst>
-            <pc:docMk/>
-            <pc:sldMk cId="0" sldId="258"/>
-            <ac:spMk id="62" creationId="{00000000-0000-0000-0000-000000000000}"/>
-          </ac:spMkLst>
-        </pc:spChg>
-        <pc:spChg chg="mod">
-          <ac:chgData name="Eternal Centurion" userId="e8763818eec01546" providerId="LiveId" clId="{3F82CCBD-19C3-4A10-8C8B-FF6F78865329}" dt="2026-10-02T12:52:46.910" v="599" actId="26606"/>
-          <ac:spMkLst>
-            <pc:docMk/>
-            <pc:sldMk cId="0" sldId="258"/>
-            <ac:spMk id="63" creationId="{00000000-0000-0000-0000-000000000000}"/>
-          </ac:spMkLst>
-        </pc:spChg>
-        <pc:spChg chg="mod">
-          <ac:chgData name="Eternal Centurion" userId="e8763818eec01546" providerId="LiveId" clId="{3F82CCBD-19C3-4A10-8C8B-FF6F78865329}" dt="2026-10-02T09:58:25.970" v="7" actId="26606"/>
-          <ac:spMkLst>
-            <pc:docMk/>
-            <pc:sldMk cId="0" sldId="258"/>
-            <ac:spMk id="64" creationId="{00000000-0000-0000-0000-000000000000}"/>
-          </ac:spMkLst>
-        </pc:spChg>
-        <pc:spChg chg="add mod">
-          <ac:chgData name="Eternal Centurion" userId="e8763818eec01546" providerId="LiveId" clId="{3F82CCBD-19C3-4A10-8C8B-FF6F78865329}" dt="2026-10-02T09:58:25.970" v="7" actId="26606"/>
-          <ac:spMkLst>
-            <pc:docMk/>
-            <pc:sldMk cId="0" sldId="258"/>
-            <ac:spMk id="70" creationId="{00000000-0000-0000-0000-000000000000}"/>
-          </ac:spMkLst>
-        </pc:spChg>
-        <pc:spChg chg="add">
-          <ac:chgData name="Eternal Centurion" userId="e8763818eec01546" providerId="LiveId" clId="{3F82CCBD-19C3-4A10-8C8B-FF6F78865329}" dt="2026-10-02T09:53:07.407" v="2" actId="26606"/>
-          <ac:spMkLst>
-            <pc:docMk/>
-            <pc:sldMk cId="0" sldId="258"/>
-            <ac:spMk id="71" creationId="{00000000-0000-0000-0000-000000000000}"/>
-          </ac:spMkLst>
-        </pc:spChg>
-        <pc:spChg chg="mod">
-          <ac:chgData name="Eternal Centurion" userId="e8763818eec01546" providerId="LiveId" clId="{3F82CCBD-19C3-4A10-8C8B-FF6F78865329}" dt="2026-10-02T12:52:46.910" v="599" actId="26606"/>
-          <ac:spMkLst>
-            <pc:docMk/>
-            <pc:sldMk cId="0" sldId="258"/>
-            <ac:spMk id="73" creationId="{00000000-0000-0000-0000-000000000000}"/>
-          </ac:spMkLst>
-        </pc:spChg>
-        <pc:spChg chg="add">
-          <ac:chgData name="Eternal Centurion" userId="e8763818eec01546" providerId="LiveId" clId="{3F82CCBD-19C3-4A10-8C8B-FF6F78865329}" dt="2026-10-02T09:53:07.407" v="2" actId="26606"/>
-          <ac:spMkLst>
-            <pc:docMk/>
-            <pc:sldMk cId="0" sldId="258"/>
-            <ac:spMk id="74" creationId="{00000000-0000-0000-0000-000000000000}"/>
-          </ac:spMkLst>
-        </pc:spChg>
-        <pc:spChg chg="mod">
-          <ac:chgData name="Eternal Centurion" userId="e8763818eec01546" providerId="LiveId" clId="{3F82CCBD-19C3-4A10-8C8B-FF6F78865329}" dt="2026-10-02T12:52:46.910" v="599" actId="26606"/>
-          <ac:spMkLst>
-            <pc:docMk/>
-            <pc:sldMk cId="0" sldId="258"/>
-            <ac:spMk id="80" creationId="{00000000-0000-0000-0000-000000000000}"/>
-          </ac:spMkLst>
-        </pc:spChg>
-        <pc:cxnChg chg="mod">
-          <ac:chgData name="Eternal Centurion" userId="e8763818eec01546" providerId="LiveId" clId="{3F82CCBD-19C3-4A10-8C8B-FF6F78865329}" dt="2026-10-02T09:50:19.583" v="0" actId="26606"/>
-          <ac:cxnSpMkLst>
-            <pc:docMk/>
-            <pc:sldMk cId="0" sldId="258"/>
-            <ac:cxnSpMk id="3" creationId="{00000000-0000-0000-0000-000000000000}"/>
-          </ac:cxnSpMkLst>
-        </pc:cxnChg>
-        <pc:cxnChg chg="mod">
-          <ac:chgData name="Eternal Centurion" userId="e8763818eec01546" providerId="LiveId" clId="{3F82CCBD-19C3-4A10-8C8B-FF6F78865329}" dt="2026-10-02T09:50:19.583" v="0" actId="26606"/>
-          <ac:cxnSpMkLst>
-            <pc:docMk/>
-            <pc:sldMk cId="0" sldId="258"/>
-            <ac:cxnSpMk id="32" creationId="{00000000-0000-0000-0000-000000000000}"/>
-          </ac:cxnSpMkLst>
-        </pc:cxnChg>
-        <pc:cxnChg chg="mod">
-          <ac:chgData name="Eternal Centurion" userId="e8763818eec01546" providerId="LiveId" clId="{3F82CCBD-19C3-4A10-8C8B-FF6F78865329}" dt="2026-10-02T09:50:19.583" v="0" actId="26606"/>
-          <ac:cxnSpMkLst>
-            <pc:docMk/>
-            <pc:sldMk cId="0" sldId="258"/>
-            <ac:cxnSpMk id="33" creationId="{00000000-0000-0000-0000-000000000000}"/>
-          </ac:cxnSpMkLst>
-        </pc:cxnChg>
-        <pc:cxnChg chg="add">
-          <ac:chgData name="Eternal Centurion" userId="e8763818eec01546" providerId="LiveId" clId="{3F82CCBD-19C3-4A10-8C8B-FF6F78865329}" dt="2026-10-02T09:50:19.583" v="0" actId="26606"/>
-          <ac:cxnSpMkLst>
-            <pc:docMk/>
-            <pc:sldMk cId="0" sldId="258"/>
-            <ac:cxnSpMk id="66" creationId="{00000000-0000-0000-0000-000000000000}"/>
-          </ac:cxnSpMkLst>
-        </pc:cxnChg>
-        <pc:cxnChg chg="mod">
-          <ac:chgData name="Eternal Centurion" userId="e8763818eec01546" providerId="LiveId" clId="{3F82CCBD-19C3-4A10-8C8B-FF6F78865329}" dt="2026-10-02T09:53:34.556" v="3" actId="26606"/>
-          <ac:cxnSpMkLst>
-            <pc:docMk/>
-            <pc:sldMk cId="0" sldId="258"/>
-            <ac:cxnSpMk id="68" creationId="{00000000-0000-0000-0000-000000000000}"/>
-          </ac:cxnSpMkLst>
-        </pc:cxnChg>
-        <pc:cxnChg chg="mod">
-          <ac:chgData name="Eternal Centurion" userId="e8763818eec01546" providerId="LiveId" clId="{3F82CCBD-19C3-4A10-8C8B-FF6F78865329}" dt="2026-10-02T09:53:34.556" v="3" actId="26606"/>
-          <ac:cxnSpMkLst>
-            <pc:docMk/>
-            <pc:sldMk cId="0" sldId="258"/>
-            <ac:cxnSpMk id="69" creationId="{00000000-0000-0000-0000-000000000000}"/>
-          </ac:cxnSpMkLst>
-        </pc:cxnChg>
-      </pc:sldChg>
-      <pc:sldChg chg="addSp delSp modSp mod ord">
-        <pc:chgData name="Eternal Centurion" userId="e8763818eec01546" providerId="LiveId" clId="{3F82CCBD-19C3-4A10-8C8B-FF6F78865329}" dt="2026-10-02T16:36:02.399" v="3030" actId="26606"/>
-        <pc:sldMkLst>
-          <pc:docMk/>
-          <pc:sldMk cId="2088778080" sldId="259"/>
-        </pc:sldMkLst>
-        <pc:spChg chg="mod">
-          <ac:chgData name="Eternal Centurion" userId="e8763818eec01546" providerId="LiveId" clId="{3F82CCBD-19C3-4A10-8C8B-FF6F78865329}" dt="2026-10-02T16:34:46.203" v="3027" actId="26606"/>
-          <ac:spMkLst>
-            <pc:docMk/>
-            <pc:sldMk cId="2088778080" sldId="259"/>
-            <ac:spMk id="2" creationId="{5DA86FC5-C14C-4BCA-AFCA-A568554BE528}"/>
-          </ac:spMkLst>
-        </pc:spChg>
-        <pc:spChg chg="mod">
-          <ac:chgData name="Eternal Centurion" userId="e8763818eec01546" providerId="LiveId" clId="{3F82CCBD-19C3-4A10-8C8B-FF6F78865329}" dt="2026-10-02T16:32:44.836" v="3024" actId="27636"/>
-          <ac:spMkLst>
-            <pc:docMk/>
-            <pc:sldMk cId="2088778080" sldId="259"/>
-            <ac:spMk id="3" creationId="{7A81A9B4-9EF2-9424-B8FB-D05520C6C271}"/>
-          </ac:spMkLst>
-        </pc:spChg>
-        <pc:spChg chg="add mod">
-          <ac:chgData name="Eternal Centurion" userId="e8763818eec01546" providerId="LiveId" clId="{3F82CCBD-19C3-4A10-8C8B-FF6F78865329}" dt="2026-10-02T16:35:45.612" v="3029" actId="26606"/>
-          <ac:spMkLst>
-            <pc:docMk/>
-            <pc:sldMk cId="2088778080" sldId="259"/>
-            <ac:spMk id="4" creationId="{00000000-0000-0000-0000-000000000000}"/>
-          </ac:spMkLst>
-        </pc:spChg>
-        <pc:spChg chg="mod">
-          <ac:chgData name="Eternal Centurion" userId="e8763818eec01546" providerId="LiveId" clId="{3F82CCBD-19C3-4A10-8C8B-FF6F78865329}" dt="2026-10-02T16:35:45.612" v="3029" actId="26606"/>
-          <ac:spMkLst>
-            <pc:docMk/>
-            <pc:sldMk cId="2088778080" sldId="259"/>
-            <ac:spMk id="5" creationId="{00000000-0000-0000-0000-000000000000}"/>
-          </ac:spMkLst>
-        </pc:spChg>
-        <pc:spChg chg="mod">
-          <ac:chgData name="Eternal Centurion" userId="e8763818eec01546" providerId="LiveId" clId="{3F82CCBD-19C3-4A10-8C8B-FF6F78865329}" dt="2026-10-02T16:35:45.612" v="3029" actId="26606"/>
-          <ac:spMkLst>
-            <pc:docMk/>
-            <pc:sldMk cId="2088778080" sldId="259"/>
-            <ac:spMk id="6" creationId="{00000000-0000-0000-0000-000000000000}"/>
-          </ac:spMkLst>
-        </pc:spChg>
-        <pc:spChg chg="add mod">
-          <ac:chgData name="Eternal Centurion" userId="e8763818eec01546" providerId="LiveId" clId="{3F82CCBD-19C3-4A10-8C8B-FF6F78865329}" dt="2026-10-02T16:35:45.612" v="3029" actId="26606"/>
-          <ac:spMkLst>
-            <pc:docMk/>
-            <pc:sldMk cId="2088778080" sldId="259"/>
-            <ac:spMk id="7" creationId="{00000000-0000-0000-0000-000000000000}"/>
-          </ac:spMkLst>
-        </pc:spChg>
-        <pc:spChg chg="mod">
-          <ac:chgData name="Eternal Centurion" userId="e8763818eec01546" providerId="LiveId" clId="{3F82CCBD-19C3-4A10-8C8B-FF6F78865329}" dt="2026-10-02T16:35:45.612" v="3029" actId="26606"/>
-          <ac:spMkLst>
-            <pc:docMk/>
-            <pc:sldMk cId="2088778080" sldId="259"/>
-            <ac:spMk id="8" creationId="{00000000-0000-0000-0000-000000000000}"/>
-          </ac:spMkLst>
-        </pc:spChg>
-        <pc:spChg chg="add mod">
-          <ac:chgData name="Eternal Centurion" userId="e8763818eec01546" providerId="LiveId" clId="{3F82CCBD-19C3-4A10-8C8B-FF6F78865329}" dt="2026-10-02T16:35:45.612" v="3029" actId="26606"/>
-          <ac:spMkLst>
-            <pc:docMk/>
-            <pc:sldMk cId="2088778080" sldId="259"/>
-            <ac:spMk id="9" creationId="{00000000-0000-0000-0000-000000000000}"/>
-          </ac:spMkLst>
-        </pc:spChg>
-        <pc:spChg chg="mod">
-          <ac:chgData name="Eternal Centurion" userId="e8763818eec01546" providerId="LiveId" clId="{3F82CCBD-19C3-4A10-8C8B-FF6F78865329}" dt="2026-10-02T16:34:46.203" v="3027" actId="26606"/>
-          <ac:spMkLst>
-            <pc:docMk/>
-            <pc:sldMk cId="2088778080" sldId="259"/>
-            <ac:spMk id="11" creationId="{00000000-0000-0000-0000-000000000000}"/>
-          </ac:spMkLst>
-        </pc:spChg>
-        <pc:spChg chg="add">
-          <ac:chgData name="Eternal Centurion" userId="e8763818eec01546" providerId="LiveId" clId="{3F82CCBD-19C3-4A10-8C8B-FF6F78865329}" dt="2026-10-02T12:43:08.200" v="591" actId="26606"/>
-          <ac:spMkLst>
-            <pc:docMk/>
-            <pc:sldMk cId="2088778080" sldId="259"/>
-            <ac:spMk id="12" creationId="{00000000-0000-0000-0000-000000000000}"/>
-          </ac:spMkLst>
-        </pc:spChg>
-        <pc:spChg chg="add">
-          <ac:chgData name="Eternal Centurion" userId="e8763818eec01546" providerId="LiveId" clId="{3F82CCBD-19C3-4A10-8C8B-FF6F78865329}" dt="2026-10-02T12:43:08.200" v="591" actId="26606"/>
-          <ac:spMkLst>
-            <pc:docMk/>
-            <pc:sldMk cId="2088778080" sldId="259"/>
-            <ac:spMk id="13" creationId="{00000000-0000-0000-0000-000000000000}"/>
-          </ac:spMkLst>
-        </pc:spChg>
-        <pc:spChg chg="mod">
-          <ac:chgData name="Eternal Centurion" userId="e8763818eec01546" providerId="LiveId" clId="{3F82CCBD-19C3-4A10-8C8B-FF6F78865329}" dt="2026-10-02T16:33:06.031" v="3025" actId="26606"/>
-          <ac:spMkLst>
-            <pc:docMk/>
-            <pc:sldMk cId="2088778080" sldId="259"/>
-            <ac:spMk id="14" creationId="{00000000-0000-0000-0000-000000000000}"/>
-          </ac:spMkLst>
-        </pc:spChg>
-        <pc:spChg chg="add mod">
-          <ac:chgData name="Eternal Centurion" userId="e8763818eec01546" providerId="LiveId" clId="{3F82CCBD-19C3-4A10-8C8B-FF6F78865329}" dt="2026-10-02T16:34:46.203" v="3027" actId="26606"/>
-          <ac:spMkLst>
-            <pc:docMk/>
-            <pc:sldMk cId="2088778080" sldId="259"/>
-            <ac:spMk id="15" creationId="{00000000-0000-0000-0000-000000000000}"/>
-          </ac:spMkLst>
-        </pc:spChg>
-        <pc:spChg chg="mod">
-          <ac:chgData name="Eternal Centurion" userId="e8763818eec01546" providerId="LiveId" clId="{3F82CCBD-19C3-4A10-8C8B-FF6F78865329}" dt="2026-10-02T16:33:06.031" v="3025" actId="26606"/>
-          <ac:spMkLst>
-            <pc:docMk/>
-            <pc:sldMk cId="2088778080" sldId="259"/>
-            <ac:spMk id="16" creationId="{00000000-0000-0000-0000-000000000000}"/>
-          </ac:spMkLst>
-        </pc:spChg>
-        <pc:spChg chg="mod">
-          <ac:chgData name="Eternal Centurion" userId="e8763818eec01546" providerId="LiveId" clId="{3F82CCBD-19C3-4A10-8C8B-FF6F78865329}" dt="2026-10-02T16:33:06.031" v="3025" actId="26606"/>
-          <ac:spMkLst>
-            <pc:docMk/>
-            <pc:sldMk cId="2088778080" sldId="259"/>
-            <ac:spMk id="17" creationId="{00000000-0000-0000-0000-000000000000}"/>
-          </ac:spMkLst>
-        </pc:spChg>
-        <pc:spChg chg="add mod">
-          <ac:chgData name="Eternal Centurion" userId="e8763818eec01546" providerId="LiveId" clId="{3F82CCBD-19C3-4A10-8C8B-FF6F78865329}" dt="2026-10-02T12:45:25.204" v="595" actId="26606"/>
-          <ac:spMkLst>
-            <pc:docMk/>
-            <pc:sldMk cId="2088778080" sldId="259"/>
-            <ac:spMk id="18" creationId="{00000000-0000-0000-0000-000000000000}"/>
-          </ac:spMkLst>
-        </pc:spChg>
-        <pc:spChg chg="add mod">
-          <ac:chgData name="Eternal Centurion" userId="e8763818eec01546" providerId="LiveId" clId="{3F82CCBD-19C3-4A10-8C8B-FF6F78865329}" dt="2026-10-02T12:52:46.910" v="599" actId="26606"/>
-          <ac:spMkLst>
-            <pc:docMk/>
-            <pc:sldMk cId="2088778080" sldId="259"/>
-            <ac:spMk id="19" creationId="{00000000-0000-0000-0000-000000000000}"/>
-          </ac:spMkLst>
-        </pc:spChg>
-        <pc:spChg chg="add mod">
-          <ac:chgData name="Eternal Centurion" userId="e8763818eec01546" providerId="LiveId" clId="{3F82CCBD-19C3-4A10-8C8B-FF6F78865329}" dt="2026-10-02T16:33:06.031" v="3025" actId="26606"/>
-          <ac:spMkLst>
-            <pc:docMk/>
-            <pc:sldMk cId="2088778080" sldId="259"/>
-            <ac:spMk id="20" creationId="{00000000-0000-0000-0000-000000000000}"/>
-          </ac:spMkLst>
-        </pc:spChg>
-        <pc:spChg chg="mod">
-          <ac:chgData name="Eternal Centurion" userId="e8763818eec01546" providerId="LiveId" clId="{3F82CCBD-19C3-4A10-8C8B-FF6F78865329}" dt="2026-10-02T16:33:06.031" v="3025" actId="26606"/>
-          <ac:spMkLst>
-            <pc:docMk/>
-            <pc:sldMk cId="2088778080" sldId="259"/>
-            <ac:spMk id="21" creationId="{00000000-0000-0000-0000-000000000000}"/>
-          </ac:spMkLst>
-        </pc:spChg>
-        <pc:spChg chg="add mod">
-          <ac:chgData name="Eternal Centurion" userId="e8763818eec01546" providerId="LiveId" clId="{3F82CCBD-19C3-4A10-8C8B-FF6F78865329}" dt="2026-10-02T12:45:43.944" v="597" actId="26606"/>
-          <ac:spMkLst>
-            <pc:docMk/>
-            <pc:sldMk cId="2088778080" sldId="259"/>
-            <ac:spMk id="22" creationId="{00000000-0000-0000-0000-000000000000}"/>
-          </ac:spMkLst>
-        </pc:spChg>
-        <pc:spChg chg="add mod">
-          <ac:chgData name="Eternal Centurion" userId="e8763818eec01546" providerId="LiveId" clId="{3F82CCBD-19C3-4A10-8C8B-FF6F78865329}" dt="2026-10-02T16:34:46.203" v="3027" actId="26606"/>
-          <ac:spMkLst>
-            <pc:docMk/>
-            <pc:sldMk cId="2088778080" sldId="259"/>
-            <ac:spMk id="23" creationId="{00000000-0000-0000-0000-000000000000}"/>
-          </ac:spMkLst>
-        </pc:spChg>
-        <pc:spChg chg="mod">
-          <ac:chgData name="Eternal Centurion" userId="e8763818eec01546" providerId="LiveId" clId="{3F82CCBD-19C3-4A10-8C8B-FF6F78865329}" dt="2026-10-02T12:45:43.944" v="597" actId="26606"/>
-          <ac:spMkLst>
-            <pc:docMk/>
-            <pc:sldMk cId="2088778080" sldId="259"/>
-            <ac:spMk id="24" creationId="{00000000-0000-0000-0000-000000000000}"/>
-          </ac:spMkLst>
-        </pc:spChg>
-        <pc:spChg chg="mod">
-          <ac:chgData name="Eternal Centurion" userId="e8763818eec01546" providerId="LiveId" clId="{3F82CCBD-19C3-4A10-8C8B-FF6F78865329}" dt="2026-10-02T16:34:46.203" v="3027" actId="26606"/>
-          <ac:spMkLst>
-            <pc:docMk/>
-            <pc:sldMk cId="2088778080" sldId="259"/>
-            <ac:spMk id="25" creationId="{00000000-0000-0000-0000-000000000000}"/>
-          </ac:spMkLst>
-        </pc:spChg>
-        <pc:spChg chg="mod">
-          <ac:chgData name="Eternal Centurion" userId="e8763818eec01546" providerId="LiveId" clId="{3F82CCBD-19C3-4A10-8C8B-FF6F78865329}" dt="2026-10-02T12:52:46.910" v="599" actId="26606"/>
-          <ac:spMkLst>
-            <pc:docMk/>
-            <pc:sldMk cId="2088778080" sldId="259"/>
-            <ac:spMk id="26" creationId="{00000000-0000-0000-0000-000000000000}"/>
-          </ac:spMkLst>
-        </pc:spChg>
-        <pc:spChg chg="mod">
-          <ac:chgData name="Eternal Centurion" userId="e8763818eec01546" providerId="LiveId" clId="{3F82CCBD-19C3-4A10-8C8B-FF6F78865329}" dt="2026-10-02T16:34:46.203" v="3027" actId="26606"/>
-          <ac:spMkLst>
-            <pc:docMk/>
-            <pc:sldMk cId="2088778080" sldId="259"/>
-            <ac:spMk id="27" creationId="{00000000-0000-0000-0000-000000000000}"/>
-          </ac:spMkLst>
-        </pc:spChg>
-        <pc:spChg chg="add mod">
-          <ac:chgData name="Eternal Centurion" userId="e8763818eec01546" providerId="LiveId" clId="{3F82CCBD-19C3-4A10-8C8B-FF6F78865329}" dt="2026-10-02T16:34:46.203" v="3027" actId="26606"/>
-          <ac:spMkLst>
-            <pc:docMk/>
-            <pc:sldMk cId="2088778080" sldId="259"/>
-            <ac:spMk id="30" creationId="{00000000-0000-0000-0000-000000000000}"/>
-          </ac:spMkLst>
-        </pc:spChg>
-        <pc:spChg chg="add mod">
-          <ac:chgData name="Eternal Centurion" userId="e8763818eec01546" providerId="LiveId" clId="{3F82CCBD-19C3-4A10-8C8B-FF6F78865329}" dt="2026-10-02T16:35:45.612" v="3029" actId="26606"/>
-          <ac:spMkLst>
-            <pc:docMk/>
-            <pc:sldMk cId="2088778080" sldId="259"/>
-            <ac:spMk id="31" creationId="{00000000-0000-0000-0000-000000000000}"/>
-          </ac:spMkLst>
-        </pc:spChg>
-        <pc:spChg chg="add">
-          <ac:chgData name="Eternal Centurion" userId="e8763818eec01546" providerId="LiveId" clId="{3F82CCBD-19C3-4A10-8C8B-FF6F78865329}" dt="2026-10-02T16:35:45.612" v="3029" actId="26606"/>
-          <ac:spMkLst>
-            <pc:docMk/>
-            <pc:sldMk cId="2088778080" sldId="259"/>
-            <ac:spMk id="32" creationId="{00000000-0000-0000-0000-000000000000}"/>
-          </ac:spMkLst>
-        </pc:spChg>
-        <pc:spChg chg="add ord">
-          <ac:chgData name="Eternal Centurion" userId="e8763818eec01546" providerId="LiveId" clId="{3F82CCBD-19C3-4A10-8C8B-FF6F78865329}" dt="2026-10-02T16:36:02.399" v="3030" actId="26606"/>
-          <ac:spMkLst>
-            <pc:docMk/>
-            <pc:sldMk cId="2088778080" sldId="259"/>
-            <ac:spMk id="33" creationId="{00000000-0000-0000-0000-000000000000}"/>
-          </ac:spMkLst>
-        </pc:spChg>
-      </pc:sldChg>
-      <pc:sldChg chg="addSp delSp modSp new mod ord modNotes">
-        <pc:chgData name="Eternal Centurion" userId="e8763818eec01546" providerId="LiveId" clId="{3F82CCBD-19C3-4A10-8C8B-FF6F78865329}" dt="2026-10-02T13:14:35.578" v="1514" actId="26606"/>
-        <pc:sldMkLst>
-          <pc:docMk/>
-          <pc:sldMk cId="458852106" sldId="260"/>
-        </pc:sldMkLst>
-        <pc:spChg chg="mod">
-          <ac:chgData name="Eternal Centurion" userId="e8763818eec01546" providerId="LiveId" clId="{3F82CCBD-19C3-4A10-8C8B-FF6F78865329}" dt="2026-10-02T13:14:35.578" v="1514" actId="26606"/>
-          <ac:spMkLst>
-            <pc:docMk/>
-            <pc:sldMk cId="458852106" sldId="260"/>
-            <ac:spMk id="2" creationId="{3A78D83C-70A4-3090-7E6F-E96FA3ADF031}"/>
-          </ac:spMkLst>
-        </pc:spChg>
-        <pc:spChg chg="mod">
-          <ac:chgData name="Eternal Centurion" userId="e8763818eec01546" providerId="LiveId" clId="{3F82CCBD-19C3-4A10-8C8B-FF6F78865329}" dt="2026-10-02T13:14:35.578" v="1514" actId="26606"/>
-          <ac:spMkLst>
-            <pc:docMk/>
-            <pc:sldMk cId="458852106" sldId="260"/>
-            <ac:spMk id="3" creationId="{52EA6964-AD79-5BBC-3BAC-F9D4724A808C}"/>
-          </ac:spMkLst>
-        </pc:spChg>
-        <pc:spChg chg="mod">
-          <ac:chgData name="Eternal Centurion" userId="e8763818eec01546" providerId="LiveId" clId="{3F82CCBD-19C3-4A10-8C8B-FF6F78865329}" dt="2026-10-02T13:14:35.578" v="1514" actId="26606"/>
-          <ac:spMkLst>
-            <pc:docMk/>
-            <pc:sldMk cId="458852106" sldId="260"/>
-            <ac:spMk id="4" creationId="{00000000-0000-0000-0000-000000000000}"/>
-          </ac:spMkLst>
-        </pc:spChg>
-        <pc:spChg chg="add mod">
-          <ac:chgData name="Eternal Centurion" userId="e8763818eec01546" providerId="LiveId" clId="{3F82CCBD-19C3-4A10-8C8B-FF6F78865329}" dt="2026-10-02T12:57:16.582" v="1354"/>
-          <ac:spMkLst>
-            <pc:docMk/>
-            <pc:sldMk cId="458852106" sldId="260"/>
-            <ac:spMk id="4" creationId="{CF64175E-AC56-DEF6-EEB9-EAA3821034F8}"/>
-          </ac:spMkLst>
-        </pc:spChg>
-        <pc:spChg chg="add del mod">
-          <ac:chgData name="Eternal Centurion" userId="e8763818eec01546" providerId="LiveId" clId="{3F82CCBD-19C3-4A10-8C8B-FF6F78865329}" dt="2026-10-02T13:03:43.918" v="1469" actId="26606"/>
-          <ac:spMkLst>
-            <pc:docMk/>
-            <pc:sldMk cId="458852106" sldId="260"/>
-            <ac:spMk id="5" creationId="{00000000-0000-0000-0000-000000000000}"/>
-          </ac:spMkLst>
-        </pc:spChg>
-        <pc:spChg chg="add del mod">
-          <ac:chgData name="Eternal Centurion" userId="e8763818eec01546" providerId="LiveId" clId="{3F82CCBD-19C3-4A10-8C8B-FF6F78865329}" dt="2026-10-02T13:03:43.918" v="1469" actId="26606"/>
-          <ac:spMkLst>
-            <pc:docMk/>
-            <pc:sldMk cId="458852106" sldId="260"/>
-            <ac:spMk id="6" creationId="{00000000-0000-0000-0000-000000000000}"/>
-          </ac:spMkLst>
-        </pc:spChg>
-        <pc:spChg chg="mod">
-          <ac:chgData name="Eternal Centurion" userId="e8763818eec01546" providerId="LiveId" clId="{3F82CCBD-19C3-4A10-8C8B-FF6F78865329}" dt="2026-10-02T13:14:35.578" v="1514" actId="26606"/>
-          <ac:spMkLst>
-            <pc:docMk/>
-            <pc:sldMk cId="458852106" sldId="260"/>
-            <ac:spMk id="7" creationId="{00000000-0000-0000-0000-000000000000}"/>
-          </ac:spMkLst>
-        </pc:spChg>
-        <pc:spChg chg="add mod">
-          <ac:chgData name="Eternal Centurion" userId="e8763818eec01546" providerId="LiveId" clId="{3F82CCBD-19C3-4A10-8C8B-FF6F78865329}" dt="2026-10-02T12:59:57.606" v="1464" actId="26606"/>
-          <ac:spMkLst>
-            <pc:docMk/>
-            <pc:sldMk cId="458852106" sldId="260"/>
-            <ac:spMk id="8" creationId="{00000000-0000-0000-0000-000000000000}"/>
-          </ac:spMkLst>
-        </pc:spChg>
-        <pc:spChg chg="add del mod">
-          <ac:chgData name="Eternal Centurion" userId="e8763818eec01546" providerId="LiveId" clId="{3F82CCBD-19C3-4A10-8C8B-FF6F78865329}" dt="2026-10-02T13:03:43.918" v="1469" actId="26606"/>
-          <ac:spMkLst>
-            <pc:docMk/>
-            <pc:sldMk cId="458852106" sldId="260"/>
-            <ac:spMk id="9" creationId="{00000000-0000-0000-0000-000000000000}"/>
-          </ac:spMkLst>
-        </pc:spChg>
-        <pc:spChg chg="mod">
-          <ac:chgData name="Eternal Centurion" userId="e8763818eec01546" providerId="LiveId" clId="{3F82CCBD-19C3-4A10-8C8B-FF6F78865329}" dt="2026-10-02T13:13:26.951" v="1512" actId="26606"/>
-          <ac:spMkLst>
-            <pc:docMk/>
-            <pc:sldMk cId="458852106" sldId="260"/>
-            <ac:spMk id="10" creationId="{00000000-0000-0000-0000-000000000000}"/>
-          </ac:spMkLst>
-        </pc:spChg>
-        <pc:spChg chg="add mod">
-          <ac:chgData name="Eternal Centurion" userId="e8763818eec01546" providerId="LiveId" clId="{3F82CCBD-19C3-4A10-8C8B-FF6F78865329}" dt="2026-10-02T13:13:26.951" v="1512" actId="26606"/>
-          <ac:spMkLst>
-            <pc:docMk/>
-            <pc:sldMk cId="458852106" sldId="260"/>
-            <ac:spMk id="11" creationId="{00000000-0000-0000-0000-000000000000}"/>
-          </ac:spMkLst>
-        </pc:spChg>
-        <pc:spChg chg="mod">
-          <ac:chgData name="Eternal Centurion" userId="e8763818eec01546" providerId="LiveId" clId="{3F82CCBD-19C3-4A10-8C8B-FF6F78865329}" dt="2026-10-02T13:14:35.578" v="1514" actId="26606"/>
-          <ac:spMkLst>
-            <pc:docMk/>
-            <pc:sldMk cId="458852106" sldId="260"/>
-            <ac:spMk id="12" creationId="{00000000-0000-0000-0000-000000000000}"/>
-          </ac:spMkLst>
-        </pc:spChg>
-        <pc:spChg chg="add mod">
-          <ac:chgData name="Eternal Centurion" userId="e8763818eec01546" providerId="LiveId" clId="{3F82CCBD-19C3-4A10-8C8B-FF6F78865329}" dt="2026-10-02T13:14:35.578" v="1514" actId="26606"/>
-          <ac:spMkLst>
-            <pc:docMk/>
-            <pc:sldMk cId="458852106" sldId="260"/>
-            <ac:spMk id="13" creationId="{00000000-0000-0000-0000-000000000000}"/>
-          </ac:spMkLst>
-        </pc:spChg>
-        <pc:spChg chg="add mod">
-          <ac:chgData name="Eternal Centurion" userId="e8763818eec01546" providerId="LiveId" clId="{3F82CCBD-19C3-4A10-8C8B-FF6F78865329}" dt="2026-10-02T13:08:07.698" v="1475" actId="26606"/>
-          <ac:spMkLst>
-            <pc:docMk/>
-            <pc:sldMk cId="458852106" sldId="260"/>
-            <ac:spMk id="14" creationId="{00000000-0000-0000-0000-000000000000}"/>
-          </ac:spMkLst>
-        </pc:spChg>
-        <pc:spChg chg="add">
-          <ac:chgData name="Eternal Centurion" userId="e8763818eec01546" providerId="LiveId" clId="{3F82CCBD-19C3-4A10-8C8B-FF6F78865329}" dt="2026-10-02T12:59:40.180" v="1462" actId="26606"/>
-          <ac:spMkLst>
-            <pc:docMk/>
-            <pc:sldMk cId="458852106" sldId="260"/>
-            <ac:spMk id="15" creationId="{00000000-0000-0000-0000-000000000000}"/>
-          </ac:spMkLst>
-        </pc:spChg>
-        <pc:spChg chg="add mod">
-          <ac:chgData name="Eternal Centurion" userId="e8763818eec01546" providerId="LiveId" clId="{3F82CCBD-19C3-4A10-8C8B-FF6F78865329}" dt="2026-10-02T13:08:07.698" v="1475" actId="26606"/>
-          <ac:spMkLst>
-            <pc:docMk/>
-            <pc:sldMk cId="458852106" sldId="260"/>
-            <ac:spMk id="16" creationId="{00000000-0000-0000-0000-000000000000}"/>
-          </ac:spMkLst>
-        </pc:spChg>
-        <pc:spChg chg="del mod">
-          <ac:chgData name="Eternal Centurion" userId="e8763818eec01546" providerId="LiveId" clId="{3F82CCBD-19C3-4A10-8C8B-FF6F78865329}" dt="2026-10-02T13:03:43.918" v="1469" actId="26606"/>
-          <ac:spMkLst>
-            <pc:docMk/>
-            <pc:sldMk cId="458852106" sldId="260"/>
-            <ac:spMk id="17" creationId="{00000000-0000-0000-0000-000000000000}"/>
-          </ac:spMkLst>
-        </pc:spChg>
-        <pc:spChg chg="mod">
-          <ac:chgData name="Eternal Centurion" userId="e8763818eec01546" providerId="LiveId" clId="{3F82CCBD-19C3-4A10-8C8B-FF6F78865329}" dt="2026-10-02T13:13:26.951" v="1512" actId="26606"/>
-          <ac:spMkLst>
-            <pc:docMk/>
-            <pc:sldMk cId="458852106" sldId="260"/>
-            <ac:spMk id="18" creationId="{00000000-0000-0000-0000-000000000000}"/>
-          </ac:spMkLst>
-        </pc:spChg>
-        <pc:spChg chg="add mod">
-          <ac:chgData name="Eternal Centurion" userId="e8763818eec01546" providerId="LiveId" clId="{3F82CCBD-19C3-4A10-8C8B-FF6F78865329}" dt="2026-10-02T13:14:35.578" v="1514" actId="26606"/>
-          <ac:spMkLst>
-            <pc:docMk/>
-            <pc:sldMk cId="458852106" sldId="260"/>
-            <ac:spMk id="19" creationId="{00000000-0000-0000-0000-000000000000}"/>
-          </ac:spMkLst>
-        </pc:spChg>
-        <pc:spChg chg="add mod">
-          <ac:chgData name="Eternal Centurion" userId="e8763818eec01546" providerId="LiveId" clId="{3F82CCBD-19C3-4A10-8C8B-FF6F78865329}" dt="2026-10-02T13:13:26.951" v="1512" actId="26606"/>
-          <ac:spMkLst>
-            <pc:docMk/>
-            <pc:sldMk cId="458852106" sldId="260"/>
-            <ac:spMk id="20" creationId="{00000000-0000-0000-0000-000000000000}"/>
-          </ac:spMkLst>
-        </pc:spChg>
-        <pc:spChg chg="add mod">
-          <ac:chgData name="Eternal Centurion" userId="e8763818eec01546" providerId="LiveId" clId="{3F82CCBD-19C3-4A10-8C8B-FF6F78865329}" dt="2026-10-02T13:14:35.578" v="1514" actId="26606"/>
-          <ac:spMkLst>
-            <pc:docMk/>
-            <pc:sldMk cId="458852106" sldId="260"/>
-            <ac:spMk id="21" creationId="{00000000-0000-0000-0000-000000000000}"/>
-          </ac:spMkLst>
-        </pc:spChg>
-        <pc:spChg chg="mod">
-          <ac:chgData name="Eternal Centurion" userId="e8763818eec01546" providerId="LiveId" clId="{3F82CCBD-19C3-4A10-8C8B-FF6F78865329}" dt="2026-10-02T13:13:26.951" v="1512" actId="26606"/>
-          <ac:spMkLst>
-            <pc:docMk/>
-            <pc:sldMk cId="458852106" sldId="260"/>
-            <ac:spMk id="22" creationId="{00000000-0000-0000-0000-000000000000}"/>
-          </ac:spMkLst>
-        </pc:spChg>
-        <pc:spChg chg="add mod">
-          <ac:chgData name="Eternal Centurion" userId="e8763818eec01546" providerId="LiveId" clId="{3F82CCBD-19C3-4A10-8C8B-FF6F78865329}" dt="2026-10-02T13:14:35.578" v="1514" actId="26606"/>
-          <ac:spMkLst>
-            <pc:docMk/>
-            <pc:sldMk cId="458852106" sldId="260"/>
-            <ac:spMk id="23" creationId="{00000000-0000-0000-0000-000000000000}"/>
-          </ac:spMkLst>
-        </pc:spChg>
-        <pc:spChg chg="add mod">
-          <ac:chgData name="Eternal Centurion" userId="e8763818eec01546" providerId="LiveId" clId="{3F82CCBD-19C3-4A10-8C8B-FF6F78865329}" dt="2026-10-02T13:13:26.951" v="1512" actId="26606"/>
-          <ac:spMkLst>
-            <pc:docMk/>
-            <pc:sldMk cId="458852106" sldId="260"/>
-            <ac:spMk id="24" creationId="{00000000-0000-0000-0000-000000000000}"/>
-          </ac:spMkLst>
-        </pc:spChg>
-        <pc:spChg chg="add mod">
-          <ac:chgData name="Eternal Centurion" userId="e8763818eec01546" providerId="LiveId" clId="{3F82CCBD-19C3-4A10-8C8B-FF6F78865329}" dt="2026-10-02T13:11:39.082" v="1504" actId="1036"/>
-          <ac:spMkLst>
-            <pc:docMk/>
-            <pc:sldMk cId="458852106" sldId="260"/>
-            <ac:spMk id="25" creationId="{00000000-0000-0000-0000-000000000000}"/>
-          </ac:spMkLst>
-        </pc:spChg>
-        <pc:spChg chg="add mod">
-          <ac:chgData name="Eternal Centurion" userId="e8763818eec01546" providerId="LiveId" clId="{3F82CCBD-19C3-4A10-8C8B-FF6F78865329}" dt="2026-10-02T13:14:35.578" v="1514" actId="26606"/>
-          <ac:spMkLst>
-            <pc:docMk/>
-            <pc:sldMk cId="458852106" sldId="260"/>
-            <ac:spMk id="26" creationId="{00000000-0000-0000-0000-000000000000}"/>
-          </ac:spMkLst>
-        </pc:spChg>
-        <pc:spChg chg="add mod">
-          <ac:chgData name="Eternal Centurion" userId="e8763818eec01546" providerId="LiveId" clId="{3F82CCBD-19C3-4A10-8C8B-FF6F78865329}" dt="2026-10-02T13:08:07.698" v="1475" actId="26606"/>
-          <ac:spMkLst>
-            <pc:docMk/>
-            <pc:sldMk cId="458852106" sldId="260"/>
-            <ac:spMk id="27" creationId="{00000000-0000-0000-0000-000000000000}"/>
-          </ac:spMkLst>
-        </pc:spChg>
-        <pc:cxnChg chg="mod replId">
-          <ac:chgData name="Eternal Centurion" userId="e8763818eec01546" providerId="LiveId" clId="{3F82CCBD-19C3-4A10-8C8B-FF6F78865329}" dt="2026-10-02T13:04:54.005" v="1471" actId="26606"/>
-          <ac:cxnSpMkLst>
-            <pc:docMk/>
-            <pc:sldMk cId="458852106" sldId="260"/>
-            <ac:cxnSpMk id="5" creationId="{00000000-0000-0000-0000-000000000000}"/>
-          </ac:cxnSpMkLst>
-        </pc:cxnChg>
-        <pc:cxnChg chg="mod replId">
-          <ac:chgData name="Eternal Centurion" userId="e8763818eec01546" providerId="LiveId" clId="{3F82CCBD-19C3-4A10-8C8B-FF6F78865329}" dt="2026-10-02T13:04:54.005" v="1471" actId="26606"/>
-          <ac:cxnSpMkLst>
-            <pc:docMk/>
-            <pc:sldMk cId="458852106" sldId="260"/>
-            <ac:cxnSpMk id="6" creationId="{00000000-0000-0000-0000-000000000000}"/>
-          </ac:cxnSpMkLst>
-        </pc:cxnChg>
-        <pc:cxnChg chg="mod replId">
-          <ac:chgData name="Eternal Centurion" userId="e8763818eec01546" providerId="LiveId" clId="{3F82CCBD-19C3-4A10-8C8B-FF6F78865329}" dt="2026-10-02T13:04:54.005" v="1471" actId="26606"/>
-          <ac:cxnSpMkLst>
-            <pc:docMk/>
-            <pc:sldMk cId="458852106" sldId="260"/>
-            <ac:cxnSpMk id="8" creationId="{00000000-0000-0000-0000-000000000000}"/>
-          </ac:cxnSpMkLst>
-        </pc:cxnChg>
-      </pc:sldChg>
-      <pc:sldChg chg="addSp delSp modSp new mod ord">
-        <pc:chgData name="Eternal Centurion" userId="e8763818eec01546" providerId="LiveId" clId="{3F82CCBD-19C3-4A10-8C8B-FF6F78865329}" dt="2026-10-02T16:08:49.224" v="2040" actId="26606"/>
-        <pc:sldMkLst>
-          <pc:docMk/>
-          <pc:sldMk cId="1486826622" sldId="261"/>
-        </pc:sldMkLst>
-        <pc:spChg chg="mod">
-          <ac:chgData name="Eternal Centurion" userId="e8763818eec01546" providerId="LiveId" clId="{3F82CCBD-19C3-4A10-8C8B-FF6F78865329}" dt="2026-10-02T16:03:37.872" v="2035" actId="26606"/>
-          <ac:spMkLst>
-            <pc:docMk/>
-            <pc:sldMk cId="1486826622" sldId="261"/>
-            <ac:spMk id="2" creationId="{29F70736-3EBA-2935-D7B8-9F1FCD6C2BF5}"/>
-          </ac:spMkLst>
-        </pc:spChg>
-        <pc:spChg chg="mod">
-          <ac:chgData name="Eternal Centurion" userId="e8763818eec01546" providerId="LiveId" clId="{3F82CCBD-19C3-4A10-8C8B-FF6F78865329}" dt="2026-10-02T16:03:37.872" v="2035" actId="26606"/>
-          <ac:spMkLst>
-            <pc:docMk/>
-            <pc:sldMk cId="1486826622" sldId="261"/>
-            <ac:spMk id="3" creationId="{38FF8088-7F6A-5F80-783F-CDCEA456A4BE}"/>
-          </ac:spMkLst>
-        </pc:spChg>
-        <pc:spChg chg="add mod">
-          <ac:chgData name="Eternal Centurion" userId="e8763818eec01546" providerId="LiveId" clId="{3F82CCBD-19C3-4A10-8C8B-FF6F78865329}" dt="2026-10-02T16:08:49.224" v="2040" actId="26606"/>
-          <ac:spMkLst>
-            <pc:docMk/>
-            <pc:sldMk cId="1486826622" sldId="261"/>
-            <ac:spMk id="4" creationId="{F1930B1F-6716-398A-DA05-F91A9E4584CA}"/>
-          </ac:spMkLst>
-        </pc:spChg>
-        <pc:spChg chg="add mod">
-          <ac:chgData name="Eternal Centurion" userId="e8763818eec01546" providerId="LiveId" clId="{3F82CCBD-19C3-4A10-8C8B-FF6F78865329}" dt="2026-10-02T16:08:49.224" v="2040" actId="26606"/>
-          <ac:spMkLst>
-            <pc:docMk/>
-            <pc:sldMk cId="1486826622" sldId="261"/>
-            <ac:spMk id="6" creationId="{F9207F20-264A-F969-31E8-3B27497346E2}"/>
-          </ac:spMkLst>
-        </pc:spChg>
-        <pc:spChg chg="add mod">
-          <ac:chgData name="Eternal Centurion" userId="e8763818eec01546" providerId="LiveId" clId="{3F82CCBD-19C3-4A10-8C8B-FF6F78865329}" dt="2026-10-02T16:08:49.224" v="2040" actId="26606"/>
-          <ac:spMkLst>
-            <pc:docMk/>
-            <pc:sldMk cId="1486826622" sldId="261"/>
-            <ac:spMk id="8" creationId="{A05A0650-8824-FDC8-3E5D-B9943B94DB30}"/>
-          </ac:spMkLst>
-        </pc:spChg>
-        <pc:spChg chg="add mod">
-          <ac:chgData name="Eternal Centurion" userId="e8763818eec01546" providerId="LiveId" clId="{3F82CCBD-19C3-4A10-8C8B-FF6F78865329}" dt="2026-10-02T16:08:49.224" v="2040" actId="26606"/>
-          <ac:spMkLst>
-            <pc:docMk/>
-            <pc:sldMk cId="1486826622" sldId="261"/>
-            <ac:spMk id="10" creationId="{DE22A4EA-25B8-4C8C-5CEB-95E9FC2EA614}"/>
-          </ac:spMkLst>
-        </pc:spChg>
-        <pc:spChg chg="add mod">
-          <ac:chgData name="Eternal Centurion" userId="e8763818eec01546" providerId="LiveId" clId="{3F82CCBD-19C3-4A10-8C8B-FF6F78865329}" dt="2026-10-02T16:08:49.224" v="2040" actId="26606"/>
-          <ac:spMkLst>
-            <pc:docMk/>
-            <pc:sldMk cId="1486826622" sldId="261"/>
-            <ac:spMk id="12" creationId="{69F5AFA9-F52D-E4C3-0363-87F9063DDC9A}"/>
-          </ac:spMkLst>
-        </pc:spChg>
-        <pc:spChg chg="add mod">
-          <ac:chgData name="Eternal Centurion" userId="e8763818eec01546" providerId="LiveId" clId="{3F82CCBD-19C3-4A10-8C8B-FF6F78865329}" dt="2026-10-02T16:08:49.224" v="2040" actId="26606"/>
-          <ac:spMkLst>
-            <pc:docMk/>
-            <pc:sldMk cId="1486826622" sldId="261"/>
-            <ac:spMk id="14" creationId="{CC42AF26-779C-A69D-BC6E-3B4CC68D00CC}"/>
-          </ac:spMkLst>
-        </pc:spChg>
-        <pc:spChg chg="add">
-          <ac:chgData name="Eternal Centurion" userId="e8763818eec01546" providerId="LiveId" clId="{3F82CCBD-19C3-4A10-8C8B-FF6F78865329}" dt="2026-10-02T16:08:49.224" v="2040" actId="26606"/>
-          <ac:spMkLst>
-            <pc:docMk/>
-            <pc:sldMk cId="1486826622" sldId="261"/>
-            <ac:spMk id="22" creationId="{00000000-0000-0000-0000-000000000000}"/>
-          </ac:spMkLst>
-        </pc:spChg>
-        <pc:spChg chg="add">
-          <ac:chgData name="Eternal Centurion" userId="e8763818eec01546" providerId="LiveId" clId="{3F82CCBD-19C3-4A10-8C8B-FF6F78865329}" dt="2026-10-02T16:08:49.224" v="2040" actId="26606"/>
-          <ac:spMkLst>
-            <pc:docMk/>
-            <pc:sldMk cId="1486826622" sldId="261"/>
-            <ac:spMk id="23" creationId="{00000000-0000-0000-0000-000000000000}"/>
-          </ac:spMkLst>
-        </pc:spChg>
-        <pc:spChg chg="add">
-          <ac:chgData name="Eternal Centurion" userId="e8763818eec01546" providerId="LiveId" clId="{3F82CCBD-19C3-4A10-8C8B-FF6F78865329}" dt="2026-10-02T16:08:49.224" v="2040" actId="26606"/>
-          <ac:spMkLst>
-            <pc:docMk/>
-            <pc:sldMk cId="1486826622" sldId="261"/>
-            <ac:spMk id="24" creationId="{00000000-0000-0000-0000-000000000000}"/>
-          </ac:spMkLst>
-        </pc:spChg>
-        <pc:cxnChg chg="add mod replId">
-          <ac:chgData name="Eternal Centurion" userId="e8763818eec01546" providerId="LiveId" clId="{3F82CCBD-19C3-4A10-8C8B-FF6F78865329}" dt="2026-10-02T16:03:37.859" v="2034" actId="26606"/>
-          <ac:cxnSpMkLst>
-            <pc:docMk/>
-            <pc:sldMk cId="1486826622" sldId="261"/>
-            <ac:cxnSpMk id="5" creationId="{44D6871B-37F5-A518-F29E-E4D9B3FA2E40}"/>
-          </ac:cxnSpMkLst>
-        </pc:cxnChg>
-        <pc:cxnChg chg="add mod replId">
-          <ac:chgData name="Eternal Centurion" userId="e8763818eec01546" providerId="LiveId" clId="{3F82CCBD-19C3-4A10-8C8B-FF6F78865329}" dt="2026-10-02T16:03:37.859" v="2034" actId="26606"/>
-          <ac:cxnSpMkLst>
-            <pc:docMk/>
-            <pc:sldMk cId="1486826622" sldId="261"/>
-            <ac:cxnSpMk id="7" creationId="{181D55BC-463A-DC76-1BC4-30C61C29BE08}"/>
-          </ac:cxnSpMkLst>
-        </pc:cxnChg>
-        <pc:cxnChg chg="add mod replId">
-          <ac:chgData name="Eternal Centurion" userId="e8763818eec01546" providerId="LiveId" clId="{3F82CCBD-19C3-4A10-8C8B-FF6F78865329}" dt="2026-10-02T16:03:37.859" v="2034" actId="26606"/>
-          <ac:cxnSpMkLst>
-            <pc:docMk/>
-            <pc:sldMk cId="1486826622" sldId="261"/>
-            <ac:cxnSpMk id="9" creationId="{DEFCDFC0-3BFF-FC2F-B614-32ACCEA66AA6}"/>
-          </ac:cxnSpMkLst>
-        </pc:cxnChg>
-        <pc:cxnChg chg="mod">
-          <ac:chgData name="Eternal Centurion" userId="e8763818eec01546" providerId="LiveId" clId="{3F82CCBD-19C3-4A10-8C8B-FF6F78865329}" dt="2026-10-02T16:08:49.224" v="2040" actId="26606"/>
-          <ac:cxnSpMkLst>
-            <pc:docMk/>
-            <pc:sldMk cId="1486826622" sldId="261"/>
-            <ac:cxnSpMk id="15" creationId="{00000000-0000-0000-0000-000000000000}"/>
-          </ac:cxnSpMkLst>
-        </pc:cxnChg>
-        <pc:cxnChg chg="add">
-          <ac:chgData name="Eternal Centurion" userId="e8763818eec01546" providerId="LiveId" clId="{3F82CCBD-19C3-4A10-8C8B-FF6F78865329}" dt="2026-10-02T16:03:37.872" v="2035" actId="26606"/>
-          <ac:cxnSpMkLst>
-            <pc:docMk/>
-            <pc:sldMk cId="1486826622" sldId="261"/>
-            <ac:cxnSpMk id="17" creationId="{00000000-0000-0000-0000-000000000000}"/>
-          </ac:cxnSpMkLst>
-        </pc:cxnChg>
-        <pc:cxnChg chg="add">
-          <ac:chgData name="Eternal Centurion" userId="e8763818eec01546" providerId="LiveId" clId="{3F82CCBD-19C3-4A10-8C8B-FF6F78865329}" dt="2026-10-02T16:03:37.872" v="2035" actId="26606"/>
-          <ac:cxnSpMkLst>
-            <pc:docMk/>
-            <pc:sldMk cId="1486826622" sldId="261"/>
-            <ac:cxnSpMk id="21" creationId="{00000000-0000-0000-0000-000000000000}"/>
-          </ac:cxnSpMkLst>
-        </pc:cxnChg>
-        <pc:cxnChg chg="add">
-          <ac:chgData name="Eternal Centurion" userId="e8763818eec01546" providerId="LiveId" clId="{3F82CCBD-19C3-4A10-8C8B-FF6F78865329}" dt="2026-10-02T16:00:57.799" v="1826" actId="11529"/>
-          <ac:cxnSpMkLst>
-            <pc:docMk/>
-            <pc:sldMk cId="1486826622" sldId="261"/>
-            <ac:cxnSpMk id="22" creationId="{02206C66-891C-ED0B-8144-33AC022C67FB}"/>
-          </ac:cxnSpMkLst>
-        </pc:cxnChg>
-        <pc:cxnChg chg="add">
-          <ac:chgData name="Eternal Centurion" userId="e8763818eec01546" providerId="LiveId" clId="{3F82CCBD-19C3-4A10-8C8B-FF6F78865329}" dt="2026-10-02T16:01:01.747" v="1827" actId="11529"/>
-          <ac:cxnSpMkLst>
-            <pc:docMk/>
-            <pc:sldMk cId="1486826622" sldId="261"/>
-            <ac:cxnSpMk id="24" creationId="{FB4CF34D-0518-19E4-CC77-09E6FEE06AD3}"/>
-          </ac:cxnSpMkLst>
-        </pc:cxnChg>
-      </pc:sldChg>
-      <pc:sldChg chg="addSp delSp modSp new mod">
-        <pc:chgData name="Eternal Centurion" userId="e8763818eec01546" providerId="LiveId" clId="{3F82CCBD-19C3-4A10-8C8B-FF6F78865329}" dt="2026-10-02T16:28:05.897" v="2747" actId="26606"/>
-        <pc:sldMkLst>
-          <pc:docMk/>
-          <pc:sldMk cId="1819677001" sldId="262"/>
-        </pc:sldMkLst>
-        <pc:spChg chg="mod">
-          <ac:chgData name="Eternal Centurion" userId="e8763818eec01546" providerId="LiveId" clId="{3F82CCBD-19C3-4A10-8C8B-FF6F78865329}" dt="2026-10-02T16:15:44.576" v="2728" actId="27636"/>
-          <ac:spMkLst>
-            <pc:docMk/>
-            <pc:sldMk cId="1819677001" sldId="262"/>
-            <ac:spMk id="2" creationId="{11FF5DE5-6C96-5EC8-C99D-DD4AFAA334CF}"/>
-          </ac:spMkLst>
-        </pc:spChg>
-        <pc:spChg chg="mod">
-          <ac:chgData name="Eternal Centurion" userId="e8763818eec01546" providerId="LiveId" clId="{3F82CCBD-19C3-4A10-8C8B-FF6F78865329}" dt="2026-10-02T16:26:25.396" v="2746" actId="26606"/>
-          <ac:spMkLst>
-            <pc:docMk/>
-            <pc:sldMk cId="1819677001" sldId="262"/>
-            <ac:spMk id="3" creationId="{9D13339E-80DB-735B-913E-D09B03995964}"/>
-          </ac:spMkLst>
-        </pc:spChg>
-        <pc:spChg chg="add mod">
-          <ac:chgData name="Eternal Centurion" userId="e8763818eec01546" providerId="LiveId" clId="{3F82CCBD-19C3-4A10-8C8B-FF6F78865329}" dt="2026-10-02T16:28:05.897" v="2747" actId="26606"/>
-          <ac:spMkLst>
-            <pc:docMk/>
-            <pc:sldMk cId="1819677001" sldId="262"/>
-            <ac:spMk id="4" creationId="{00000000-0000-0000-0000-000000000000}"/>
-          </ac:spMkLst>
-        </pc:spChg>
-        <pc:spChg chg="add mod">
-          <ac:chgData name="Eternal Centurion" userId="e8763818eec01546" providerId="LiveId" clId="{3F82CCBD-19C3-4A10-8C8B-FF6F78865329}" dt="2026-10-02T16:26:25.396" v="2746" actId="26606"/>
-          <ac:spMkLst>
-            <pc:docMk/>
-            <pc:sldMk cId="1819677001" sldId="262"/>
-            <ac:spMk id="5" creationId="{00000000-0000-0000-0000-000000000000}"/>
-          </ac:spMkLst>
-        </pc:spChg>
-        <pc:spChg chg="add mod">
-          <ac:chgData name="Eternal Centurion" userId="e8763818eec01546" providerId="LiveId" clId="{3F82CCBD-19C3-4A10-8C8B-FF6F78865329}" dt="2026-10-02T16:26:25.396" v="2746" actId="26606"/>
-          <ac:spMkLst>
-            <pc:docMk/>
-            <pc:sldMk cId="1819677001" sldId="262"/>
-            <ac:spMk id="6" creationId="{00000000-0000-0000-0000-000000000000}"/>
-          </ac:spMkLst>
-        </pc:spChg>
-        <pc:spChg chg="add mod">
-          <ac:chgData name="Eternal Centurion" userId="e8763818eec01546" providerId="LiveId" clId="{3F82CCBD-19C3-4A10-8C8B-FF6F78865329}" dt="2026-10-02T16:28:05.897" v="2747" actId="26606"/>
-          <ac:spMkLst>
-            <pc:docMk/>
-            <pc:sldMk cId="1819677001" sldId="262"/>
-            <ac:spMk id="7" creationId="{00000000-0000-0000-0000-000000000000}"/>
-          </ac:spMkLst>
-        </pc:spChg>
-        <pc:spChg chg="add mod">
-          <ac:chgData name="Eternal Centurion" userId="e8763818eec01546" providerId="LiveId" clId="{3F82CCBD-19C3-4A10-8C8B-FF6F78865329}" dt="2026-10-02T16:26:25.396" v="2746" actId="26606"/>
-          <ac:spMkLst>
-            <pc:docMk/>
-            <pc:sldMk cId="1819677001" sldId="262"/>
-            <ac:spMk id="8" creationId="{00000000-0000-0000-0000-000000000000}"/>
-          </ac:spMkLst>
-        </pc:spChg>
-        <pc:spChg chg="add mod">
-          <ac:chgData name="Eternal Centurion" userId="e8763818eec01546" providerId="LiveId" clId="{3F82CCBD-19C3-4A10-8C8B-FF6F78865329}" dt="2026-10-02T16:28:05.897" v="2747" actId="26606"/>
-          <ac:spMkLst>
-            <pc:docMk/>
-            <pc:sldMk cId="1819677001" sldId="262"/>
-            <ac:spMk id="9" creationId="{00000000-0000-0000-0000-000000000000}"/>
-          </ac:spMkLst>
-        </pc:spChg>
-        <pc:spChg chg="add del">
-          <ac:chgData name="Eternal Centurion" userId="e8763818eec01546" providerId="LiveId" clId="{3F82CCBD-19C3-4A10-8C8B-FF6F78865329}" dt="2026-10-02T16:26:25.114" v="2745" actId="26606"/>
-          <ac:spMkLst>
-            <pc:docMk/>
-            <pc:sldMk cId="1819677001" sldId="262"/>
-            <ac:spMk id="10" creationId="{00000000-0000-0000-0000-000000000000}"/>
-          </ac:spMkLst>
-        </pc:spChg>
-        <pc:spChg chg="add del mod ord">
-          <ac:chgData name="Eternal Centurion" userId="e8763818eec01546" providerId="LiveId" clId="{3F82CCBD-19C3-4A10-8C8B-FF6F78865329}" dt="2026-10-02T16:26:25.114" v="2745" actId="26606"/>
-          <ac:spMkLst>
-            <pc:docMk/>
-            <pc:sldMk cId="1819677001" sldId="262"/>
-            <ac:spMk id="11" creationId="{00000000-0000-0000-0000-000000000000}"/>
-          </ac:spMkLst>
-        </pc:spChg>
-        <pc:spChg chg="add del">
-          <ac:chgData name="Eternal Centurion" userId="e8763818eec01546" providerId="LiveId" clId="{3F82CCBD-19C3-4A10-8C8B-FF6F78865329}" dt="2026-10-02T16:18:11.325" v="2733" actId="26606"/>
-          <ac:spMkLst>
-            <pc:docMk/>
-            <pc:sldMk cId="1819677001" sldId="262"/>
-            <ac:spMk id="12" creationId="{00000000-0000-0000-0000-000000000000}"/>
-          </ac:spMkLst>
-        </pc:spChg>
-        <pc:spChg chg="del mod">
-          <ac:chgData name="Eternal Centurion" userId="e8763818eec01546" providerId="LiveId" clId="{3F82CCBD-19C3-4A10-8C8B-FF6F78865329}" dt="2026-10-02T16:20:23.473" v="2736" actId="26606"/>
-          <ac:spMkLst>
-            <pc:docMk/>
-            <pc:sldMk cId="1819677001" sldId="262"/>
-            <ac:spMk id="13" creationId="{00000000-0000-0000-0000-000000000000}"/>
-          </ac:spMkLst>
-        </pc:spChg>
-        <pc:spChg chg="add del">
-          <ac:chgData name="Eternal Centurion" userId="e8763818eec01546" providerId="LiveId" clId="{3F82CCBD-19C3-4A10-8C8B-FF6F78865329}" dt="2026-10-02T16:18:11.325" v="2733" actId="26606"/>
-          <ac:spMkLst>
-            <pc:docMk/>
-            <pc:sldMk cId="1819677001" sldId="262"/>
-            <ac:spMk id="14" creationId="{00000000-0000-0000-0000-000000000000}"/>
-          </ac:spMkLst>
-        </pc:spChg>
-        <pc:spChg chg="add del mod">
-          <ac:chgData name="Eternal Centurion" userId="e8763818eec01546" providerId="LiveId" clId="{3F82CCBD-19C3-4A10-8C8B-FF6F78865329}" dt="2026-10-02T16:20:23.473" v="2736" actId="26606"/>
-          <ac:spMkLst>
-            <pc:docMk/>
-            <pc:sldMk cId="1819677001" sldId="262"/>
-            <ac:spMk id="15" creationId="{00000000-0000-0000-0000-000000000000}"/>
-          </ac:spMkLst>
-        </pc:spChg>
-      </pc:sldChg>
-      <pc:sldChg chg="new del">
-        <pc:chgData name="Eternal Centurion" userId="e8763818eec01546" providerId="LiveId" clId="{3F82CCBD-19C3-4A10-8C8B-FF6F78865329}" dt="2026-10-02T13:11:03.622" v="1483" actId="680"/>
-        <pc:sldMkLst>
-          <pc:docMk/>
-          <pc:sldMk cId="2070493584" sldId="262"/>
-        </pc:sldMkLst>
-      </pc:sldChg>
-      <pc:sldChg chg="modSp new del mod">
-        <pc:chgData name="Eternal Centurion" userId="e8763818eec01546" providerId="LiveId" clId="{3F82CCBD-19C3-4A10-8C8B-FF6F78865329}" dt="2026-10-02T16:36:33.693" v="3032" actId="2696"/>
-        <pc:sldMkLst>
-          <pc:docMk/>
-          <pc:sldMk cId="3021500361" sldId="263"/>
-        </pc:sldMkLst>
-        <pc:spChg chg="mod">
-          <ac:chgData name="Eternal Centurion" userId="e8763818eec01546" providerId="LiveId" clId="{3F82CCBD-19C3-4A10-8C8B-FF6F78865329}" dt="2026-10-02T16:28:31.106" v="2770" actId="6549"/>
-          <ac:spMkLst>
-            <pc:docMk/>
-            <pc:sldMk cId="3021500361" sldId="263"/>
-            <ac:spMk id="2" creationId="{C5BF0333-2AF3-93DC-3A97-FE1AA0B989AB}"/>
-          </ac:spMkLst>
-        </pc:spChg>
-        <pc:spChg chg="mod">
-          <ac:chgData name="Eternal Centurion" userId="e8763818eec01546" providerId="LiveId" clId="{3F82CCBD-19C3-4A10-8C8B-FF6F78865329}" dt="2026-10-02T16:30:06.560" v="3022" actId="20577"/>
-          <ac:spMkLst>
-            <pc:docMk/>
-            <pc:sldMk cId="3021500361" sldId="263"/>
-            <ac:spMk id="3" creationId="{B2A77142-E861-C470-90AD-9AB03AE83AD1}"/>
-          </ac:spMkLst>
-        </pc:spChg>
-      </pc:sldChg>
-    </pc:docChg>
-  </pc:docChgLst>
-</pc:chgInfo>
 </file>
 
 <file path=ppt/notesMasters/notesMaster1.xml><?xml version="1.0" encoding="utf-8"?>
@@ -1414,7 +154,7 @@
     </p:spTree>
     <p:extLst>
       <p:ext uri="{BB962C8B-B14F-4D97-AF65-F5344CB8AC3E}">
-        <p14:creationId xmlns:p14="http://schemas.microsoft.com/office/powerpoint/2010/main" val="1547541335"/>
+        <p14:creationId xmlns:p14="http://schemas.microsoft.com/office/powerpoint/2010/main" val="961596206"/>
       </p:ext>
     </p:extLst>
   </p:cSld>
@@ -1802,7 +542,7 @@
           <a:p>
             <a:fld id="{207DF821-4229-9947-B832-FAA4C66F4533}" type="datetimeFigureOut">
               <a:rPr lang="en-US" smtClean="0"/>
-              <a:t>10/2/2026</a:t>
+              <a:t>10/5/2026</a:t>
             </a:fld>
             <a:endParaRPr lang="en-US"/>
           </a:p>
@@ -2000,7 +740,7 @@
           <a:p>
             <a:fld id="{207DF821-4229-9947-B832-FAA4C66F4533}" type="datetimeFigureOut">
               <a:rPr lang="en-US" smtClean="0"/>
-              <a:t>10/2/2026</a:t>
+              <a:t>10/5/2026</a:t>
             </a:fld>
             <a:endParaRPr lang="en-US"/>
           </a:p>
@@ -2208,7 +948,7 @@
           <a:p>
             <a:fld id="{207DF821-4229-9947-B832-FAA4C66F4533}" type="datetimeFigureOut">
               <a:rPr lang="en-US" smtClean="0"/>
-              <a:t>10/2/2026</a:t>
+              <a:t>10/5/2026</a:t>
             </a:fld>
             <a:endParaRPr lang="en-US"/>
           </a:p>
@@ -2406,7 +1146,7 @@
           <a:p>
             <a:fld id="{207DF821-4229-9947-B832-FAA4C66F4533}" type="datetimeFigureOut">
               <a:rPr lang="en-US" smtClean="0"/>
-              <a:t>10/2/2026</a:t>
+              <a:t>10/5/2026</a:t>
             </a:fld>
             <a:endParaRPr lang="en-US"/>
           </a:p>
@@ -2681,7 +1421,7 @@
           <a:p>
             <a:fld id="{207DF821-4229-9947-B832-FAA4C66F4533}" type="datetimeFigureOut">
               <a:rPr lang="en-US" smtClean="0"/>
-              <a:t>10/2/2026</a:t>
+              <a:t>10/5/2026</a:t>
             </a:fld>
             <a:endParaRPr lang="en-US"/>
           </a:p>
@@ -2946,7 +1686,7 @@
           <a:p>
             <a:fld id="{207DF821-4229-9947-B832-FAA4C66F4533}" type="datetimeFigureOut">
               <a:rPr lang="en-US" smtClean="0"/>
-              <a:t>10/2/2026</a:t>
+              <a:t>10/5/2026</a:t>
             </a:fld>
             <a:endParaRPr lang="en-US"/>
           </a:p>
@@ -3358,7 +2098,7 @@
           <a:p>
             <a:fld id="{207DF821-4229-9947-B832-FAA4C66F4533}" type="datetimeFigureOut">
               <a:rPr lang="en-US" smtClean="0"/>
-              <a:t>10/2/2026</a:t>
+              <a:t>10/5/2026</a:t>
             </a:fld>
             <a:endParaRPr lang="en-US"/>
           </a:p>
@@ -3499,7 +2239,7 @@
           <a:p>
             <a:fld id="{207DF821-4229-9947-B832-FAA4C66F4533}" type="datetimeFigureOut">
               <a:rPr lang="en-US" smtClean="0"/>
-              <a:t>10/2/2026</a:t>
+              <a:t>10/5/2026</a:t>
             </a:fld>
             <a:endParaRPr lang="en-US"/>
           </a:p>
@@ -3612,7 +2352,7 @@
           <a:p>
             <a:fld id="{207DF821-4229-9947-B832-FAA4C66F4533}" type="datetimeFigureOut">
               <a:rPr lang="en-US" smtClean="0"/>
-              <a:t>10/2/2026</a:t>
+              <a:t>10/5/2026</a:t>
             </a:fld>
             <a:endParaRPr lang="en-US"/>
           </a:p>
@@ -3923,7 +2663,7 @@
           <a:p>
             <a:fld id="{207DF821-4229-9947-B832-FAA4C66F4533}" type="datetimeFigureOut">
               <a:rPr lang="en-US" smtClean="0"/>
-              <a:t>10/2/2026</a:t>
+              <a:t>10/5/2026</a:t>
             </a:fld>
             <a:endParaRPr lang="en-US"/>
           </a:p>
@@ -4211,7 +2951,7 @@
           <a:p>
             <a:fld id="{207DF821-4229-9947-B832-FAA4C66F4533}" type="datetimeFigureOut">
               <a:rPr lang="en-US" smtClean="0"/>
-              <a:t>10/2/2026</a:t>
+              <a:t>10/5/2026</a:t>
             </a:fld>
             <a:endParaRPr lang="en-US"/>
           </a:p>
@@ -4452,7 +3192,7 @@
           <a:p>
             <a:fld id="{207DF821-4229-9947-B832-FAA4C66F4533}" type="datetimeFigureOut">
               <a:rPr lang="en-US" smtClean="0"/>
-              <a:t>10/2/2026</a:t>
+              <a:t>10/5/2026</a:t>
             </a:fld>
             <a:endParaRPr lang="en-US"/>
           </a:p>
@@ -5972,8 +4712,8 @@
         </p:nvSpPr>
         <p:spPr>
           <a:xfrm>
-            <a:off x="594360" y="5513832"/>
-            <a:ext cx="11000232" cy="640080"/>
+            <a:off x="594360" y="5718200"/>
+            <a:ext cx="11000232" cy="608076"/>
           </a:xfrm>
           <a:prstGeom prst="rect">
             <a:avLst/>
@@ -6018,8 +4758,8 @@
         </p:nvSpPr>
         <p:spPr>
           <a:xfrm>
-            <a:off x="594360" y="5513832"/>
-            <a:ext cx="2286000" cy="640080"/>
+            <a:off x="594360" y="5718200"/>
+            <a:ext cx="2286000" cy="608076"/>
           </a:xfrm>
           <a:prstGeom prst="rect">
             <a:avLst/>
@@ -6064,8 +4804,8 @@
         </p:nvSpPr>
         <p:spPr>
           <a:xfrm>
-            <a:off x="6301392" y="2801325"/>
-            <a:ext cx="5293200" cy="2463125"/>
+            <a:off x="6301392" y="3060039"/>
+            <a:ext cx="5293200" cy="2501798"/>
           </a:xfrm>
           <a:prstGeom prst="rect">
             <a:avLst/>
@@ -6110,8 +4850,8 @@
         </p:nvSpPr>
         <p:spPr>
           <a:xfrm>
-            <a:off x="6301392" y="2801325"/>
-            <a:ext cx="5293200" cy="393415"/>
+            <a:off x="6301392" y="3060039"/>
+            <a:ext cx="5293200" cy="373532"/>
           </a:xfrm>
           <a:prstGeom prst="rect">
             <a:avLst/>
@@ -6156,8 +4896,8 @@
         </p:nvSpPr>
         <p:spPr>
           <a:xfrm>
-            <a:off x="594360" y="2801325"/>
-            <a:ext cx="5273952" cy="2463125"/>
+            <a:off x="594360" y="3060039"/>
+            <a:ext cx="5273952" cy="2501798"/>
           </a:xfrm>
           <a:prstGeom prst="rect">
             <a:avLst/>
@@ -6202,8 +4942,8 @@
         </p:nvSpPr>
         <p:spPr>
           <a:xfrm>
-            <a:off x="594360" y="2801325"/>
-            <a:ext cx="5273952" cy="393415"/>
+            <a:off x="594360" y="3060039"/>
+            <a:ext cx="5273952" cy="373532"/>
           </a:xfrm>
           <a:prstGeom prst="rect">
             <a:avLst/>
@@ -6249,7 +4989,7 @@
         <p:spPr>
           <a:xfrm>
             <a:off x="594360" y="1261872"/>
-            <a:ext cx="11000232" cy="1299982"/>
+            <a:ext cx="11000232" cy="1659178"/>
           </a:xfrm>
           <a:prstGeom prst="rect">
             <a:avLst/>
@@ -6295,7 +5035,7 @@
         <p:spPr>
           <a:xfrm>
             <a:off x="594360" y="1261872"/>
-            <a:ext cx="11000232" cy="393415"/>
+            <a:ext cx="11000232" cy="373744"/>
           </a:xfrm>
           <a:prstGeom prst="rect">
             <a:avLst/>
@@ -6390,8 +5130,8 @@
         </p:nvSpPr>
         <p:spPr>
           <a:xfrm>
-            <a:off x="738720" y="2861192"/>
-            <a:ext cx="4908240" cy="301752"/>
+            <a:off x="738720" y="3116503"/>
+            <a:ext cx="4908240" cy="286664"/>
           </a:xfrm>
         </p:spPr>
         <p:txBody>
@@ -6413,7 +5153,7 @@
               <a:buNone/>
             </a:pPr>
             <a:r>
-              <a:rPr lang="en-US" sz="1900" b="1">
+              <a:rPr lang="en-US" sz="1805" b="1">
                 <a:solidFill>
                   <a:srgbClr val="FFFFFF"/>
                 </a:solidFill>
@@ -6432,8 +5172,8 @@
         </p:nvSpPr>
         <p:spPr>
           <a:xfrm>
-            <a:off x="3090672" y="5596128"/>
-            <a:ext cx="2798064" cy="304379"/>
+            <a:off x="3090672" y="5796381"/>
+            <a:ext cx="2798064" cy="289160"/>
           </a:xfrm>
           <a:prstGeom prst="rect">
             <a:avLst/>
@@ -6459,7 +5199,7 @@
               <a:buNone/>
             </a:pPr>
             <a:r>
-              <a:rPr lang="en-US" sz="1900" b="1">
+              <a:rPr lang="en-US" sz="1805" b="1">
                 <a:solidFill>
                   <a:srgbClr val="002869"/>
                 </a:solidFill>
@@ -6478,8 +5218,8 @@
         </p:nvSpPr>
         <p:spPr>
           <a:xfrm>
-            <a:off x="3090672" y="5897880"/>
-            <a:ext cx="2798064" cy="228600"/>
+            <a:off x="3090672" y="6083046"/>
+            <a:ext cx="2798064" cy="228268"/>
           </a:xfrm>
           <a:prstGeom prst="rect">
             <a:avLst/>
@@ -6505,7 +5245,7 @@
               <a:buNone/>
             </a:pPr>
             <a:r>
-              <a:rPr lang="en-US" sz="1500" b="0">
+              <a:rPr lang="en-US" sz="1425" b="0">
                 <a:solidFill>
                   <a:srgbClr val="000000"/>
                 </a:solidFill>
@@ -6524,8 +5264,8 @@
         </p:nvSpPr>
         <p:spPr>
           <a:xfrm>
-            <a:off x="5852160" y="5596128"/>
-            <a:ext cx="2798064" cy="304379"/>
+            <a:off x="5852160" y="5796381"/>
+            <a:ext cx="2798064" cy="289160"/>
           </a:xfrm>
           <a:prstGeom prst="rect">
             <a:avLst/>
@@ -6551,7 +5291,7 @@
               <a:buNone/>
             </a:pPr>
             <a:r>
-              <a:rPr lang="en-US" sz="1900" b="1">
+              <a:rPr lang="en-US" sz="1805" b="1">
                 <a:solidFill>
                   <a:srgbClr val="002869"/>
                 </a:solidFill>
@@ -6570,8 +5310,8 @@
         </p:nvSpPr>
         <p:spPr>
           <a:xfrm>
-            <a:off x="5852160" y="5897880"/>
-            <a:ext cx="2798064" cy="228600"/>
+            <a:off x="5852160" y="6083046"/>
+            <a:ext cx="2798064" cy="228268"/>
           </a:xfrm>
           <a:prstGeom prst="rect">
             <a:avLst/>
@@ -6597,7 +5337,7 @@
               <a:buNone/>
             </a:pPr>
             <a:r>
-              <a:rPr lang="en-US" sz="1500" b="0">
+              <a:rPr lang="en-US" sz="1425" b="0">
                 <a:solidFill>
                   <a:srgbClr val="000000"/>
                 </a:solidFill>
@@ -6616,8 +5356,8 @@
         </p:nvSpPr>
         <p:spPr>
           <a:xfrm>
-            <a:off x="8613648" y="5596128"/>
-            <a:ext cx="2798064" cy="304379"/>
+            <a:off x="8613648" y="5796381"/>
+            <a:ext cx="2798064" cy="289160"/>
           </a:xfrm>
           <a:prstGeom prst="rect">
             <a:avLst/>
@@ -6643,7 +5383,7 @@
               <a:buNone/>
             </a:pPr>
             <a:r>
-              <a:rPr lang="en-US" sz="1900" b="1">
+              <a:rPr lang="en-US" sz="1805" b="1">
                 <a:solidFill>
                   <a:srgbClr val="002869"/>
                 </a:solidFill>
@@ -6662,8 +5402,8 @@
         </p:nvSpPr>
         <p:spPr>
           <a:xfrm>
-            <a:off x="8613648" y="5897880"/>
-            <a:ext cx="2798064" cy="228600"/>
+            <a:off x="8613648" y="6083046"/>
+            <a:ext cx="2798064" cy="228268"/>
           </a:xfrm>
           <a:prstGeom prst="rect">
             <a:avLst/>
@@ -6689,7 +5429,7 @@
               <a:buNone/>
             </a:pPr>
             <a:r>
-              <a:rPr lang="en-US" sz="1500" b="0">
+              <a:rPr lang="en-US" sz="1425" b="0">
                 <a:solidFill>
                   <a:srgbClr val="000000"/>
                 </a:solidFill>
@@ -6708,8 +5448,8 @@
         </p:nvSpPr>
         <p:spPr>
           <a:xfrm>
-            <a:off x="6445752" y="2861192"/>
-            <a:ext cx="4908240" cy="301752"/>
+            <a:off x="6445752" y="3116503"/>
+            <a:ext cx="4908240" cy="286664"/>
           </a:xfrm>
           <a:prstGeom prst="rect">
             <a:avLst/>
@@ -6735,7 +5475,7 @@
               <a:buNone/>
             </a:pPr>
             <a:r>
-              <a:rPr lang="en-US" sz="1900" b="1">
+              <a:rPr lang="en-US" sz="1805" b="1">
                 <a:solidFill>
                   <a:srgbClr val="FFFFFF"/>
                 </a:solidFill>
@@ -6754,8 +5494,8 @@
         </p:nvSpPr>
         <p:spPr>
           <a:xfrm>
-            <a:off x="757968" y="3340133"/>
-            <a:ext cx="4860120" cy="288349"/>
+            <a:off x="757968" y="3529126"/>
+            <a:ext cx="4860120" cy="273921"/>
           </a:xfrm>
           <a:prstGeom prst="rect">
             <a:avLst/>
@@ -6781,7 +5521,7 @@
               <a:buNone/>
             </a:pPr>
             <a:r>
-              <a:rPr lang="en-US" sz="1800" b="1">
+              <a:rPr lang="en-US" sz="1710" b="1">
                 <a:solidFill>
                   <a:srgbClr val="002869"/>
                 </a:solidFill>
@@ -6800,8 +5540,55 @@
         </p:nvSpPr>
         <p:spPr>
           <a:xfrm>
-            <a:off x="757968" y="3630919"/>
-            <a:ext cx="4860120" cy="272319"/>
+            <a:off x="757968" y="3807103"/>
+            <a:ext cx="4860120" cy="527090"/>
+          </a:xfrm>
+          <a:prstGeom prst="rect">
+            <a:avLst/>
+          </a:prstGeom>
+          <a:noFill/>
+        </p:spPr>
+        <p:txBody>
+          <a:bodyPr wrap="square" lIns="0" tIns="0" rIns="0" bIns="0" anchor="t">
+            <a:spAutoFit/>
+          </a:bodyPr>
+          <a:lstStyle/>
+          <a:p>
+            <a:pPr>
+              <a:lnSpc>
+                <a:spcPct val="108000"/>
+              </a:lnSpc>
+            </a:pPr>
+            <a:r>
+              <a:rPr lang="en-US" sz="1614" b="0">
+                <a:solidFill>
+                  <a:srgbClr val="000000"/>
+                </a:solidFill>
+                <a:latin typeface="Aptos"/>
+              </a:rPr>
+              <a:t>schema1.table1, schema2.table2</a:t>
+            </a:r>
+            <a:r>
+              <a:rPr lang="en-US" sz="1614">
+                <a:solidFill>
+                  <a:srgbClr val="000000"/>
+                </a:solidFill>
+              </a:rPr>
+              <a:t>, schema1.table1, schema2.table2</a:t>
+            </a:r>
+          </a:p>
+        </p:txBody>
+      </p:sp>
+      <p:sp>
+        <p:nvSpPr>
+          <p:cNvPr id="14" name="TextBox 13"/>
+          <p:cNvSpPr txBox="1"/>
+          <p:nvPr/>
+        </p:nvSpPr>
+        <p:spPr>
+          <a:xfrm>
+            <a:off x="757968" y="4345686"/>
+            <a:ext cx="4860120" cy="273921"/>
           </a:xfrm>
           <a:prstGeom prst="rect">
             <a:avLst/>
@@ -6827,27 +5614,27 @@
               <a:buNone/>
             </a:pPr>
             <a:r>
-              <a:rPr lang="en-US" sz="1700" b="0">
-                <a:solidFill>
-                  <a:srgbClr val="000000"/>
+              <a:rPr lang="en-US" sz="1710" b="1">
+                <a:solidFill>
+                  <a:srgbClr val="002869"/>
                 </a:solidFill>
                 <a:latin typeface="Aptos"/>
               </a:rPr>
-              <a:t>schema1.table1, schema2.table2</a:t>
-            </a:r>
-          </a:p>
-        </p:txBody>
-      </p:sp>
-      <p:sp>
-        <p:nvSpPr>
-          <p:cNvPr id="14" name="TextBox 13"/>
+              <a:t>LinkedIn (TeamA DB)</a:t>
+            </a:r>
+          </a:p>
+        </p:txBody>
+      </p:sp>
+      <p:sp>
+        <p:nvSpPr>
+          <p:cNvPr id="15" name="TextBox 14"/>
           <p:cNvSpPr txBox="1"/>
           <p:nvPr/>
         </p:nvSpPr>
         <p:spPr>
           <a:xfrm>
-            <a:off x="757968" y="3973020"/>
-            <a:ext cx="4860120" cy="288349"/>
+            <a:off x="757968" y="4623663"/>
+            <a:ext cx="4860120" cy="258532"/>
           </a:xfrm>
           <a:prstGeom prst="rect">
             <a:avLst/>
@@ -6873,27 +5660,27 @@
               <a:buNone/>
             </a:pPr>
             <a:r>
-              <a:rPr lang="en-US" sz="1800" b="1">
-                <a:solidFill>
-                  <a:srgbClr val="002869"/>
+              <a:rPr lang="en-US" sz="1614" b="0">
+                <a:solidFill>
+                  <a:srgbClr val="000000"/>
                 </a:solidFill>
                 <a:latin typeface="Aptos"/>
               </a:rPr>
-              <a:t>LinkedIn (TeamA DB)</a:t>
-            </a:r>
-          </a:p>
-        </p:txBody>
-      </p:sp>
-      <p:sp>
-        <p:nvSpPr>
-          <p:cNvPr id="15" name="TextBox 14"/>
+              <a:t>User histories collected via Lix API</a:t>
+            </a:r>
+          </a:p>
+        </p:txBody>
+      </p:sp>
+      <p:sp>
+        <p:nvSpPr>
+          <p:cNvPr id="16" name="TextBox 15"/>
           <p:cNvSpPr txBox="1"/>
           <p:nvPr/>
         </p:nvSpPr>
         <p:spPr>
           <a:xfrm>
-            <a:off x="757968" y="4263805"/>
-            <a:ext cx="4860120" cy="272319"/>
+            <a:off x="757968" y="4962448"/>
+            <a:ext cx="4860120" cy="273921"/>
           </a:xfrm>
           <a:prstGeom prst="rect">
             <a:avLst/>
@@ -6919,27 +5706,27 @@
               <a:buNone/>
             </a:pPr>
             <a:r>
-              <a:rPr lang="en-US" sz="1700" b="0">
-                <a:solidFill>
-                  <a:srgbClr val="000000"/>
+              <a:rPr lang="en-US" sz="1710" b="1">
+                <a:solidFill>
+                  <a:srgbClr val="002869"/>
                 </a:solidFill>
                 <a:latin typeface="Aptos"/>
               </a:rPr>
-              <a:t>User histories collected via Lix API</a:t>
-            </a:r>
-          </a:p>
-        </p:txBody>
-      </p:sp>
-      <p:sp>
-        <p:nvSpPr>
-          <p:cNvPr id="16" name="TextBox 15"/>
+              <a:t>ZoomInfo</a:t>
+            </a:r>
+          </a:p>
+        </p:txBody>
+      </p:sp>
+      <p:sp>
+        <p:nvSpPr>
+          <p:cNvPr id="17" name="TextBox 16"/>
           <p:cNvSpPr txBox="1"/>
           <p:nvPr/>
         </p:nvSpPr>
         <p:spPr>
           <a:xfrm>
-            <a:off x="757968" y="4605906"/>
-            <a:ext cx="4860120" cy="288349"/>
+            <a:off x="757968" y="5240426"/>
+            <a:ext cx="4860120" cy="260604"/>
           </a:xfrm>
           <a:prstGeom prst="rect">
             <a:avLst/>
@@ -6965,27 +5752,27 @@
               <a:buNone/>
             </a:pPr>
             <a:r>
-              <a:rPr lang="en-US" sz="1800" b="1">
-                <a:solidFill>
-                  <a:srgbClr val="002869"/>
+              <a:rPr lang="en-US" sz="1614" b="0">
+                <a:solidFill>
+                  <a:srgbClr val="000000"/>
                 </a:solidFill>
                 <a:latin typeface="Aptos"/>
               </a:rPr>
-              <a:t>ZoomInfo</a:t>
-            </a:r>
-          </a:p>
-        </p:txBody>
-      </p:sp>
-      <p:sp>
-        <p:nvSpPr>
-          <p:cNvPr id="17" name="TextBox 16"/>
+              <a:t>Enriched data for ~60K specific contact records</a:t>
+            </a:r>
+          </a:p>
+        </p:txBody>
+      </p:sp>
+      <p:sp>
+        <p:nvSpPr>
+          <p:cNvPr id="18" name="TextBox 17"/>
           <p:cNvSpPr txBox="1"/>
           <p:nvPr/>
         </p:nvSpPr>
         <p:spPr>
           <a:xfrm>
-            <a:off x="757968" y="4896691"/>
-            <a:ext cx="4860120" cy="272319"/>
+            <a:off x="6465000" y="3529126"/>
+            <a:ext cx="4860120" cy="273921"/>
           </a:xfrm>
           <a:prstGeom prst="rect">
             <a:avLst/>
@@ -7011,27 +5798,27 @@
               <a:buNone/>
             </a:pPr>
             <a:r>
-              <a:rPr lang="en-US" sz="1700" b="0">
-                <a:solidFill>
-                  <a:srgbClr val="000000"/>
+              <a:rPr lang="en-US" sz="1710" b="1">
+                <a:solidFill>
+                  <a:srgbClr val="002869"/>
                 </a:solidFill>
                 <a:latin typeface="Aptos"/>
               </a:rPr>
-              <a:t>Enriched data for ~60K specific contact records</a:t>
-            </a:r>
-          </a:p>
-        </p:txBody>
-      </p:sp>
-      <p:sp>
-        <p:nvSpPr>
-          <p:cNvPr id="18" name="TextBox 17"/>
+              <a:t>Person</a:t>
+            </a:r>
+          </a:p>
+        </p:txBody>
+      </p:sp>
+      <p:sp>
+        <p:nvSpPr>
+          <p:cNvPr id="19" name="TextBox 18"/>
           <p:cNvSpPr txBox="1"/>
           <p:nvPr/>
         </p:nvSpPr>
         <p:spPr>
           <a:xfrm>
-            <a:off x="6465000" y="3340133"/>
-            <a:ext cx="4860120" cy="288349"/>
+            <a:off x="6465000" y="3841850"/>
+            <a:ext cx="4860120" cy="529894"/>
           </a:xfrm>
           <a:prstGeom prst="rect">
             <a:avLst/>
@@ -7057,38 +5844,15 @@
               <a:buNone/>
             </a:pPr>
             <a:r>
-              <a:rPr lang="en-US" sz="1800" b="1">
-                <a:solidFill>
-                  <a:srgbClr val="002869"/>
+              <a:rPr lang="en-US" sz="1614" b="0">
+                <a:solidFill>
+                  <a:srgbClr val="000000"/>
                 </a:solidFill>
                 <a:latin typeface="Aptos"/>
               </a:rPr>
-              <a:t>Person</a:t>
-            </a:r>
-          </a:p>
-        </p:txBody>
-      </p:sp>
-      <p:sp>
-        <p:nvSpPr>
-          <p:cNvPr id="19" name="TextBox 18"/>
-          <p:cNvSpPr txBox="1"/>
-          <p:nvPr/>
-        </p:nvSpPr>
-        <p:spPr>
-          <a:xfrm>
-            <a:off x="6465000" y="3673681"/>
-            <a:ext cx="4860120" cy="554832"/>
-          </a:xfrm>
-          <a:prstGeom prst="rect">
-            <a:avLst/>
-          </a:prstGeom>
-          <a:noFill/>
-        </p:spPr>
-        <p:txBody>
-          <a:bodyPr wrap="square" lIns="0" tIns="0" rIns="0" bIns="0" anchor="t">
-            <a:spAutoFit/>
-          </a:bodyPr>
-          <a:lstStyle/>
+              <a:t>First Name, Last Name, Email,</a:t>
+            </a:r>
+          </a:p>
           <a:p>
             <a:pPr marL="0" indent="0" algn="l">
               <a:lnSpc>
@@ -7103,15 +5867,38 @@
               <a:buNone/>
             </a:pPr>
             <a:r>
-              <a:rPr lang="en-US" sz="1700" b="0" dirty="0">
+              <a:rPr lang="en-US" sz="1614" b="0">
                 <a:solidFill>
                   <a:srgbClr val="000000"/>
                 </a:solidFill>
                 <a:latin typeface="Aptos"/>
               </a:rPr>
-              <a:t>First Name, Last Name, Email,</a:t>
-            </a:r>
-          </a:p>
+              <a:t>LinkedIn URL, Phone Number</a:t>
+            </a:r>
+          </a:p>
+        </p:txBody>
+      </p:sp>
+      <p:sp>
+        <p:nvSpPr>
+          <p:cNvPr id="20" name="TextBox 19"/>
+          <p:cNvSpPr txBox="1"/>
+          <p:nvPr/>
+        </p:nvSpPr>
+        <p:spPr>
+          <a:xfrm>
+            <a:off x="6465000" y="4684471"/>
+            <a:ext cx="4860120" cy="273921"/>
+          </a:xfrm>
+          <a:prstGeom prst="rect">
+            <a:avLst/>
+          </a:prstGeom>
+          <a:noFill/>
+        </p:spPr>
+        <p:txBody>
+          <a:bodyPr wrap="square" lIns="0" tIns="0" rIns="0" bIns="0" anchor="t">
+            <a:spAutoFit/>
+          </a:bodyPr>
+          <a:lstStyle/>
           <a:p>
             <a:pPr marL="0" indent="0" algn="l">
               <a:lnSpc>
@@ -7126,27 +5913,27 @@
               <a:buNone/>
             </a:pPr>
             <a:r>
-              <a:rPr lang="en-US" sz="1700" b="0" dirty="0">
-                <a:solidFill>
-                  <a:srgbClr val="000000"/>
+              <a:rPr lang="en-US" sz="1710" b="1">
+                <a:solidFill>
+                  <a:srgbClr val="002869"/>
                 </a:solidFill>
                 <a:latin typeface="Aptos"/>
               </a:rPr>
-              <a:t>LinkedIn URL, Phone Number</a:t>
-            </a:r>
-          </a:p>
-        </p:txBody>
-      </p:sp>
-      <p:sp>
-        <p:nvSpPr>
-          <p:cNvPr id="20" name="TextBox 19"/>
+              <a:t>Account</a:t>
+            </a:r>
+          </a:p>
+        </p:txBody>
+      </p:sp>
+      <p:sp>
+        <p:nvSpPr>
+          <p:cNvPr id="21" name="TextBox 20"/>
           <p:cNvSpPr txBox="1"/>
           <p:nvPr/>
         </p:nvSpPr>
         <p:spPr>
           <a:xfrm>
-            <a:off x="6465000" y="4332225"/>
-            <a:ext cx="4860120" cy="288349"/>
+            <a:off x="6465000" y="4962448"/>
+            <a:ext cx="4860120" cy="529894"/>
           </a:xfrm>
           <a:prstGeom prst="rect">
             <a:avLst/>
@@ -7172,38 +5959,15 @@
               <a:buNone/>
             </a:pPr>
             <a:r>
-              <a:rPr lang="en-US" sz="1800" b="1">
-                <a:solidFill>
-                  <a:srgbClr val="002869"/>
+              <a:rPr lang="en-US" sz="1614" b="0">
+                <a:solidFill>
+                  <a:srgbClr val="000000"/>
                 </a:solidFill>
                 <a:latin typeface="Aptos"/>
               </a:rPr>
-              <a:t>Account</a:t>
-            </a:r>
-          </a:p>
-        </p:txBody>
-      </p:sp>
-      <p:sp>
-        <p:nvSpPr>
-          <p:cNvPr id="21" name="TextBox 20"/>
-          <p:cNvSpPr txBox="1"/>
-          <p:nvPr/>
-        </p:nvSpPr>
-        <p:spPr>
-          <a:xfrm>
-            <a:off x="6465000" y="4623011"/>
-            <a:ext cx="4860120" cy="554832"/>
-          </a:xfrm>
-          <a:prstGeom prst="rect">
-            <a:avLst/>
-          </a:prstGeom>
-          <a:noFill/>
-        </p:spPr>
-        <p:txBody>
-          <a:bodyPr wrap="square" lIns="0" tIns="0" rIns="0" bIns="0" anchor="t">
-            <a:spAutoFit/>
-          </a:bodyPr>
-          <a:lstStyle/>
+              <a:t>Name, Org Code, SAS ID, Enterprise ID,</a:t>
+            </a:r>
+          </a:p>
           <a:p>
             <a:pPr marL="0" indent="0" algn="l">
               <a:lnSpc>
@@ -7218,15 +5982,83 @@
               <a:buNone/>
             </a:pPr>
             <a:r>
-              <a:rPr lang="en-US" sz="1700" b="0">
+              <a:rPr lang="en-US" sz="1614" b="0">
                 <a:solidFill>
                   <a:srgbClr val="000000"/>
                 </a:solidFill>
                 <a:latin typeface="Aptos"/>
               </a:rPr>
-              <a:t>Name, Org Code, SAS ID, Enterprise ID,</a:t>
-            </a:r>
-          </a:p>
+              <a:t>Location Attributes</a:t>
+            </a:r>
+          </a:p>
+        </p:txBody>
+      </p:sp>
+      <p:sp>
+        <p:nvSpPr>
+          <p:cNvPr id="28" name="TextBox 27"/>
+          <p:cNvSpPr txBox="1"/>
+          <p:nvPr/>
+        </p:nvSpPr>
+        <p:spPr>
+          <a:xfrm>
+            <a:off x="738720" y="1318745"/>
+            <a:ext cx="9624000" cy="304326"/>
+          </a:xfrm>
+          <a:prstGeom prst="rect">
+            <a:avLst/>
+          </a:prstGeom>
+          <a:noFill/>
+        </p:spPr>
+        <p:txBody>
+          <a:bodyPr wrap="square" lIns="0" tIns="0" rIns="0" bIns="0">
+            <a:spAutoFit/>
+          </a:bodyPr>
+          <a:lstStyle/>
+          <a:p>
+            <a:pPr>
+              <a:lnSpc>
+                <a:spcPct val="108000"/>
+              </a:lnSpc>
+              <a:spcBef>
+                <a:spcPts val="0"/>
+              </a:spcBef>
+              <a:spcAft>
+                <a:spcPts val="0"/>
+              </a:spcAft>
+            </a:pPr>
+            <a:r>
+              <a:rPr lang="en-US" sz="1900" b="1">
+                <a:solidFill>
+                  <a:srgbClr val="FFFFFF"/>
+                </a:solidFill>
+                <a:latin typeface="Aptos"/>
+              </a:rPr>
+              <a:t>Scope Constraints &amp; Exclusions</a:t>
+            </a:r>
+          </a:p>
+        </p:txBody>
+      </p:sp>
+      <p:sp>
+        <p:nvSpPr>
+          <p:cNvPr id="29" name="TextBox 11"/>
+          <p:cNvSpPr txBox="1"/>
+          <p:nvPr/>
+        </p:nvSpPr>
+        <p:spPr>
+          <a:xfrm>
+            <a:off x="757968" y="1704898"/>
+            <a:ext cx="10586400" cy="272319"/>
+          </a:xfrm>
+          <a:prstGeom prst="rect">
+            <a:avLst/>
+          </a:prstGeom>
+          <a:noFill/>
+        </p:spPr>
+        <p:txBody>
+          <a:bodyPr wrap="square" lIns="0" tIns="0" rIns="0" bIns="0" anchor="t">
+            <a:spAutoFit/>
+          </a:bodyPr>
+          <a:lstStyle/>
           <a:p>
             <a:pPr marL="0" indent="0" algn="l">
               <a:lnSpc>
@@ -7247,66 +6079,21 @@
                 </a:solidFill>
                 <a:latin typeface="Aptos"/>
               </a:rPr>
-              <a:t>Location Attributes</a:t>
-            </a:r>
-          </a:p>
-        </p:txBody>
-      </p:sp>
-      <p:sp>
-        <p:nvSpPr>
-          <p:cNvPr id="28" name="TextBox 27"/>
+              <a:t>Prospect contact types are entirely out of scope.</a:t>
+            </a:r>
+          </a:p>
+        </p:txBody>
+      </p:sp>
+      <p:sp>
+        <p:nvSpPr>
+          <p:cNvPr id="30" name="TextBox 11"/>
           <p:cNvSpPr txBox="1"/>
           <p:nvPr/>
         </p:nvSpPr>
         <p:spPr>
           <a:xfrm>
-            <a:off x="738720" y="1321739"/>
-            <a:ext cx="9624000" cy="336374"/>
-          </a:xfrm>
-          <a:prstGeom prst="rect">
-            <a:avLst/>
-          </a:prstGeom>
-          <a:noFill/>
-        </p:spPr>
-        <p:txBody>
-          <a:bodyPr wrap="square" lIns="0" tIns="0" rIns="0" bIns="0">
-            <a:spAutoFit/>
-          </a:bodyPr>
-          <a:lstStyle/>
-          <a:p>
-            <a:pPr>
-              <a:lnSpc>
-                <a:spcPct val="108000"/>
-              </a:lnSpc>
-              <a:spcBef>
-                <a:spcPts val="0"/>
-              </a:spcBef>
-              <a:spcAft>
-                <a:spcPts val="0"/>
-              </a:spcAft>
-            </a:pPr>
-            <a:r>
-              <a:rPr lang="en-US" sz="2100" b="1">
-                <a:solidFill>
-                  <a:srgbClr val="FFFFFF"/>
-                </a:solidFill>
-                <a:latin typeface="Aptos"/>
-              </a:rPr>
-              <a:t>Scope Constraints &amp; Exclusions</a:t>
-            </a:r>
-          </a:p>
-        </p:txBody>
-      </p:sp>
-      <p:sp>
-        <p:nvSpPr>
-          <p:cNvPr id="29" name="TextBox 11"/>
-          <p:cNvSpPr txBox="1"/>
-          <p:nvPr/>
-        </p:nvSpPr>
-        <p:spPr>
-          <a:xfrm>
-            <a:off x="757968" y="1783575"/>
-            <a:ext cx="10586400" cy="310896"/>
+            <a:off x="757968" y="2000250"/>
+            <a:ext cx="10586400" cy="272319"/>
           </a:xfrm>
           <a:prstGeom prst="rect">
             <a:avLst/>
@@ -7332,27 +6119,27 @@
               <a:buNone/>
             </a:pPr>
             <a:r>
-              <a:rPr lang="en-US" sz="2000" b="0">
+              <a:rPr lang="en-US" sz="1700" b="0">
                 <a:solidFill>
                   <a:srgbClr val="000000"/>
                 </a:solidFill>
                 <a:latin typeface="Aptos"/>
               </a:rPr>
-              <a:t>Prospect contact types are entirely out of scope.</a:t>
-            </a:r>
-          </a:p>
-        </p:txBody>
-      </p:sp>
-      <p:sp>
-        <p:nvSpPr>
-          <p:cNvPr id="30" name="TextBox 11"/>
+              <a:t>Every evaluation pair must include at least one licensed user.</a:t>
+            </a:r>
+          </a:p>
+        </p:txBody>
+      </p:sp>
+      <p:sp>
+        <p:nvSpPr>
+          <p:cNvPr id="31" name="TextBox 11"/>
           <p:cNvSpPr txBox="1"/>
           <p:nvPr/>
         </p:nvSpPr>
         <p:spPr>
           <a:xfrm>
-            <a:off x="757968" y="2176991"/>
-            <a:ext cx="10586400" cy="310896"/>
+            <a:off x="749808" y="5877657"/>
+            <a:ext cx="1975104" cy="289160"/>
           </a:xfrm>
           <a:prstGeom prst="rect">
             <a:avLst/>
@@ -7360,7 +6147,7 @@
           <a:noFill/>
         </p:spPr>
         <p:txBody>
-          <a:bodyPr wrap="square" lIns="0" tIns="0" rIns="0" bIns="0" anchor="t">
+          <a:bodyPr wrap="square" lIns="0" tIns="0" rIns="0" bIns="0" anchor="ctr">
             <a:spAutoFit/>
           </a:bodyPr>
           <a:lstStyle/>
@@ -7378,27 +6165,27 @@
               <a:buNone/>
             </a:pPr>
             <a:r>
-              <a:rPr lang="en-US" sz="2000" b="0">
-                <a:solidFill>
-                  <a:srgbClr val="000000"/>
+              <a:rPr lang="en-US" sz="1805" b="1">
+                <a:solidFill>
+                  <a:srgbClr val="FFFFFF"/>
                 </a:solidFill>
                 <a:latin typeface="Aptos"/>
               </a:rPr>
-              <a:t>Every evaluation pair must include at least one licensed user.</a:t>
-            </a:r>
-          </a:p>
-        </p:txBody>
-      </p:sp>
-      <p:sp>
-        <p:nvSpPr>
-          <p:cNvPr id="31" name="TextBox 11"/>
+              <a:t>Profile metrics</a:t>
+            </a:r>
+          </a:p>
+        </p:txBody>
+      </p:sp>
+      <p:sp>
+        <p:nvSpPr>
+          <p:cNvPr id="34" name="Sample scope sentence 34"/>
           <p:cNvSpPr txBox="1"/>
           <p:nvPr/>
         </p:nvSpPr>
         <p:spPr>
           <a:xfrm>
-            <a:off x="749808" y="5681682"/>
-            <a:ext cx="1975104" cy="304379"/>
+            <a:off x="757968" y="2295601"/>
+            <a:ext cx="10586400" cy="272319"/>
           </a:xfrm>
           <a:prstGeom prst="rect">
             <a:avLst/>
@@ -7406,7 +6193,7 @@
           <a:noFill/>
         </p:spPr>
         <p:txBody>
-          <a:bodyPr wrap="square" lIns="0" tIns="0" rIns="0" bIns="0" anchor="ctr">
+          <a:bodyPr wrap="square" lIns="0" tIns="0" rIns="0" bIns="0" anchor="t">
             <a:spAutoFit/>
           </a:bodyPr>
           <a:lstStyle/>
@@ -7424,13 +6211,59 @@
               <a:buNone/>
             </a:pPr>
             <a:r>
-              <a:rPr lang="en-US" sz="1900" b="1">
-                <a:solidFill>
-                  <a:srgbClr val="FFFFFF"/>
+              <a:rPr lang="en-US" sz="1700" b="0">
+                <a:solidFill>
+                  <a:srgbClr val="000000"/>
                 </a:solidFill>
                 <a:latin typeface="Aptos"/>
               </a:rPr>
-              <a:t>Profile metrics</a:t>
+              <a:t>Sample: Exclude records without a usable contact identifier.</a:t>
+            </a:r>
+          </a:p>
+        </p:txBody>
+      </p:sp>
+      <p:sp>
+        <p:nvSpPr>
+          <p:cNvPr id="35" name="Sample scope sentence 35"/>
+          <p:cNvSpPr txBox="1"/>
+          <p:nvPr/>
+        </p:nvSpPr>
+        <p:spPr>
+          <a:xfrm>
+            <a:off x="757968" y="2590952"/>
+            <a:ext cx="10586400" cy="272319"/>
+          </a:xfrm>
+          <a:prstGeom prst="rect">
+            <a:avLst/>
+          </a:prstGeom>
+          <a:noFill/>
+        </p:spPr>
+        <p:txBody>
+          <a:bodyPr wrap="square" lIns="0" tIns="0" rIns="0" bIns="0" anchor="t">
+            <a:spAutoFit/>
+          </a:bodyPr>
+          <a:lstStyle/>
+          <a:p>
+            <a:pPr marL="0" indent="0" algn="l">
+              <a:lnSpc>
+                <a:spcPct val="108000"/>
+              </a:lnSpc>
+              <a:spcBef>
+                <a:spcPts val="0"/>
+              </a:spcBef>
+              <a:spcAft>
+                <a:spcPts val="0"/>
+              </a:spcAft>
+              <a:buNone/>
+            </a:pPr>
+            <a:r>
+              <a:rPr lang="en-US" sz="1700" b="0">
+                <a:solidFill>
+                  <a:srgbClr val="000000"/>
+                </a:solidFill>
+                <a:latin typeface="Aptos"/>
+              </a:rPr>
+              <a:t>Sample: Review candidate matches before updating source records.</a:t>
             </a:r>
           </a:p>
         </p:txBody>
@@ -7473,8 +6306,8 @@
         </p:nvCxnSpPr>
         <p:spPr>
           <a:xfrm>
-            <a:off x="9208008" y="5490972"/>
-            <a:ext cx="283464" cy="0"/>
+            <a:off x="9152595" y="5490972"/>
+            <a:ext cx="401971" cy="0"/>
           </a:xfrm>
           <a:prstGeom prst="line">
             <a:avLst/>
@@ -7509,8 +6342,8 @@
         </p:nvCxnSpPr>
         <p:spPr>
           <a:xfrm>
-            <a:off x="7095744" y="5490972"/>
-            <a:ext cx="265176" cy="0"/>
+            <a:off x="7040331" y="5490972"/>
+            <a:ext cx="376002" cy="0"/>
           </a:xfrm>
           <a:prstGeom prst="line">
             <a:avLst/>
@@ -7546,7 +6379,7 @@
         <p:spPr>
           <a:xfrm>
             <a:off x="5010912" y="5490972"/>
-            <a:ext cx="237744" cy="0"/>
+            <a:ext cx="293157" cy="0"/>
           </a:xfrm>
           <a:prstGeom prst="line">
             <a:avLst/>
@@ -7582,7 +6415,7 @@
         <p:spPr>
           <a:xfrm>
             <a:off x="5010912" y="3589020"/>
-            <a:ext cx="4480560" cy="0"/>
+            <a:ext cx="4543654" cy="0"/>
           </a:xfrm>
           <a:prstGeom prst="line">
             <a:avLst/>
@@ -7652,8 +6485,8 @@
         </p:nvCxnSpPr>
         <p:spPr>
           <a:xfrm>
-            <a:off x="4791456" y="4485132"/>
-            <a:ext cx="219456" cy="0"/>
+            <a:off x="4733300" y="4485132"/>
+            <a:ext cx="277612" cy="0"/>
           </a:xfrm>
           <a:prstGeom prst="line">
             <a:avLst/>
@@ -7687,8 +6520,8 @@
         </p:nvCxnSpPr>
         <p:spPr>
           <a:xfrm>
-            <a:off x="2532888" y="4485132"/>
-            <a:ext cx="320040" cy="0"/>
+            <a:off x="2474732" y="4485132"/>
+            <a:ext cx="436352" cy="0"/>
           </a:xfrm>
           <a:prstGeom prst="line">
             <a:avLst/>
@@ -7854,8 +6687,8 @@
         </p:nvSpPr>
         <p:spPr>
           <a:xfrm>
-            <a:off x="594360" y="3822191"/>
-            <a:ext cx="1938528" cy="1325880"/>
+            <a:off x="652516" y="3861967"/>
+            <a:ext cx="1822216" cy="1246327"/>
           </a:xfrm>
           <a:prstGeom prst="roundRect">
             <a:avLst>
@@ -7900,7 +6733,7 @@
               </a:spcAft>
             </a:pPr>
             <a:r>
-              <a:rPr lang="en-US" sz="1800" b="1" dirty="0">
+              <a:rPr lang="en-US" sz="1600" b="1">
                 <a:solidFill>
                   <a:srgbClr val="FFFFFF"/>
                 </a:solidFill>
@@ -7919,7 +6752,7 @@
               </a:spcAft>
             </a:pPr>
             <a:r>
-              <a:rPr lang="en-US" sz="1800" b="1" dirty="0">
+              <a:rPr lang="en-US" sz="1600" b="1">
                 <a:solidFill>
                   <a:srgbClr val="FFFFFF"/>
                 </a:solidFill>
@@ -7944,8 +6777,8 @@
         </p:nvSpPr>
         <p:spPr>
           <a:xfrm>
-            <a:off x="2852928" y="3822191"/>
-            <a:ext cx="1938528" cy="1325880"/>
+            <a:off x="2911084" y="3861967"/>
+            <a:ext cx="1822216" cy="1246327"/>
           </a:xfrm>
           <a:prstGeom prst="roundRect">
             <a:avLst>
@@ -7990,7 +6823,7 @@
               </a:spcAft>
             </a:pPr>
             <a:r>
-              <a:rPr lang="en-US" sz="1800" b="1">
+              <a:rPr lang="en-US" sz="1600" b="1">
                 <a:solidFill>
                   <a:srgbClr val="FFFFFF"/>
                 </a:solidFill>
@@ -8009,7 +6842,7 @@
               </a:spcAft>
             </a:pPr>
             <a:r>
-              <a:rPr lang="en-US" sz="1800" b="1">
+              <a:rPr lang="en-US" sz="1600" b="1">
                 <a:solidFill>
                   <a:srgbClr val="FFFFFF"/>
                 </a:solidFill>
@@ -8034,8 +6867,8 @@
         </p:nvSpPr>
         <p:spPr>
           <a:xfrm>
-            <a:off x="9491472" y="4828032"/>
-            <a:ext cx="2103120" cy="1325880"/>
+            <a:off x="9554566" y="4867808"/>
+            <a:ext cx="1976932" cy="1246327"/>
           </a:xfrm>
           <a:prstGeom prst="roundRect">
             <a:avLst>
@@ -8080,13 +6913,13 @@
               </a:spcAft>
             </a:pPr>
             <a:r>
-              <a:rPr lang="en-US" sz="1800" b="1">
+              <a:rPr lang="en-US" sz="1600" b="1">
                 <a:solidFill>
                   <a:srgbClr val="FFFFFF"/>
                 </a:solidFill>
                 <a:latin typeface="Aptos"/>
               </a:rPr>
-              <a:t>Validated Journey Linkage Candidates</a:t>
+              <a:t>Corroborated Journey Linkage Candidates</a:t>
             </a:r>
           </a:p>
         </p:txBody>
@@ -8105,8 +6938,8 @@
         </p:nvSpPr>
         <p:spPr>
           <a:xfrm>
-            <a:off x="7360920" y="4828032"/>
-            <a:ext cx="1847088" cy="1325880"/>
+            <a:off x="7416333" y="4867808"/>
+            <a:ext cx="1736262" cy="1246327"/>
           </a:xfrm>
           <a:prstGeom prst="roundRect">
             <a:avLst>
@@ -8151,13 +6984,13 @@
               </a:spcAft>
             </a:pPr>
             <a:r>
-              <a:rPr lang="en-US" sz="1800" b="0">
+              <a:rPr lang="en-US" sz="1600" b="0">
                 <a:solidFill>
                   <a:srgbClr val="002869"/>
                 </a:solidFill>
                 <a:latin typeface="Aptos"/>
               </a:rPr>
-              <a:t>LinkedIn History Validation Engine</a:t>
+              <a:t>LinkedIn History Corroboration</a:t>
             </a:r>
           </a:p>
         </p:txBody>
@@ -8176,8 +7009,8 @@
         </p:nvSpPr>
         <p:spPr>
           <a:xfrm>
-            <a:off x="5248656" y="4828032"/>
-            <a:ext cx="1847088" cy="1325880"/>
+            <a:off x="5304069" y="4867808"/>
+            <a:ext cx="1736262" cy="1246327"/>
           </a:xfrm>
           <a:prstGeom prst="roundRect">
             <a:avLst>
@@ -8222,7 +7055,7 @@
               </a:spcAft>
             </a:pPr>
             <a:r>
-              <a:rPr lang="en-US" sz="1800" b="0">
+              <a:rPr lang="en-US" sz="1600" b="0">
                 <a:solidFill>
                   <a:srgbClr val="002869"/>
                 </a:solidFill>
@@ -8247,8 +7080,8 @@
         </p:nvSpPr>
         <p:spPr>
           <a:xfrm>
-            <a:off x="9491472" y="2926080"/>
-            <a:ext cx="2103120" cy="1325880"/>
+            <a:off x="9554566" y="2965856"/>
+            <a:ext cx="1976932" cy="1246327"/>
           </a:xfrm>
           <a:prstGeom prst="roundRect">
             <a:avLst>
@@ -8293,7 +7126,7 @@
               </a:spcAft>
             </a:pPr>
             <a:r>
-              <a:rPr lang="en-US" sz="1800" b="1">
+              <a:rPr lang="en-US" sz="1600" b="1">
                 <a:solidFill>
                   <a:srgbClr val="FFFFFF"/>
                 </a:solidFill>
@@ -8313,7 +7146,7 @@
         <p:spPr>
           <a:xfrm>
             <a:off x="594360" y="3337560"/>
-            <a:ext cx="4160520" cy="347472"/>
+            <a:ext cx="4160520" cy="276999"/>
           </a:xfrm>
           <a:prstGeom prst="rect">
             <a:avLst/>
@@ -8327,7 +7160,7 @@
           <a:lstStyle/>
           <a:p>
             <a:r>
-              <a:rPr sz="1900" b="1">
+              <a:rPr lang="en-US" sz="1800" b="1">
                 <a:solidFill>
                   <a:srgbClr val="0057AF"/>
                 </a:solidFill>
@@ -8347,7 +7180,7 @@
         <p:spPr>
           <a:xfrm>
             <a:off x="5248656" y="3054096"/>
-            <a:ext cx="1828800" cy="347472"/>
+            <a:ext cx="1828800" cy="276999"/>
           </a:xfrm>
           <a:prstGeom prst="rect">
             <a:avLst/>
@@ -8361,7 +7194,7 @@
           <a:lstStyle/>
           <a:p>
             <a:r>
-              <a:rPr sz="1900" b="1">
+              <a:rPr lang="en-US" sz="1800" b="1">
                 <a:solidFill>
                   <a:srgbClr val="0057AF"/>
                 </a:solidFill>
@@ -8381,7 +7214,7 @@
         <p:spPr>
           <a:xfrm>
             <a:off x="5248656" y="4361688"/>
-            <a:ext cx="1828800" cy="347472"/>
+            <a:ext cx="1828800" cy="276999"/>
           </a:xfrm>
           <a:prstGeom prst="rect">
             <a:avLst/>
@@ -8395,7 +7228,7 @@
           <a:lstStyle/>
           <a:p>
             <a:r>
-              <a:rPr sz="1900" b="1">
+              <a:rPr lang="en-US" sz="1800" b="1">
                 <a:solidFill>
                   <a:srgbClr val="0057AF"/>
                 </a:solidFill>
@@ -8493,6 +7326,7 @@
           <a:lstStyle/>
           <a:p>
             <a:r>
+              <a:rPr lang="en-US"/>
               <a:t>Contact Matching and Engagement Workflow</a:t>
             </a:r>
           </a:p>
@@ -8675,9 +7509,9 @@
               </a:defRPr>
             </a:pPr>
             <a:r>
+              <a:rPr lang="en-US"/>
               <a:t>Trained</a:t>
             </a:r>
-            <a:endParaRPr lang="en-US"/>
           </a:p>
           <a:p>
             <a:pPr>
@@ -8692,9 +7526,9 @@
               </a:defRPr>
             </a:pPr>
             <a:r>
+              <a:rPr lang="en-US"/>
               <a:t>model</a:t>
             </a:r>
-            <a:endParaRPr lang="en-US"/>
           </a:p>
         </p:txBody>
       </p:sp>
@@ -8920,7 +7754,9 @@
       <p:sp>
         <p:nvSpPr>
           <p:cNvPr id="14" name="TextBox 13"/>
-          <p:cNvSpPr txBox="1"/>
+          <p:cNvSpPr txBox="1">
+            <a:spLocks/>
+          </p:cNvSpPr>
           <p:nvPr/>
         </p:nvSpPr>
         <p:spPr>
@@ -8951,9 +7787,9 @@
               </a:defRPr>
             </a:pPr>
             <a:r>
+              <a:rPr lang="en-US"/>
               <a:t>Cleaned data from Step 1</a:t>
             </a:r>
-            <a:endParaRPr lang="en-US"/>
           </a:p>
         </p:txBody>
       </p:sp>
@@ -8991,9 +7827,9 @@
               </a:defRPr>
             </a:pPr>
             <a:r>
+              <a:rPr lang="en-US"/>
               <a:t>LinkedIn history</a:t>
             </a:r>
-            <a:endParaRPr lang="en-US"/>
           </a:p>
         </p:txBody>
       </p:sp>
@@ -9031,10 +7867,9 @@
               </a:defRPr>
             </a:pPr>
             <a:r>
-              <a:rPr dirty="0"/>
+              <a:rPr lang="en-US"/>
               <a:t>Account attributes</a:t>
             </a:r>
-            <a:endParaRPr lang="en-US"/>
           </a:p>
         </p:txBody>
       </p:sp>
@@ -9047,7 +7882,7 @@
         <p:spPr>
           <a:xfrm>
             <a:off x="8643518" y="3450579"/>
-            <a:ext cx="1287475" cy="162480"/>
+            <a:ext cx="2194560" cy="162480"/>
           </a:xfrm>
           <a:prstGeom prst="rect">
             <a:avLst/>
@@ -9061,8 +7896,11 @@
           <a:lstStyle/>
           <a:p>
             <a:pPr>
+              <a:lnSpc>
+                <a:spcPct val="100000"/>
+              </a:lnSpc>
               <a:spcAft>
-                <a:spcPts val="264"/>
+                <a:spcPts val="300"/>
               </a:spcAft>
               <a:defRPr sz="1056" b="0">
                 <a:solidFill>
@@ -9072,9 +7910,9 @@
               </a:defRPr>
             </a:pPr>
             <a:r>
-              <a:t>Input records</a:t>
-            </a:r>
-            <a:endParaRPr lang="en-US"/>
+              <a:rPr lang="en-US"/>
+              <a:t>Two scoring runs</a:t>
+            </a:r>
           </a:p>
         </p:txBody>
       </p:sp>
@@ -9433,9 +8271,9 @@
               </a:defRPr>
             </a:pPr>
             <a:r>
+              <a:rPr lang="en-US"/>
               <a:t>INPUT DATASETS</a:t>
             </a:r>
-            <a:endParaRPr lang="en-US"/>
           </a:p>
         </p:txBody>
       </p:sp>
@@ -9519,17 +8357,18 @@
               </a:defRPr>
             </a:pPr>
             <a:r>
-              <a:rPr dirty="0"/>
+              <a:rPr lang="en-US"/>
               <a:t>Person &amp; Account</a:t>
             </a:r>
-            <a:endParaRPr lang="en-US"/>
           </a:p>
         </p:txBody>
       </p:sp>
       <p:sp>
         <p:nvSpPr>
           <p:cNvPr id="30" name="Data 29"/>
-          <p:cNvSpPr/>
+          <p:cNvSpPr>
+            <a:spLocks/>
+          </p:cNvSpPr>
           <p:nvPr/>
         </p:nvSpPr>
         <p:spPr>
@@ -9568,7 +8407,7 @@
           <a:lstStyle/>
           <a:p>
             <a:pPr algn="ctr"/>
-            <a:endParaRPr/>
+            <a:endParaRPr lang="en-US"/>
           </a:p>
         </p:txBody>
       </p:sp>
@@ -9606,10 +8445,9 @@
               </a:defRPr>
             </a:pPr>
             <a:r>
-              <a:rPr dirty="0"/>
+              <a:rPr lang="en-US"/>
               <a:t>LinkedIn History</a:t>
             </a:r>
-            <a:endParaRPr lang="en-US"/>
           </a:p>
         </p:txBody>
       </p:sp>
@@ -9825,7 +8663,7 @@
         <p:spPr>
           <a:xfrm>
             <a:off x="3304885" y="2144085"/>
-            <a:ext cx="1480596" cy="647870"/>
+            <a:ext cx="1480596" cy="578998"/>
           </a:xfrm>
           <a:prstGeom prst="rect">
             <a:avLst/>
@@ -9834,7 +8672,7 @@
         </p:spPr>
         <p:txBody>
           <a:bodyPr wrap="square" lIns="0" tIns="0" rIns="0" bIns="0">
-            <a:spAutoFit/>
+            <a:noAutofit/>
           </a:bodyPr>
           <a:lstStyle/>
           <a:p>
@@ -9850,14 +8688,14 @@
               </a:defRPr>
             </a:pPr>
             <a:r>
+              <a:rPr lang="en-US"/>
               <a:t>Clean and normalize</a:t>
             </a:r>
-            <a:endParaRPr lang="en-US"/>
           </a:p>
           <a:p>
             <a:pPr>
               <a:spcAft>
-                <a:spcPts val="264"/>
+                <a:spcPts val="0"/>
               </a:spcAft>
               <a:defRPr sz="1320" b="0">
                 <a:solidFill>
@@ -9867,16 +8705,18 @@
               </a:defRPr>
             </a:pPr>
             <a:r>
+              <a:rPr lang="en-US"/>
               <a:t>both input datasets</a:t>
             </a:r>
-            <a:endParaRPr lang="en-US"/>
           </a:p>
         </p:txBody>
       </p:sp>
       <p:sp>
         <p:nvSpPr>
           <p:cNvPr id="38" name="Rectangle 37"/>
-          <p:cNvSpPr/>
+          <p:cNvSpPr>
+            <a:spLocks/>
+          </p:cNvSpPr>
           <p:nvPr/>
         </p:nvSpPr>
         <p:spPr>
@@ -9915,7 +8755,7 @@
           <a:lstStyle/>
           <a:p>
             <a:pPr algn="ctr"/>
-            <a:endParaRPr/>
+            <a:endParaRPr lang="en-US"/>
           </a:p>
         </p:txBody>
       </p:sp>
@@ -10017,7 +8857,7 @@
         <p:spPr>
           <a:xfrm>
             <a:off x="5499444" y="2144085"/>
-            <a:ext cx="1496689" cy="609398"/>
+            <a:ext cx="1496689" cy="578998"/>
           </a:xfrm>
           <a:prstGeom prst="rect">
             <a:avLst/>
@@ -10026,13 +8866,16 @@
         </p:spPr>
         <p:txBody>
           <a:bodyPr wrap="square" lIns="0" tIns="0" rIns="0" bIns="0">
-            <a:spAutoFit/>
+            <a:noAutofit/>
           </a:bodyPr>
           <a:lstStyle/>
           <a:p>
             <a:pPr>
+              <a:lnSpc>
+                <a:spcPct val="100000"/>
+              </a:lnSpc>
               <a:spcAft>
-                <a:spcPts val="264"/>
+                <a:spcPts val="0"/>
               </a:spcAft>
               <a:defRPr sz="1320" b="0">
                 <a:solidFill>
@@ -10043,7 +8886,7 @@
             </a:pPr>
             <a:r>
               <a:rPr lang="en-US"/>
-              <a:t>Select potentially matching records for comparison.</a:t>
+              <a:t>Find candidate pairs in active cleaned records only.</a:t>
             </a:r>
           </a:p>
         </p:txBody>
@@ -10188,8 +9031,8 @@
         </p:nvSpPr>
         <p:spPr>
           <a:xfrm>
-            <a:off x="7710098" y="2103851"/>
-            <a:ext cx="3476182" cy="673518"/>
+            <a:off x="7710098" y="2084831"/>
+            <a:ext cx="3476182" cy="758952"/>
           </a:xfrm>
           <a:prstGeom prst="rect">
             <a:avLst/>
@@ -10198,13 +9041,16 @@
         </p:spPr>
         <p:txBody>
           <a:bodyPr wrap="square" lIns="0" tIns="0" rIns="0" bIns="0">
-            <a:spAutoFit/>
+            <a:noAutofit/>
           </a:bodyPr>
           <a:lstStyle/>
           <a:p>
             <a:pPr>
+              <a:lnSpc>
+                <a:spcPct val="100000"/>
+              </a:lnSpc>
               <a:spcAft>
-                <a:spcPts val="528"/>
+                <a:spcPts val="300"/>
               </a:spcAft>
               <a:defRPr sz="1320" b="0">
                 <a:solidFill>
@@ -10215,21 +9061,17 @@
             </a:pPr>
             <a:r>
               <a:rPr lang="en-US" b="1"/>
-              <a:t>Identity patterns:</a:t>
-            </a:r>
-            <a:r>
-              <a:rPr lang="en-US"/>
-              <a:t> </a:t>
-            </a:r>
-            <a:r>
-              <a:t>name, email, LinkedIn URL and phone.</a:t>
+              <a:t>Train on active cleaned records only.</a:t>
             </a:r>
             <a:endParaRPr lang="en-US"/>
           </a:p>
           <a:p>
             <a:pPr>
+              <a:lnSpc>
+                <a:spcPct val="100000"/>
+              </a:lnSpc>
               <a:spcAft>
-                <a:spcPts val="0"/>
+                <a:spcPts val="300"/>
               </a:spcAft>
               <a:defRPr sz="1320" b="0">
                 <a:solidFill>
@@ -10239,7 +9081,31 @@
               </a:defRPr>
             </a:pPr>
             <a:r>
-              <a:rPr lang="en-US" b="1"/>
+              <a:rPr lang="en-US"/>
+              <a:t>Identity: </a:t>
+            </a:r>
+            <a:r>
+              <a:t>name, email, LinkedIn URL and phone.</a:t>
+            </a:r>
+            <a:endParaRPr lang="en-US"/>
+          </a:p>
+          <a:p>
+            <a:pPr>
+              <a:lnSpc>
+                <a:spcPct val="100000"/>
+              </a:lnSpc>
+              <a:spcAft>
+                <a:spcPts val="0"/>
+              </a:spcAft>
+              <a:defRPr sz="1320" b="0">
+                <a:solidFill>
+                  <a:srgbClr val="000000"/>
+                </a:solidFill>
+                <a:latin typeface="Aptos"/>
+              </a:defRPr>
+            </a:pPr>
+            <a:r>
+              <a:rPr lang="en-US"/>
               <a:t>Fellegi–Sunter + Expectation Maximization.</a:t>
             </a:r>
           </a:p>
@@ -10385,8 +9251,8 @@
         </p:nvSpPr>
         <p:spPr>
           <a:xfrm>
-            <a:off x="8756172" y="4190878"/>
-            <a:ext cx="2430108" cy="915122"/>
+            <a:off x="8756172" y="4142232"/>
+            <a:ext cx="2430108" cy="1367941"/>
           </a:xfrm>
           <a:prstGeom prst="rect">
             <a:avLst/>
@@ -10395,7 +9261,7 @@
         </p:spPr>
         <p:txBody>
           <a:bodyPr wrap="square" lIns="0" tIns="0" rIns="0" bIns="0">
-            <a:spAutoFit/>
+            <a:noAutofit/>
           </a:bodyPr>
           <a:lstStyle/>
           <a:p>
@@ -10404,7 +9270,7 @@
                 <a:spcPct val="100000"/>
               </a:lnSpc>
               <a:spcAft>
-                <a:spcPts val="352"/>
+                <a:spcPts val="0"/>
               </a:spcAft>
               <a:defRPr sz="1320" b="0">
                 <a:solidFill>
@@ -10415,10 +9281,7 @@
             </a:pPr>
             <a:r>
               <a:rPr lang="en-US" b="1"/>
-              <a:t>Reapply</a:t>
-            </a:r>
-            <a:r>
-              <a:t> the same blocking rules.</a:t>
+              <a:t>Same model + blocking in both runs.</a:t>
             </a:r>
             <a:endParaRPr lang="en-US"/>
           </a:p>
@@ -10428,7 +9291,7 @@
                 <a:spcPct val="100000"/>
               </a:lnSpc>
               <a:spcAft>
-                <a:spcPts val="352"/>
+                <a:spcPts val="0"/>
               </a:spcAft>
               <a:defRPr sz="1320" b="0">
                 <a:solidFill>
@@ -10438,11 +9301,11 @@
               </a:defRPr>
             </a:pPr>
             <a:r>
-              <a:rPr lang="en-US" b="1"/>
-              <a:t>Use the trained model</a:t>
-            </a:r>
-            <a:r>
-              <a:t> to score candidate pairs.</a:t>
+              <a:rPr lang="en-US"/>
+              <a:t>Active only: duplicate / need review</a:t>
+            </a:r>
+            <a:r>
+              <a:t>.</a:t>
             </a:r>
             <a:endParaRPr lang="en-US"/>
           </a:p>
@@ -10452,7 +9315,7 @@
                 <a:spcPct val="100000"/>
               </a:lnSpc>
               <a:spcAft>
-                <a:spcPts val="352"/>
+                <a:spcPts val="0"/>
               </a:spcAft>
               <a:defRPr sz="1320" b="0">
                 <a:solidFill>
@@ -10462,7 +9325,31 @@
               </a:defRPr>
             </a:pPr>
             <a:r>
-              <a:rPr lang="en-US" b="1"/>
+              <a:rPr lang="en-US"/>
+              <a:t>Active + inactive: journey links only. No duplicates reported</a:t>
+            </a:r>
+            <a:r>
+              <a:t>.</a:t>
+            </a:r>
+            <a:endParaRPr lang="en-US"/>
+          </a:p>
+          <a:p>
+            <a:pPr>
+              <a:lnSpc>
+                <a:spcPct val="100000"/>
+              </a:lnSpc>
+              <a:spcAft>
+                <a:spcPts val="0"/>
+              </a:spcAft>
+              <a:defRPr sz="1320" b="0">
+                <a:solidFill>
+                  <a:srgbClr val="000000"/>
+                </a:solidFill>
+                <a:latin typeface="Aptos"/>
+              </a:defRPr>
+            </a:pPr>
+            <a:r>
+              <a:rPr lang="en-US"/>
               <a:t>Output:</a:t>
             </a:r>
             <a:r>
@@ -10612,8 +9499,156 @@
         </p:nvSpPr>
         <p:spPr>
           <a:xfrm>
-            <a:off x="5499444" y="4190878"/>
-            <a:ext cx="2470343" cy="1425647"/>
+            <a:off x="5499444" y="4142232"/>
+            <a:ext cx="2470343" cy="1367941"/>
+          </a:xfrm>
+          <a:prstGeom prst="rect">
+            <a:avLst/>
+          </a:prstGeom>
+          <a:noFill/>
+        </p:spPr>
+        <p:txBody>
+          <a:bodyPr wrap="square" lIns="0" tIns="0" rIns="0" bIns="0">
+            <a:noAutofit/>
+          </a:bodyPr>
+          <a:lstStyle/>
+          <a:p>
+            <a:pPr>
+              <a:lnSpc>
+                <a:spcPct val="100000"/>
+              </a:lnSpc>
+              <a:spcAft>
+                <a:spcPts val="300"/>
+              </a:spcAft>
+              <a:defRPr sz="1276" b="0">
+                <a:solidFill>
+                  <a:srgbClr val="000000"/>
+                </a:solidFill>
+                <a:latin typeface="Aptos"/>
+              </a:defRPr>
+            </a:pPr>
+            <a:r>
+              <a:rPr lang="en-US" b="1" dirty="0"/>
+              <a:t>Both runs: same thresholds + account rules.</a:t>
+            </a:r>
+            <a:endParaRPr lang="en-US" dirty="0"/>
+          </a:p>
+          <a:p>
+            <a:pPr>
+              <a:lnSpc>
+                <a:spcPct val="100000"/>
+              </a:lnSpc>
+              <a:spcAft>
+                <a:spcPts val="300"/>
+              </a:spcAft>
+              <a:defRPr sz="1276" b="0">
+                <a:solidFill>
+                  <a:srgbClr val="000000"/>
+                </a:solidFill>
+                <a:latin typeface="Aptos"/>
+              </a:defRPr>
+            </a:pPr>
+            <a:r>
+              <a:rPr lang="en-US" dirty="0"/>
+              <a:t>Set thresholds</a:t>
+            </a:r>
+            <a:r>
+              <a:rPr dirty="0"/>
+              <a:t> </a:t>
+            </a:r>
+            <a:r>
+              <a:rPr lang="en-US" dirty="0"/>
+              <a:t>via </a:t>
+            </a:r>
+            <a:r>
+              <a:rPr dirty="0"/>
+              <a:t>probability spot checks.</a:t>
+            </a:r>
+            <a:endParaRPr lang="en-US" dirty="0"/>
+          </a:p>
+          <a:p>
+            <a:pPr>
+              <a:lnSpc>
+                <a:spcPct val="100000"/>
+              </a:lnSpc>
+              <a:spcAft>
+                <a:spcPts val="0"/>
+              </a:spcAft>
+              <a:defRPr sz="1276" b="0">
+                <a:solidFill>
+                  <a:srgbClr val="000000"/>
+                </a:solidFill>
+                <a:latin typeface="Aptos"/>
+              </a:defRPr>
+            </a:pPr>
+            <a:r>
+              <a:rPr lang="en-US" dirty="0"/>
+              <a:t>Rules:</a:t>
+            </a:r>
+            <a:r>
+              <a:rPr dirty="0"/>
+              <a:t> master ID, account ID, exact attribute matches and fuzzy account names.</a:t>
+            </a:r>
+            <a:endParaRPr lang="en-US"/>
+          </a:p>
+        </p:txBody>
+      </p:sp>
+      <p:sp>
+        <p:nvSpPr>
+          <p:cNvPr id="54" name="Rectangle 53"/>
+          <p:cNvSpPr/>
+          <p:nvPr/>
+        </p:nvSpPr>
+        <p:spPr>
+          <a:xfrm>
+            <a:off x="3530193" y="3772448"/>
+            <a:ext cx="1303568" cy="402336"/>
+          </a:xfrm>
+          <a:prstGeom prst="rect">
+            <a:avLst/>
+          </a:prstGeom>
+          <a:solidFill>
+            <a:srgbClr val="FFFFFF"/>
+          </a:solidFill>
+          <a:ln w="8941">
+            <a:solidFill>
+              <a:srgbClr val="0057AF"/>
+            </a:solidFill>
+          </a:ln>
+        </p:spPr>
+        <p:style>
+          <a:lnRef idx="1">
+            <a:schemeClr val="accent1"/>
+          </a:lnRef>
+          <a:fillRef idx="3">
+            <a:schemeClr val="accent1"/>
+          </a:fillRef>
+          <a:effectRef idx="2">
+            <a:schemeClr val="accent1"/>
+          </a:effectRef>
+          <a:fontRef idx="minor">
+            <a:schemeClr val="lt1"/>
+          </a:fontRef>
+        </p:style>
+        <p:txBody>
+          <a:bodyPr rtlCol="0" anchor="ctr"/>
+          <a:lstStyle/>
+          <a:p>
+            <a:pPr algn="ctr"/>
+            <a:endParaRPr/>
+          </a:p>
+        </p:txBody>
+      </p:sp>
+      <p:sp>
+        <p:nvSpPr>
+          <p:cNvPr id="55" name="TextBox 54"/>
+          <p:cNvSpPr txBox="1"/>
+          <p:nvPr/>
+        </p:nvSpPr>
+        <p:spPr>
+          <a:xfrm>
+            <a:off x="3602614" y="3869009"/>
+            <a:ext cx="1166774" cy="189604"/>
           </a:xfrm>
           <a:prstGeom prst="rect">
             <a:avLst/>
@@ -10623,6 +9658,436 @@
         <p:txBody>
           <a:bodyPr wrap="square" lIns="0" tIns="0" rIns="0" bIns="0">
             <a:spAutoFit/>
+          </a:bodyPr>
+          <a:lstStyle/>
+          <a:p>
+            <a:pPr>
+              <a:spcAft>
+                <a:spcPts val="264"/>
+              </a:spcAft>
+              <a:defRPr sz="1232" b="1">
+                <a:solidFill>
+                  <a:srgbClr val="000000"/>
+                </a:solidFill>
+                <a:latin typeface="Aptos"/>
+              </a:defRPr>
+            </a:pPr>
+            <a:r>
+              <a:t>Duplicate</a:t>
+            </a:r>
+            <a:endParaRPr lang="en-US"/>
+          </a:p>
+        </p:txBody>
+      </p:sp>
+      <p:sp>
+        <p:nvSpPr>
+          <p:cNvPr id="56" name="Rectangle 55"/>
+          <p:cNvSpPr/>
+          <p:nvPr/>
+        </p:nvSpPr>
+        <p:spPr>
+          <a:xfrm>
+            <a:off x="3530193" y="4231111"/>
+            <a:ext cx="1303568" cy="402336"/>
+          </a:xfrm>
+          <a:prstGeom prst="rect">
+            <a:avLst/>
+          </a:prstGeom>
+          <a:solidFill>
+            <a:srgbClr val="FFFFFF"/>
+          </a:solidFill>
+          <a:ln w="8941">
+            <a:solidFill>
+              <a:srgbClr val="0057AF"/>
+            </a:solidFill>
+          </a:ln>
+        </p:spPr>
+        <p:style>
+          <a:lnRef idx="1">
+            <a:schemeClr val="accent1"/>
+          </a:lnRef>
+          <a:fillRef idx="3">
+            <a:schemeClr val="accent1"/>
+          </a:fillRef>
+          <a:effectRef idx="2">
+            <a:schemeClr val="accent1"/>
+          </a:effectRef>
+          <a:fontRef idx="minor">
+            <a:schemeClr val="lt1"/>
+          </a:fontRef>
+        </p:style>
+        <p:txBody>
+          <a:bodyPr rtlCol="0" anchor="ctr"/>
+          <a:lstStyle/>
+          <a:p>
+            <a:pPr algn="ctr"/>
+            <a:endParaRPr/>
+          </a:p>
+        </p:txBody>
+      </p:sp>
+      <p:sp>
+        <p:nvSpPr>
+          <p:cNvPr id="57" name="TextBox 56"/>
+          <p:cNvSpPr txBox="1"/>
+          <p:nvPr/>
+        </p:nvSpPr>
+        <p:spPr>
+          <a:xfrm>
+            <a:off x="3602614" y="4327672"/>
+            <a:ext cx="1166774" cy="189604"/>
+          </a:xfrm>
+          <a:prstGeom prst="rect">
+            <a:avLst/>
+          </a:prstGeom>
+          <a:noFill/>
+        </p:spPr>
+        <p:txBody>
+          <a:bodyPr wrap="square" lIns="0" tIns="0" rIns="0" bIns="0">
+            <a:spAutoFit/>
+          </a:bodyPr>
+          <a:lstStyle/>
+          <a:p>
+            <a:pPr>
+              <a:spcAft>
+                <a:spcPts val="264"/>
+              </a:spcAft>
+              <a:defRPr sz="1232" b="1">
+                <a:solidFill>
+                  <a:srgbClr val="000000"/>
+                </a:solidFill>
+                <a:latin typeface="Aptos"/>
+              </a:defRPr>
+            </a:pPr>
+            <a:r>
+              <a:t>Need review</a:t>
+            </a:r>
+            <a:endParaRPr lang="en-US"/>
+          </a:p>
+        </p:txBody>
+      </p:sp>
+      <p:sp>
+        <p:nvSpPr>
+          <p:cNvPr id="58" name="Rectangle 57"/>
+          <p:cNvSpPr/>
+          <p:nvPr/>
+        </p:nvSpPr>
+        <p:spPr>
+          <a:xfrm>
+            <a:off x="3530193" y="4689774"/>
+            <a:ext cx="1303568" cy="402336"/>
+          </a:xfrm>
+          <a:prstGeom prst="rect">
+            <a:avLst/>
+          </a:prstGeom>
+          <a:solidFill>
+            <a:srgbClr val="0057AF"/>
+          </a:solidFill>
+          <a:ln w="8941">
+            <a:solidFill>
+              <a:srgbClr val="0057AF"/>
+            </a:solidFill>
+          </a:ln>
+        </p:spPr>
+        <p:style>
+          <a:lnRef idx="1">
+            <a:schemeClr val="accent1"/>
+          </a:lnRef>
+          <a:fillRef idx="3">
+            <a:schemeClr val="accent1"/>
+          </a:fillRef>
+          <a:effectRef idx="2">
+            <a:schemeClr val="accent1"/>
+          </a:effectRef>
+          <a:fontRef idx="minor">
+            <a:schemeClr val="lt1"/>
+          </a:fontRef>
+        </p:style>
+        <p:txBody>
+          <a:bodyPr rtlCol="0" anchor="ctr"/>
+          <a:lstStyle/>
+          <a:p>
+            <a:pPr algn="ctr"/>
+            <a:endParaRPr/>
+          </a:p>
+        </p:txBody>
+      </p:sp>
+      <p:sp>
+        <p:nvSpPr>
+          <p:cNvPr id="59" name="TextBox 58"/>
+          <p:cNvSpPr txBox="1"/>
+          <p:nvPr/>
+        </p:nvSpPr>
+        <p:spPr>
+          <a:xfrm>
+            <a:off x="3602614" y="4786335"/>
+            <a:ext cx="1166774" cy="217261"/>
+          </a:xfrm>
+          <a:prstGeom prst="rect">
+            <a:avLst/>
+          </a:prstGeom>
+          <a:noFill/>
+        </p:spPr>
+        <p:txBody>
+          <a:bodyPr wrap="square" lIns="0" tIns="0" rIns="0" bIns="0">
+            <a:spAutoFit/>
+          </a:bodyPr>
+          <a:lstStyle/>
+          <a:p>
+            <a:pPr>
+              <a:spcAft>
+                <a:spcPts val="264"/>
+              </a:spcAft>
+              <a:defRPr sz="1232" b="1">
+                <a:solidFill>
+                  <a:srgbClr val="FFFFFF"/>
+                </a:solidFill>
+                <a:latin typeface="Aptos"/>
+              </a:defRPr>
+            </a:pPr>
+            <a:r>
+              <a:t>Journey link</a:t>
+            </a:r>
+            <a:endParaRPr lang="en-US"/>
+          </a:p>
+        </p:txBody>
+      </p:sp>
+      <p:sp>
+        <p:nvSpPr>
+          <p:cNvPr id="60" name="Rectangle 59"/>
+          <p:cNvSpPr/>
+          <p:nvPr/>
+        </p:nvSpPr>
+        <p:spPr>
+          <a:xfrm>
+            <a:off x="3530193" y="5148437"/>
+            <a:ext cx="1303568" cy="402336"/>
+          </a:xfrm>
+          <a:prstGeom prst="rect">
+            <a:avLst/>
+          </a:prstGeom>
+          <a:solidFill>
+            <a:srgbClr val="FFFFFF"/>
+          </a:solidFill>
+          <a:ln w="8941">
+            <a:solidFill>
+              <a:srgbClr val="0057AF"/>
+            </a:solidFill>
+          </a:ln>
+        </p:spPr>
+        <p:style>
+          <a:lnRef idx="1">
+            <a:schemeClr val="accent1"/>
+          </a:lnRef>
+          <a:fillRef idx="3">
+            <a:schemeClr val="accent1"/>
+          </a:fillRef>
+          <a:effectRef idx="2">
+            <a:schemeClr val="accent1"/>
+          </a:effectRef>
+          <a:fontRef idx="minor">
+            <a:schemeClr val="lt1"/>
+          </a:fontRef>
+        </p:style>
+        <p:txBody>
+          <a:bodyPr rtlCol="0" anchor="ctr"/>
+          <a:lstStyle/>
+          <a:p>
+            <a:pPr algn="ctr"/>
+            <a:endParaRPr/>
+          </a:p>
+        </p:txBody>
+      </p:sp>
+      <p:sp>
+        <p:nvSpPr>
+          <p:cNvPr id="61" name="TextBox 60"/>
+          <p:cNvSpPr txBox="1"/>
+          <p:nvPr/>
+        </p:nvSpPr>
+        <p:spPr>
+          <a:xfrm>
+            <a:off x="3602614" y="5244998"/>
+            <a:ext cx="1166774" cy="189604"/>
+          </a:xfrm>
+          <a:prstGeom prst="rect">
+            <a:avLst/>
+          </a:prstGeom>
+          <a:noFill/>
+        </p:spPr>
+        <p:txBody>
+          <a:bodyPr wrap="square" lIns="0" tIns="0" rIns="0" bIns="0">
+            <a:spAutoFit/>
+          </a:bodyPr>
+          <a:lstStyle/>
+          <a:p>
+            <a:pPr>
+              <a:spcAft>
+                <a:spcPts val="264"/>
+              </a:spcAft>
+              <a:defRPr sz="1232" b="1">
+                <a:solidFill>
+                  <a:srgbClr val="000000"/>
+                </a:solidFill>
+                <a:latin typeface="Aptos"/>
+              </a:defRPr>
+            </a:pPr>
+            <a:r>
+              <a:t>No match</a:t>
+            </a:r>
+            <a:endParaRPr lang="en-US"/>
+          </a:p>
+        </p:txBody>
+      </p:sp>
+      <p:sp>
+        <p:nvSpPr>
+          <p:cNvPr id="62" name="Rectangle 61"/>
+          <p:cNvSpPr/>
+          <p:nvPr/>
+        </p:nvSpPr>
+        <p:spPr>
+          <a:xfrm>
+            <a:off x="852830" y="3716121"/>
+            <a:ext cx="2269175" cy="1931212"/>
+          </a:xfrm>
+          <a:prstGeom prst="rect">
+            <a:avLst/>
+          </a:prstGeom>
+          <a:solidFill>
+            <a:srgbClr val="FFFFFF"/>
+          </a:solidFill>
+          <a:ln w="8941">
+            <a:solidFill>
+              <a:srgbClr val="4C8CD2"/>
+            </a:solidFill>
+          </a:ln>
+        </p:spPr>
+        <p:style>
+          <a:lnRef idx="1">
+            <a:schemeClr val="accent1"/>
+          </a:lnRef>
+          <a:fillRef idx="3">
+            <a:schemeClr val="accent1"/>
+          </a:fillRef>
+          <a:effectRef idx="2">
+            <a:schemeClr val="accent1"/>
+          </a:effectRef>
+          <a:fontRef idx="minor">
+            <a:schemeClr val="lt1"/>
+          </a:fontRef>
+        </p:style>
+        <p:txBody>
+          <a:bodyPr rtlCol="0" anchor="ctr"/>
+          <a:lstStyle/>
+          <a:p>
+            <a:pPr algn="ctr"/>
+            <a:endParaRPr/>
+          </a:p>
+        </p:txBody>
+      </p:sp>
+      <p:sp>
+        <p:nvSpPr>
+          <p:cNvPr id="63" name="Rectangle 62"/>
+          <p:cNvSpPr/>
+          <p:nvPr/>
+        </p:nvSpPr>
+        <p:spPr>
+          <a:xfrm>
+            <a:off x="852830" y="3716121"/>
+            <a:ext cx="2269175" cy="386242"/>
+          </a:xfrm>
+          <a:prstGeom prst="rect">
+            <a:avLst/>
+          </a:prstGeom>
+          <a:solidFill>
+            <a:srgbClr val="002869"/>
+          </a:solidFill>
+          <a:ln w="8941">
+            <a:solidFill>
+              <a:srgbClr val="0057AF"/>
+            </a:solidFill>
+          </a:ln>
+        </p:spPr>
+        <p:style>
+          <a:lnRef idx="1">
+            <a:schemeClr val="accent1"/>
+          </a:lnRef>
+          <a:fillRef idx="3">
+            <a:schemeClr val="accent1"/>
+          </a:fillRef>
+          <a:effectRef idx="2">
+            <a:schemeClr val="accent1"/>
+          </a:effectRef>
+          <a:fontRef idx="minor">
+            <a:schemeClr val="lt1"/>
+          </a:fontRef>
+        </p:style>
+        <p:txBody>
+          <a:bodyPr rtlCol="0" anchor="ctr"/>
+          <a:lstStyle/>
+          <a:p>
+            <a:pPr algn="ctr"/>
+            <a:endParaRPr/>
+          </a:p>
+        </p:txBody>
+      </p:sp>
+      <p:sp>
+        <p:nvSpPr>
+          <p:cNvPr id="64" name="TextBox 63"/>
+          <p:cNvSpPr txBox="1"/>
+          <p:nvPr/>
+        </p:nvSpPr>
+        <p:spPr>
+          <a:xfrm>
+            <a:off x="949391" y="3772448"/>
+            <a:ext cx="2076053" cy="523220"/>
+          </a:xfrm>
+          <a:prstGeom prst="rect">
+            <a:avLst/>
+          </a:prstGeom>
+          <a:noFill/>
+        </p:spPr>
+        <p:txBody>
+          <a:bodyPr wrap="square" lIns="0" tIns="0" rIns="0" bIns="0">
+            <a:spAutoFit/>
+          </a:bodyPr>
+          <a:lstStyle/>
+          <a:p>
+            <a:pPr>
+              <a:spcAft>
+                <a:spcPts val="264"/>
+              </a:spcAft>
+              <a:defRPr sz="1496" b="1">
+                <a:solidFill>
+                  <a:srgbClr val="FFFFFF"/>
+                </a:solidFill>
+                <a:latin typeface="Aptos"/>
+              </a:defRPr>
+            </a:pPr>
+            <a:r>
+              <a:t>6  Corroborate journey</a:t>
+            </a:r>
+            <a:endParaRPr lang="en-US"/>
+          </a:p>
+        </p:txBody>
+      </p:sp>
+      <p:sp>
+        <p:nvSpPr>
+          <p:cNvPr id="65" name="TextBox 64"/>
+          <p:cNvSpPr txBox="1"/>
+          <p:nvPr/>
+        </p:nvSpPr>
+        <p:spPr>
+          <a:xfrm>
+            <a:off x="965484" y="4190878"/>
+            <a:ext cx="2043866" cy="1319295"/>
+          </a:xfrm>
+          <a:prstGeom prst="rect">
+            <a:avLst/>
+          </a:prstGeom>
+          <a:noFill/>
+        </p:spPr>
+        <p:txBody>
+          <a:bodyPr wrap="square" lIns="0" tIns="0" rIns="0" bIns="0">
+            <a:noAutofit/>
           </a:bodyPr>
           <a:lstStyle/>
           <a:p>
@@ -10641,12 +10106,11 @@
               </a:defRPr>
             </a:pPr>
             <a:r>
-              <a:rPr lang="en-US" b="1" dirty="0"/>
-              <a:t>Set duplicate and review thresholds</a:t>
-            </a:r>
-            <a:r>
-              <a:rPr dirty="0"/>
-              <a:t> through probability spot checks.</a:t>
+              <a:rPr lang="en-US" b="1"/>
+              <a:t>Compare</a:t>
+            </a:r>
+            <a:r>
+              <a:t> LinkedIn profile and account names.</a:t>
             </a:r>
             <a:endParaRPr lang="en-US"/>
           </a:p>
@@ -10656,555 +10120,7 @@
                 <a:spcPct val="100000"/>
               </a:lnSpc>
               <a:spcAft>
-                <a:spcPts val="352"/>
-              </a:spcAft>
-              <a:defRPr sz="1276" b="0">
-                <a:solidFill>
-                  <a:srgbClr val="000000"/>
-                </a:solidFill>
-                <a:latin typeface="Aptos"/>
-              </a:defRPr>
-            </a:pPr>
-            <a:r>
-              <a:rPr lang="en-US" b="1" dirty="0"/>
-              <a:t>Apply thresholds + account rules:</a:t>
-            </a:r>
-            <a:r>
-              <a:rPr dirty="0"/>
-              <a:t> master ID, account ID, exact attribute matches and fuzzy account names.</a:t>
-            </a:r>
-            <a:endParaRPr lang="en-US"/>
-          </a:p>
-        </p:txBody>
-      </p:sp>
-      <p:sp>
-        <p:nvSpPr>
-          <p:cNvPr id="54" name="Rectangle 53"/>
-          <p:cNvSpPr/>
-          <p:nvPr/>
-        </p:nvSpPr>
-        <p:spPr>
-          <a:xfrm>
-            <a:off x="3530193" y="3772448"/>
-            <a:ext cx="1303568" cy="402336"/>
-          </a:xfrm>
-          <a:prstGeom prst="rect">
-            <a:avLst/>
-          </a:prstGeom>
-          <a:solidFill>
-            <a:srgbClr val="FFFFFF"/>
-          </a:solidFill>
-          <a:ln w="8941">
-            <a:solidFill>
-              <a:srgbClr val="0057AF"/>
-            </a:solidFill>
-          </a:ln>
-        </p:spPr>
-        <p:style>
-          <a:lnRef idx="1">
-            <a:schemeClr val="accent1"/>
-          </a:lnRef>
-          <a:fillRef idx="3">
-            <a:schemeClr val="accent1"/>
-          </a:fillRef>
-          <a:effectRef idx="2">
-            <a:schemeClr val="accent1"/>
-          </a:effectRef>
-          <a:fontRef idx="minor">
-            <a:schemeClr val="lt1"/>
-          </a:fontRef>
-        </p:style>
-        <p:txBody>
-          <a:bodyPr rtlCol="0" anchor="ctr"/>
-          <a:lstStyle/>
-          <a:p>
-            <a:pPr algn="ctr"/>
-            <a:endParaRPr/>
-          </a:p>
-        </p:txBody>
-      </p:sp>
-      <p:sp>
-        <p:nvSpPr>
-          <p:cNvPr id="55" name="TextBox 54"/>
-          <p:cNvSpPr txBox="1"/>
-          <p:nvPr/>
-        </p:nvSpPr>
-        <p:spPr>
-          <a:xfrm>
-            <a:off x="3602614" y="3869009"/>
-            <a:ext cx="1166774" cy="189604"/>
-          </a:xfrm>
-          <a:prstGeom prst="rect">
-            <a:avLst/>
-          </a:prstGeom>
-          <a:noFill/>
-        </p:spPr>
-        <p:txBody>
-          <a:bodyPr wrap="square" lIns="0" tIns="0" rIns="0" bIns="0">
-            <a:spAutoFit/>
-          </a:bodyPr>
-          <a:lstStyle/>
-          <a:p>
-            <a:pPr>
-              <a:spcAft>
-                <a:spcPts val="264"/>
-              </a:spcAft>
-              <a:defRPr sz="1232" b="1">
-                <a:solidFill>
-                  <a:srgbClr val="000000"/>
-                </a:solidFill>
-                <a:latin typeface="Aptos"/>
-              </a:defRPr>
-            </a:pPr>
-            <a:r>
-              <a:t>Duplicate</a:t>
-            </a:r>
-            <a:endParaRPr lang="en-US"/>
-          </a:p>
-        </p:txBody>
-      </p:sp>
-      <p:sp>
-        <p:nvSpPr>
-          <p:cNvPr id="56" name="Rectangle 55"/>
-          <p:cNvSpPr/>
-          <p:nvPr/>
-        </p:nvSpPr>
-        <p:spPr>
-          <a:xfrm>
-            <a:off x="3530193" y="4231111"/>
-            <a:ext cx="1303568" cy="402336"/>
-          </a:xfrm>
-          <a:prstGeom prst="rect">
-            <a:avLst/>
-          </a:prstGeom>
-          <a:solidFill>
-            <a:srgbClr val="FFFFFF"/>
-          </a:solidFill>
-          <a:ln w="8941">
-            <a:solidFill>
-              <a:srgbClr val="0057AF"/>
-            </a:solidFill>
-          </a:ln>
-        </p:spPr>
-        <p:style>
-          <a:lnRef idx="1">
-            <a:schemeClr val="accent1"/>
-          </a:lnRef>
-          <a:fillRef idx="3">
-            <a:schemeClr val="accent1"/>
-          </a:fillRef>
-          <a:effectRef idx="2">
-            <a:schemeClr val="accent1"/>
-          </a:effectRef>
-          <a:fontRef idx="minor">
-            <a:schemeClr val="lt1"/>
-          </a:fontRef>
-        </p:style>
-        <p:txBody>
-          <a:bodyPr rtlCol="0" anchor="ctr"/>
-          <a:lstStyle/>
-          <a:p>
-            <a:pPr algn="ctr"/>
-            <a:endParaRPr/>
-          </a:p>
-        </p:txBody>
-      </p:sp>
-      <p:sp>
-        <p:nvSpPr>
-          <p:cNvPr id="57" name="TextBox 56"/>
-          <p:cNvSpPr txBox="1"/>
-          <p:nvPr/>
-        </p:nvSpPr>
-        <p:spPr>
-          <a:xfrm>
-            <a:off x="3602614" y="4327672"/>
-            <a:ext cx="1166774" cy="189604"/>
-          </a:xfrm>
-          <a:prstGeom prst="rect">
-            <a:avLst/>
-          </a:prstGeom>
-          <a:noFill/>
-        </p:spPr>
-        <p:txBody>
-          <a:bodyPr wrap="square" lIns="0" tIns="0" rIns="0" bIns="0">
-            <a:spAutoFit/>
-          </a:bodyPr>
-          <a:lstStyle/>
-          <a:p>
-            <a:pPr>
-              <a:spcAft>
-                <a:spcPts val="264"/>
-              </a:spcAft>
-              <a:defRPr sz="1232" b="1">
-                <a:solidFill>
-                  <a:srgbClr val="000000"/>
-                </a:solidFill>
-                <a:latin typeface="Aptos"/>
-              </a:defRPr>
-            </a:pPr>
-            <a:r>
-              <a:t>Need review</a:t>
-            </a:r>
-            <a:endParaRPr lang="en-US"/>
-          </a:p>
-        </p:txBody>
-      </p:sp>
-      <p:sp>
-        <p:nvSpPr>
-          <p:cNvPr id="58" name="Rectangle 57"/>
-          <p:cNvSpPr/>
-          <p:nvPr/>
-        </p:nvSpPr>
-        <p:spPr>
-          <a:xfrm>
-            <a:off x="3530193" y="4689774"/>
-            <a:ext cx="1303568" cy="402336"/>
-          </a:xfrm>
-          <a:prstGeom prst="rect">
-            <a:avLst/>
-          </a:prstGeom>
-          <a:solidFill>
-            <a:srgbClr val="0057AF"/>
-          </a:solidFill>
-          <a:ln w="8941">
-            <a:solidFill>
-              <a:srgbClr val="0057AF"/>
-            </a:solidFill>
-          </a:ln>
-        </p:spPr>
-        <p:style>
-          <a:lnRef idx="1">
-            <a:schemeClr val="accent1"/>
-          </a:lnRef>
-          <a:fillRef idx="3">
-            <a:schemeClr val="accent1"/>
-          </a:fillRef>
-          <a:effectRef idx="2">
-            <a:schemeClr val="accent1"/>
-          </a:effectRef>
-          <a:fontRef idx="minor">
-            <a:schemeClr val="lt1"/>
-          </a:fontRef>
-        </p:style>
-        <p:txBody>
-          <a:bodyPr rtlCol="0" anchor="ctr"/>
-          <a:lstStyle/>
-          <a:p>
-            <a:pPr algn="ctr"/>
-            <a:endParaRPr/>
-          </a:p>
-        </p:txBody>
-      </p:sp>
-      <p:sp>
-        <p:nvSpPr>
-          <p:cNvPr id="59" name="TextBox 58"/>
-          <p:cNvSpPr txBox="1"/>
-          <p:nvPr/>
-        </p:nvSpPr>
-        <p:spPr>
-          <a:xfrm>
-            <a:off x="3602614" y="4786335"/>
-            <a:ext cx="1166774" cy="217261"/>
-          </a:xfrm>
-          <a:prstGeom prst="rect">
-            <a:avLst/>
-          </a:prstGeom>
-          <a:noFill/>
-        </p:spPr>
-        <p:txBody>
-          <a:bodyPr wrap="square" lIns="0" tIns="0" rIns="0" bIns="0">
-            <a:spAutoFit/>
-          </a:bodyPr>
-          <a:lstStyle/>
-          <a:p>
-            <a:pPr>
-              <a:spcAft>
-                <a:spcPts val="264"/>
-              </a:spcAft>
-              <a:defRPr sz="1232" b="1">
-                <a:solidFill>
-                  <a:srgbClr val="FFFFFF"/>
-                </a:solidFill>
-                <a:latin typeface="Aptos"/>
-              </a:defRPr>
-            </a:pPr>
-            <a:r>
-              <a:t>Journey link</a:t>
-            </a:r>
-            <a:endParaRPr lang="en-US"/>
-          </a:p>
-        </p:txBody>
-      </p:sp>
-      <p:sp>
-        <p:nvSpPr>
-          <p:cNvPr id="60" name="Rectangle 59"/>
-          <p:cNvSpPr/>
-          <p:nvPr/>
-        </p:nvSpPr>
-        <p:spPr>
-          <a:xfrm>
-            <a:off x="3530193" y="5148437"/>
-            <a:ext cx="1303568" cy="402336"/>
-          </a:xfrm>
-          <a:prstGeom prst="rect">
-            <a:avLst/>
-          </a:prstGeom>
-          <a:solidFill>
-            <a:srgbClr val="FFFFFF"/>
-          </a:solidFill>
-          <a:ln w="8941">
-            <a:solidFill>
-              <a:srgbClr val="0057AF"/>
-            </a:solidFill>
-          </a:ln>
-        </p:spPr>
-        <p:style>
-          <a:lnRef idx="1">
-            <a:schemeClr val="accent1"/>
-          </a:lnRef>
-          <a:fillRef idx="3">
-            <a:schemeClr val="accent1"/>
-          </a:fillRef>
-          <a:effectRef idx="2">
-            <a:schemeClr val="accent1"/>
-          </a:effectRef>
-          <a:fontRef idx="minor">
-            <a:schemeClr val="lt1"/>
-          </a:fontRef>
-        </p:style>
-        <p:txBody>
-          <a:bodyPr rtlCol="0" anchor="ctr"/>
-          <a:lstStyle/>
-          <a:p>
-            <a:pPr algn="ctr"/>
-            <a:endParaRPr/>
-          </a:p>
-        </p:txBody>
-      </p:sp>
-      <p:sp>
-        <p:nvSpPr>
-          <p:cNvPr id="61" name="TextBox 60"/>
-          <p:cNvSpPr txBox="1"/>
-          <p:nvPr/>
-        </p:nvSpPr>
-        <p:spPr>
-          <a:xfrm>
-            <a:off x="3602614" y="5244998"/>
-            <a:ext cx="1166774" cy="189604"/>
-          </a:xfrm>
-          <a:prstGeom prst="rect">
-            <a:avLst/>
-          </a:prstGeom>
-          <a:noFill/>
-        </p:spPr>
-        <p:txBody>
-          <a:bodyPr wrap="square" lIns="0" tIns="0" rIns="0" bIns="0">
-            <a:spAutoFit/>
-          </a:bodyPr>
-          <a:lstStyle/>
-          <a:p>
-            <a:pPr>
-              <a:spcAft>
-                <a:spcPts val="264"/>
-              </a:spcAft>
-              <a:defRPr sz="1232" b="1">
-                <a:solidFill>
-                  <a:srgbClr val="000000"/>
-                </a:solidFill>
-                <a:latin typeface="Aptos"/>
-              </a:defRPr>
-            </a:pPr>
-            <a:r>
-              <a:t>No match</a:t>
-            </a:r>
-            <a:endParaRPr lang="en-US"/>
-          </a:p>
-        </p:txBody>
-      </p:sp>
-      <p:sp>
-        <p:nvSpPr>
-          <p:cNvPr id="62" name="Rectangle 61"/>
-          <p:cNvSpPr/>
-          <p:nvPr/>
-        </p:nvSpPr>
-        <p:spPr>
-          <a:xfrm>
-            <a:off x="852830" y="3716121"/>
-            <a:ext cx="2269175" cy="1931212"/>
-          </a:xfrm>
-          <a:prstGeom prst="rect">
-            <a:avLst/>
-          </a:prstGeom>
-          <a:solidFill>
-            <a:srgbClr val="FFFFFF"/>
-          </a:solidFill>
-          <a:ln w="8941">
-            <a:solidFill>
-              <a:srgbClr val="4C8CD2"/>
-            </a:solidFill>
-          </a:ln>
-        </p:spPr>
-        <p:style>
-          <a:lnRef idx="1">
-            <a:schemeClr val="accent1"/>
-          </a:lnRef>
-          <a:fillRef idx="3">
-            <a:schemeClr val="accent1"/>
-          </a:fillRef>
-          <a:effectRef idx="2">
-            <a:schemeClr val="accent1"/>
-          </a:effectRef>
-          <a:fontRef idx="minor">
-            <a:schemeClr val="lt1"/>
-          </a:fontRef>
-        </p:style>
-        <p:txBody>
-          <a:bodyPr rtlCol="0" anchor="ctr"/>
-          <a:lstStyle/>
-          <a:p>
-            <a:pPr algn="ctr"/>
-            <a:endParaRPr/>
-          </a:p>
-        </p:txBody>
-      </p:sp>
-      <p:sp>
-        <p:nvSpPr>
-          <p:cNvPr id="63" name="Rectangle 62"/>
-          <p:cNvSpPr/>
-          <p:nvPr/>
-        </p:nvSpPr>
-        <p:spPr>
-          <a:xfrm>
-            <a:off x="852830" y="3716121"/>
-            <a:ext cx="2269175" cy="386242"/>
-          </a:xfrm>
-          <a:prstGeom prst="rect">
-            <a:avLst/>
-          </a:prstGeom>
-          <a:solidFill>
-            <a:srgbClr val="002869"/>
-          </a:solidFill>
-          <a:ln w="8941">
-            <a:solidFill>
-              <a:srgbClr val="0057AF"/>
-            </a:solidFill>
-          </a:ln>
-        </p:spPr>
-        <p:style>
-          <a:lnRef idx="1">
-            <a:schemeClr val="accent1"/>
-          </a:lnRef>
-          <a:fillRef idx="3">
-            <a:schemeClr val="accent1"/>
-          </a:fillRef>
-          <a:effectRef idx="2">
-            <a:schemeClr val="accent1"/>
-          </a:effectRef>
-          <a:fontRef idx="minor">
-            <a:schemeClr val="lt1"/>
-          </a:fontRef>
-        </p:style>
-        <p:txBody>
-          <a:bodyPr rtlCol="0" anchor="ctr"/>
-          <a:lstStyle/>
-          <a:p>
-            <a:pPr algn="ctr"/>
-            <a:endParaRPr/>
-          </a:p>
-        </p:txBody>
-      </p:sp>
-      <p:sp>
-        <p:nvSpPr>
-          <p:cNvPr id="64" name="TextBox 63"/>
-          <p:cNvSpPr txBox="1"/>
-          <p:nvPr/>
-        </p:nvSpPr>
-        <p:spPr>
-          <a:xfrm>
-            <a:off x="949391" y="3772448"/>
-            <a:ext cx="2076053" cy="523220"/>
-          </a:xfrm>
-          <a:prstGeom prst="rect">
-            <a:avLst/>
-          </a:prstGeom>
-          <a:noFill/>
-        </p:spPr>
-        <p:txBody>
-          <a:bodyPr wrap="square" lIns="0" tIns="0" rIns="0" bIns="0">
-            <a:spAutoFit/>
-          </a:bodyPr>
-          <a:lstStyle/>
-          <a:p>
-            <a:pPr>
-              <a:spcAft>
-                <a:spcPts val="264"/>
-              </a:spcAft>
-              <a:defRPr sz="1496" b="1">
-                <a:solidFill>
-                  <a:srgbClr val="FFFFFF"/>
-                </a:solidFill>
-                <a:latin typeface="Aptos"/>
-              </a:defRPr>
-            </a:pPr>
-            <a:r>
-              <a:t>6  Corroborate journey</a:t>
-            </a:r>
-            <a:endParaRPr lang="en-US"/>
-          </a:p>
-        </p:txBody>
-      </p:sp>
-      <p:sp>
-        <p:nvSpPr>
-          <p:cNvPr id="65" name="TextBox 64"/>
-          <p:cNvSpPr txBox="1"/>
-          <p:nvPr/>
-        </p:nvSpPr>
-        <p:spPr>
-          <a:xfrm>
-            <a:off x="965484" y="4190878"/>
-            <a:ext cx="2043866" cy="1032975"/>
-          </a:xfrm>
-          <a:prstGeom prst="rect">
-            <a:avLst/>
-          </a:prstGeom>
-          <a:noFill/>
-        </p:spPr>
-        <p:txBody>
-          <a:bodyPr wrap="square" lIns="0" tIns="0" rIns="0" bIns="0">
-            <a:spAutoFit/>
-          </a:bodyPr>
-          <a:lstStyle/>
-          <a:p>
-            <a:pPr>
-              <a:lnSpc>
-                <a:spcPct val="100000"/>
-              </a:lnSpc>
-              <a:spcAft>
-                <a:spcPts val="352"/>
-              </a:spcAft>
-              <a:defRPr sz="1276" b="0">
-                <a:solidFill>
-                  <a:srgbClr val="000000"/>
-                </a:solidFill>
-                <a:latin typeface="Aptos"/>
-              </a:defRPr>
-            </a:pPr>
-            <a:r>
-              <a:rPr lang="en-US" b="1"/>
-              <a:t>Compare</a:t>
-            </a:r>
-            <a:r>
-              <a:t> LinkedIn profile and account names.</a:t>
-            </a:r>
-            <a:endParaRPr lang="en-US"/>
-          </a:p>
-          <a:p>
-            <a:pPr>
-              <a:lnSpc>
-                <a:spcPct val="100000"/>
-              </a:lnSpc>
-              <a:spcAft>
-                <a:spcPts val="352"/>
+                <a:spcPts val="0"/>
               </a:spcAft>
               <a:defRPr sz="1276" b="0">
                 <a:solidFill>
@@ -11893,7 +10809,7 @@
               <a:buNone/>
             </a:pPr>
             <a:r>
-              <a:rPr lang="en-US" sz="3600" b="0">
+              <a:rPr lang="en-US" sz="3600" b="0" dirty="0">
                 <a:solidFill>
                   <a:srgbClr val="002869"/>
                 </a:solidFill>
@@ -12358,6 +11274,550 @@
     <p:extLst>
       <p:ext uri="{BB962C8B-B14F-4D97-AF65-F5344CB8AC3E}">
         <p14:creationId xmlns:p14="http://schemas.microsoft.com/office/powerpoint/2010/main" val="1819677001"/>
+      </p:ext>
+    </p:extLst>
+  </p:cSld>
+  <p:clrMapOvr>
+    <a:masterClrMapping/>
+  </p:clrMapOvr>
+</p:sld>
+</file>
+
+<file path=ppt/slides/slide7.xml><?xml version="1.0" encoding="utf-8"?>
+<p:sld xmlns:a="http://schemas.openxmlformats.org/drawingml/2006/main" xmlns:r="http://schemas.openxmlformats.org/officeDocument/2006/relationships" xmlns:p="http://schemas.openxmlformats.org/presentationml/2006/main">
+  <p:cSld>
+    <p:spTree>
+      <p:nvGrpSpPr>
+        <p:cNvPr id="1" name=""/>
+        <p:cNvGrpSpPr/>
+        <p:nvPr/>
+      </p:nvGrpSpPr>
+      <p:grpSpPr>
+        <a:xfrm>
+          <a:off x="0" y="0"/>
+          <a:ext cx="0" cy="0"/>
+          <a:chOff x="0" y="0"/>
+          <a:chExt cx="0" cy="0"/>
+        </a:xfrm>
+      </p:grpSpPr>
+      <p:sp>
+        <p:nvSpPr>
+          <p:cNvPr id="6" name="Title 1">
+            <a:extLst>
+              <a:ext uri="{FF2B5EF4-FFF2-40B4-BE49-F238E27FC236}">
+                <a16:creationId xmlns:a16="http://schemas.microsoft.com/office/drawing/2014/main" id="{C2F052B2-BC24-5DEA-31AC-BFC3B5D3040C}"/>
+              </a:ext>
+            </a:extLst>
+          </p:cNvPr>
+          <p:cNvSpPr>
+            <a:spLocks noGrp="1"/>
+          </p:cNvSpPr>
+          <p:nvPr>
+            <p:ph type="title"/>
+          </p:nvPr>
+        </p:nvSpPr>
+        <p:spPr>
+          <a:xfrm>
+            <a:off x="685800" y="365760"/>
+            <a:ext cx="10835640" cy="594360"/>
+          </a:xfrm>
+        </p:spPr>
+        <p:txBody>
+          <a:bodyPr wrap="square" lIns="0" tIns="0" rIns="0" bIns="0">
+            <a:normAutofit fontScale="90000"/>
+          </a:bodyPr>
+          <a:lstStyle/>
+          <a:p>
+            <a:pPr marL="0" indent="0">
+              <a:lnSpc>
+                <a:spcPct val="115000"/>
+              </a:lnSpc>
+              <a:spcAft>
+                <a:spcPts val="1500"/>
+              </a:spcAft>
+              <a:buNone/>
+            </a:pPr>
+            <a:r>
+              <a:rPr lang="en-US" sz="3600" b="0" dirty="0">
+                <a:solidFill>
+                  <a:srgbClr val="002869"/>
+                </a:solidFill>
+                <a:latin typeface="Aptos"/>
+              </a:rPr>
+              <a:t>Next Steps</a:t>
+            </a:r>
+          </a:p>
+        </p:txBody>
+      </p:sp>
+      <p:sp>
+        <p:nvSpPr>
+          <p:cNvPr id="10" name="Restyled section 10">
+            <a:extLst>
+              <a:ext uri="{FF2B5EF4-FFF2-40B4-BE49-F238E27FC236}">
+                <a16:creationId xmlns:a16="http://schemas.microsoft.com/office/drawing/2014/main" id="{9D13339E-80DB-735B-913E-D09B03995964}"/>
+              </a:ext>
+            </a:extLst>
+          </p:cNvPr>
+          <p:cNvSpPr>
+            <a:spLocks noGrp="1"/>
+          </p:cNvSpPr>
+          <p:nvPr>
+            <p:ph idx="1"/>
+          </p:nvPr>
+        </p:nvSpPr>
+        <p:spPr>
+          <a:xfrm>
+            <a:off x="850392" y="1261872"/>
+            <a:ext cx="10451592" cy="420624"/>
+          </a:xfrm>
+          <a:solidFill>
+            <a:srgbClr val="EAF3FB"/>
+          </a:solidFill>
+          <a:ln>
+            <a:noFill/>
+          </a:ln>
+        </p:spPr>
+        <p:txBody>
+          <a:bodyPr wrap="square" lIns="155448" tIns="0" rIns="155448" bIns="0" anchor="ctr">
+            <a:noAutofit/>
+          </a:bodyPr>
+          <a:lstStyle/>
+          <a:p>
+            <a:pPr marL="0" indent="0">
+              <a:lnSpc>
+                <a:spcPct val="106000"/>
+              </a:lnSpc>
+              <a:spcBef>
+                <a:spcPts val="0"/>
+              </a:spcBef>
+              <a:spcAft>
+                <a:spcPts val="0"/>
+              </a:spcAft>
+              <a:buNone/>
+            </a:pPr>
+            <a:r>
+              <a:rPr lang="en-US" sz="2400" b="1">
+                <a:solidFill>
+                  <a:srgbClr val="002869"/>
+                </a:solidFill>
+                <a:latin typeface="Aptos"/>
+              </a:rPr>
+              <a:t>Validation</a:t>
+            </a:r>
+          </a:p>
+        </p:txBody>
+      </p:sp>
+      <p:sp>
+        <p:nvSpPr>
+          <p:cNvPr id="11" name="Restyled section 11"/>
+          <p:cNvSpPr txBox="1"/>
+          <p:nvPr/>
+        </p:nvSpPr>
+        <p:spPr>
+          <a:xfrm>
+            <a:off x="1005840" y="1810512"/>
+            <a:ext cx="10058400" cy="365760"/>
+          </a:xfrm>
+          <a:prstGeom prst="rect">
+            <a:avLst/>
+          </a:prstGeom>
+          <a:noFill/>
+        </p:spPr>
+        <p:txBody>
+          <a:bodyPr wrap="square" lIns="0" tIns="0" rIns="0" bIns="0">
+            <a:noAutofit/>
+          </a:bodyPr>
+          <a:lstStyle/>
+          <a:p>
+            <a:pPr marL="254000" lvl="0" indent="-228600">
+              <a:lnSpc>
+                <a:spcPct val="106000"/>
+              </a:lnSpc>
+              <a:spcBef>
+                <a:spcPts val="0"/>
+              </a:spcBef>
+              <a:spcAft>
+                <a:spcPts val="0"/>
+              </a:spcAft>
+              <a:buFont typeface="Aptos"/>
+              <a:buChar char="•"/>
+            </a:pPr>
+            <a:r>
+              <a:rPr lang="en-US" sz="2000" b="0" dirty="0">
+                <a:solidFill>
+                  <a:srgbClr val="000000"/>
+                </a:solidFill>
+                <a:latin typeface="Aptos"/>
+              </a:rPr>
+              <a:t>Prepare and share duplicate-contact and journey-link results for review.</a:t>
+            </a:r>
+            <a:endParaRPr lang="en-US" sz="2000" b="0">
+              <a:solidFill>
+                <a:srgbClr val="000000"/>
+              </a:solidFill>
+              <a:latin typeface="Aptos"/>
+            </a:endParaRPr>
+          </a:p>
+        </p:txBody>
+      </p:sp>
+      <p:sp>
+        <p:nvSpPr>
+          <p:cNvPr id="12" name="Restyled section 12"/>
+          <p:cNvSpPr txBox="1"/>
+          <p:nvPr/>
+        </p:nvSpPr>
+        <p:spPr>
+          <a:xfrm>
+            <a:off x="850392" y="2221992"/>
+            <a:ext cx="10451592" cy="420624"/>
+          </a:xfrm>
+          <a:prstGeom prst="rect">
+            <a:avLst/>
+          </a:prstGeom>
+          <a:solidFill>
+            <a:srgbClr val="EAF3FB"/>
+          </a:solidFill>
+        </p:spPr>
+        <p:txBody>
+          <a:bodyPr wrap="square" lIns="155448" tIns="0" rIns="155448" bIns="0" anchor="ctr">
+            <a:noAutofit/>
+          </a:bodyPr>
+          <a:lstStyle/>
+          <a:p>
+            <a:pPr marL="0" indent="0">
+              <a:lnSpc>
+                <a:spcPct val="106000"/>
+              </a:lnSpc>
+              <a:spcBef>
+                <a:spcPts val="0"/>
+              </a:spcBef>
+              <a:spcAft>
+                <a:spcPts val="0"/>
+              </a:spcAft>
+              <a:buNone/>
+            </a:pPr>
+            <a:r>
+              <a:rPr lang="en-US" sz="2000" b="1" dirty="0">
+                <a:solidFill>
+                  <a:srgbClr val="002869"/>
+                </a:solidFill>
+                <a:latin typeface="Aptos"/>
+              </a:rPr>
+              <a:t>Define business-aligned success criteria and acceptance metrics, including:</a:t>
+            </a:r>
+          </a:p>
+        </p:txBody>
+      </p:sp>
+      <p:sp>
+        <p:nvSpPr>
+          <p:cNvPr id="13" name="Restyled section 13"/>
+          <p:cNvSpPr txBox="1"/>
+          <p:nvPr/>
+        </p:nvSpPr>
+        <p:spPr>
+          <a:xfrm>
+            <a:off x="1005840" y="2788920"/>
+            <a:ext cx="4315968" cy="896112"/>
+          </a:xfrm>
+          <a:prstGeom prst="rect">
+            <a:avLst/>
+          </a:prstGeom>
+          <a:noFill/>
+        </p:spPr>
+        <p:txBody>
+          <a:bodyPr wrap="square" lIns="0" tIns="0" rIns="0" bIns="0">
+            <a:noAutofit/>
+          </a:bodyPr>
+          <a:lstStyle/>
+          <a:p>
+            <a:pPr marL="254000" lvl="0" indent="-228600">
+              <a:lnSpc>
+                <a:spcPct val="106000"/>
+              </a:lnSpc>
+              <a:spcBef>
+                <a:spcPts val="0"/>
+              </a:spcBef>
+              <a:spcAft>
+                <a:spcPts val="0"/>
+              </a:spcAft>
+              <a:buFont typeface="Aptos"/>
+              <a:buChar char="•"/>
+            </a:pPr>
+            <a:r>
+              <a:rPr lang="en-US" sz="1900" b="0">
+                <a:solidFill>
+                  <a:srgbClr val="000000"/>
+                </a:solidFill>
+                <a:latin typeface="Aptos"/>
+              </a:rPr>
+              <a:t>Duplicate detection performance targets (e.g., precision, recall, FP).</a:t>
+            </a:r>
+          </a:p>
+        </p:txBody>
+      </p:sp>
+      <p:sp>
+        <p:nvSpPr>
+          <p:cNvPr id="14" name="Restyled section 14"/>
+          <p:cNvSpPr txBox="1"/>
+          <p:nvPr/>
+        </p:nvSpPr>
+        <p:spPr>
+          <a:xfrm>
+            <a:off x="5705856" y="2788920"/>
+            <a:ext cx="5596128" cy="1792224"/>
+          </a:xfrm>
+          <a:prstGeom prst="rect">
+            <a:avLst/>
+          </a:prstGeom>
+          <a:noFill/>
+        </p:spPr>
+        <p:txBody>
+          <a:bodyPr wrap="square" lIns="0" tIns="0" rIns="0" bIns="0">
+            <a:noAutofit/>
+          </a:bodyPr>
+          <a:lstStyle/>
+          <a:p>
+            <a:pPr marL="254000" lvl="0" indent="-228600">
+              <a:lnSpc>
+                <a:spcPct val="100000"/>
+              </a:lnSpc>
+              <a:spcBef>
+                <a:spcPts val="0"/>
+              </a:spcBef>
+              <a:spcAft>
+                <a:spcPts val="200"/>
+              </a:spcAft>
+              <a:buFont typeface="Aptos"/>
+              <a:buChar char="•"/>
+            </a:pPr>
+            <a:r>
+              <a:rPr lang="en-US" sz="1800" b="0" dirty="0">
+                <a:solidFill>
+                  <a:srgbClr val="000000"/>
+                </a:solidFill>
+                <a:latin typeface="Aptos"/>
+              </a:rPr>
+              <a:t>For unified contact journeys, either:</a:t>
+            </a:r>
+            <a:endParaRPr lang="en-US" sz="1800" b="0">
+              <a:solidFill>
+                <a:srgbClr val="000000"/>
+              </a:solidFill>
+              <a:latin typeface="Aptos"/>
+            </a:endParaRPr>
+          </a:p>
+          <a:p>
+            <a:pPr marL="419100" lvl="1" indent="-241300">
+              <a:lnSpc>
+                <a:spcPct val="100000"/>
+              </a:lnSpc>
+              <a:spcBef>
+                <a:spcPts val="0"/>
+              </a:spcBef>
+              <a:spcAft>
+                <a:spcPts val="200"/>
+              </a:spcAft>
+              <a:buFont typeface="Arial"/>
+              <a:buChar char="✓"/>
+            </a:pPr>
+            <a:r>
+              <a:rPr lang="en-US" sz="1800" b="0" dirty="0">
+                <a:solidFill>
+                  <a:srgbClr val="000000"/>
+                </a:solidFill>
+                <a:latin typeface="Aptos"/>
+              </a:rPr>
+              <a:t>Establish target relationship discovery rates (e.g. number or percentage of valid relationships identified), or</a:t>
+            </a:r>
+            <a:endParaRPr lang="en-US" sz="1800" b="0">
+              <a:solidFill>
+                <a:srgbClr val="000000"/>
+              </a:solidFill>
+              <a:latin typeface="Aptos"/>
+            </a:endParaRPr>
+          </a:p>
+          <a:p>
+            <a:pPr marL="419100" lvl="1" indent="-241300">
+              <a:lnSpc>
+                <a:spcPct val="100000"/>
+              </a:lnSpc>
+              <a:spcBef>
+                <a:spcPts val="0"/>
+              </a:spcBef>
+              <a:spcAft>
+                <a:spcPts val="0"/>
+              </a:spcAft>
+              <a:buFont typeface="Arial"/>
+              <a:buChar char="✓"/>
+            </a:pPr>
+            <a:r>
+              <a:rPr lang="en-US" sz="1800" b="0" dirty="0">
+                <a:solidFill>
+                  <a:srgbClr val="000000"/>
+                </a:solidFill>
+                <a:latin typeface="Aptos"/>
+              </a:rPr>
+              <a:t>Create a ground-truth dataset to objectively measure journey reconstruction accuracy.</a:t>
+            </a:r>
+            <a:endParaRPr lang="en-US" sz="1800" b="0">
+              <a:solidFill>
+                <a:srgbClr val="000000"/>
+              </a:solidFill>
+              <a:latin typeface="Aptos"/>
+            </a:endParaRPr>
+          </a:p>
+        </p:txBody>
+      </p:sp>
+      <p:sp>
+        <p:nvSpPr>
+          <p:cNvPr id="15" name="Restyled section 15"/>
+          <p:cNvSpPr txBox="1"/>
+          <p:nvPr/>
+        </p:nvSpPr>
+        <p:spPr>
+          <a:xfrm>
+            <a:off x="850392" y="4645152"/>
+            <a:ext cx="10451592" cy="420624"/>
+          </a:xfrm>
+          <a:prstGeom prst="rect">
+            <a:avLst/>
+          </a:prstGeom>
+          <a:solidFill>
+            <a:srgbClr val="EAF3FB"/>
+          </a:solidFill>
+          <a:ln>
+            <a:noFill/>
+          </a:ln>
+        </p:spPr>
+        <p:txBody>
+          <a:bodyPr wrap="square" lIns="155448" tIns="0" rIns="155448" bIns="0" anchor="ctr">
+            <a:noAutofit/>
+          </a:bodyPr>
+          <a:lstStyle/>
+          <a:p>
+            <a:pPr marL="0" indent="0">
+              <a:lnSpc>
+                <a:spcPct val="106000"/>
+              </a:lnSpc>
+              <a:spcBef>
+                <a:spcPts val="0"/>
+              </a:spcBef>
+              <a:spcAft>
+                <a:spcPts val="0"/>
+              </a:spcAft>
+              <a:buNone/>
+            </a:pPr>
+            <a:r>
+              <a:rPr lang="en-US" sz="2400" b="1">
+                <a:solidFill>
+                  <a:srgbClr val="002869"/>
+                </a:solidFill>
+                <a:latin typeface="Aptos"/>
+              </a:rPr>
+              <a:t>Incorporate stakeholder feedback and refine the solution</a:t>
+            </a:r>
+          </a:p>
+        </p:txBody>
+      </p:sp>
+      <p:sp>
+        <p:nvSpPr>
+          <p:cNvPr id="16" name="Restyled section 16"/>
+          <p:cNvSpPr txBox="1"/>
+          <p:nvPr/>
+        </p:nvSpPr>
+        <p:spPr>
+          <a:xfrm>
+            <a:off x="1005840" y="5193792"/>
+            <a:ext cx="10296144" cy="1132484"/>
+          </a:xfrm>
+          <a:prstGeom prst="rect">
+            <a:avLst/>
+          </a:prstGeom>
+          <a:noFill/>
+        </p:spPr>
+        <p:txBody>
+          <a:bodyPr wrap="square" lIns="0" tIns="0" rIns="0" bIns="0">
+            <a:noAutofit/>
+          </a:bodyPr>
+          <a:lstStyle/>
+          <a:p>
+            <a:pPr marL="254000" lvl="0" indent="-228600">
+              <a:lnSpc>
+                <a:spcPct val="106000"/>
+              </a:lnSpc>
+              <a:spcBef>
+                <a:spcPts val="0"/>
+              </a:spcBef>
+              <a:spcAft>
+                <a:spcPts val="700"/>
+              </a:spcAft>
+              <a:buFont typeface="Aptos"/>
+              <a:buChar char="•"/>
+            </a:pPr>
+            <a:r>
+              <a:rPr lang="en-US" sz="1900" b="0">
+                <a:solidFill>
+                  <a:srgbClr val="000000"/>
+                </a:solidFill>
+                <a:latin typeface="Aptos"/>
+              </a:rPr>
+              <a:t>Use labeled validation data to support semi-supervised learning and refining the matching rules.</a:t>
+            </a:r>
+          </a:p>
+          <a:p>
+            <a:pPr marL="254000" lvl="0" indent="-228600">
+              <a:lnSpc>
+                <a:spcPct val="106000"/>
+              </a:lnSpc>
+              <a:spcBef>
+                <a:spcPts val="0"/>
+              </a:spcBef>
+              <a:spcAft>
+                <a:spcPts val="700"/>
+              </a:spcAft>
+              <a:buFont typeface="Aptos"/>
+              <a:buChar char="•"/>
+            </a:pPr>
+            <a:r>
+              <a:rPr lang="en-US" sz="1900" b="0">
+                <a:solidFill>
+                  <a:srgbClr val="000000"/>
+                </a:solidFill>
+                <a:latin typeface="Aptos"/>
+              </a:rPr>
+              <a:t>Find more potential journey links by including any previously excluding record pairs.</a:t>
+            </a:r>
+          </a:p>
+          <a:p>
+            <a:pPr marL="254000" lvl="0" indent="-228600">
+              <a:lnSpc>
+                <a:spcPct val="106000"/>
+              </a:lnSpc>
+              <a:spcBef>
+                <a:spcPts val="0"/>
+              </a:spcBef>
+              <a:spcAft>
+                <a:spcPts val="0"/>
+              </a:spcAft>
+              <a:buFont typeface="Aptos"/>
+              <a:buChar char="•"/>
+            </a:pPr>
+            <a:r>
+              <a:rPr lang="en-US" sz="1900" b="0">
+                <a:solidFill>
+                  <a:srgbClr val="000000"/>
+                </a:solidFill>
+                <a:latin typeface="Aptos"/>
+              </a:rPr>
+              <a:t>Use company alias mapping to link alternative company names to the same account.</a:t>
+            </a:r>
+          </a:p>
+        </p:txBody>
+      </p:sp>
+    </p:spTree>
+    <p:extLst>
+      <p:ext uri="{BB962C8B-B14F-4D97-AF65-F5344CB8AC3E}">
+        <p14:creationId xmlns:p14="http://schemas.microsoft.com/office/powerpoint/2010/main" val="3300056656"/>
       </p:ext>
     </p:extLst>
   </p:cSld>
